--- a/q1-q2-leistungskurs/01-ladungen-felder-und-induktion/praesentation/01-ladungen-felder-und-induktion_wiederholung.pptx
+++ b/q1-q2-leistungskurs/01-ladungen-felder-und-induktion/praesentation/01-ladungen-felder-und-induktion_wiederholung.pptx
@@ -11,9 +11,11 @@
     <p:sldId id="259" r:id="rId5"/>
     <p:sldId id="260" r:id="rId6"/>
     <p:sldId id="261" r:id="rId7"/>
+    <p:sldId id="262" r:id="rId8"/>
+    <p:sldId id="263" r:id="rId9"/>
   </p:sldIdLst>
   <p:notesMasterIdLst>
-    <p:notesMasterId r:id="rId8"/>
+    <p:notesMasterId r:id="rId10"/>
   </p:notesMasterIdLst>
   <p:sldSz cx="12192000" cy="6858000"/>
   <p:notesSz cx="6858000" cy="12192000"/>
@@ -971,6 +973,182 @@
             <a:fld id="{F7021451-1387-4CA6-816F-3879F97B5CBC}" type="slidenum">
               <a:rPr lang="en-US"/>
               <a:t>6</a:t>
+            </a:fld>
+            <a:endParaRPr lang="en-US"/>
+          </a:p>
+        </p:txBody>
+      </p:sp>
+    </p:spTree>
+    <p:extLst>
+      <p:ext uri="{BB962C8B-B14F-4D97-AF65-F5344CB8AC3E}">
+        <p14:creationId xmlns:p14="http://schemas.microsoft.com/office/powerpoint/2010/main" val="1024086991"/>
+      </p:ext>
+    </p:extLst>
+  </p:cSld>
+  <p:clrMapOvr>
+    <a:masterClrMapping/>
+  </p:clrMapOvr>
+</p:notes>
+</file>
+
+<file path=ppt/notesSlides/notesSlide7.xml><?xml version="1.0" encoding="utf-8"?>
+<p:notes xmlns:a="http://schemas.openxmlformats.org/drawingml/2006/main" xmlns:r="http://schemas.openxmlformats.org/officeDocument/2006/relationships" xmlns:p="http://schemas.openxmlformats.org/presentationml/2006/main">
+  <p:cSld>
+    <p:spTree>
+      <p:nvGrpSpPr>
+        <p:cNvPr id="1" name=""/>
+        <p:cNvGrpSpPr/>
+        <p:nvPr/>
+      </p:nvGrpSpPr>
+      <p:grpSpPr>
+        <a:xfrm>
+          <a:off x="0" y="0"/>
+          <a:ext cx="0" cy="0"/>
+          <a:chOff x="0" y="0"/>
+          <a:chExt cx="0" cy="0"/>
+        </a:xfrm>
+      </p:grpSpPr>
+      <p:sp>
+        <p:nvSpPr>
+          <p:cNvPr id="2" name="Slide Image Placeholder 1"/>
+          <p:cNvSpPr>
+            <a:spLocks noGrp="1" noRot="1" noChangeAspect="1"/>
+          </p:cNvSpPr>
+          <p:nvPr>
+            <p:ph type="sldImg"/>
+          </p:nvPr>
+        </p:nvSpPr>
+        <p:spPr/>
+      </p:sp>
+      <p:sp>
+        <p:nvSpPr>
+          <p:cNvPr id="3" name="Notes Placeholder 2"/>
+          <p:cNvSpPr>
+            <a:spLocks noGrp="1"/>
+          </p:cNvSpPr>
+          <p:nvPr>
+            <p:ph type="body" idx="1"/>
+          </p:nvPr>
+        </p:nvSpPr>
+        <p:spPr/>
+        <p:txBody>
+          <a:bodyPr/>
+          <a:lstStyle/>
+          <a:p>
+            <a:r>
+              <a:rPr lang="en-US" dirty="0"/>
+              <a:t/>
+            </a:r>
+            <a:endParaRPr lang="en-US" dirty="0"/>
+          </a:p>
+        </p:txBody>
+      </p:sp>
+      <p:sp>
+        <p:nvSpPr>
+          <p:cNvPr id="4" name="Slide Number Placeholder 3"/>
+          <p:cNvSpPr>
+            <a:spLocks noGrp="1"/>
+          </p:cNvSpPr>
+          <p:nvPr>
+            <p:ph type="sldNum" sz="quarter" idx="10"/>
+          </p:nvPr>
+        </p:nvSpPr>
+        <p:spPr/>
+        <p:txBody>
+          <a:bodyPr/>
+          <a:lstStyle/>
+          <a:p>
+            <a:fld id="{F7021451-1387-4CA6-816F-3879F97B5CBC}" type="slidenum">
+              <a:rPr lang="en-US"/>
+              <a:t>7</a:t>
+            </a:fld>
+            <a:endParaRPr lang="en-US"/>
+          </a:p>
+        </p:txBody>
+      </p:sp>
+    </p:spTree>
+    <p:extLst>
+      <p:ext uri="{BB962C8B-B14F-4D97-AF65-F5344CB8AC3E}">
+        <p14:creationId xmlns:p14="http://schemas.microsoft.com/office/powerpoint/2010/main" val="1024086991"/>
+      </p:ext>
+    </p:extLst>
+  </p:cSld>
+  <p:clrMapOvr>
+    <a:masterClrMapping/>
+  </p:clrMapOvr>
+</p:notes>
+</file>
+
+<file path=ppt/notesSlides/notesSlide8.xml><?xml version="1.0" encoding="utf-8"?>
+<p:notes xmlns:a="http://schemas.openxmlformats.org/drawingml/2006/main" xmlns:r="http://schemas.openxmlformats.org/officeDocument/2006/relationships" xmlns:p="http://schemas.openxmlformats.org/presentationml/2006/main">
+  <p:cSld>
+    <p:spTree>
+      <p:nvGrpSpPr>
+        <p:cNvPr id="1" name=""/>
+        <p:cNvGrpSpPr/>
+        <p:nvPr/>
+      </p:nvGrpSpPr>
+      <p:grpSpPr>
+        <a:xfrm>
+          <a:off x="0" y="0"/>
+          <a:ext cx="0" cy="0"/>
+          <a:chOff x="0" y="0"/>
+          <a:chExt cx="0" cy="0"/>
+        </a:xfrm>
+      </p:grpSpPr>
+      <p:sp>
+        <p:nvSpPr>
+          <p:cNvPr id="2" name="Slide Image Placeholder 1"/>
+          <p:cNvSpPr>
+            <a:spLocks noGrp="1" noRot="1" noChangeAspect="1"/>
+          </p:cNvSpPr>
+          <p:nvPr>
+            <p:ph type="sldImg"/>
+          </p:nvPr>
+        </p:nvSpPr>
+        <p:spPr/>
+      </p:sp>
+      <p:sp>
+        <p:nvSpPr>
+          <p:cNvPr id="3" name="Notes Placeholder 2"/>
+          <p:cNvSpPr>
+            <a:spLocks noGrp="1"/>
+          </p:cNvSpPr>
+          <p:nvPr>
+            <p:ph type="body" idx="1"/>
+          </p:nvPr>
+        </p:nvSpPr>
+        <p:spPr/>
+        <p:txBody>
+          <a:bodyPr/>
+          <a:lstStyle/>
+          <a:p>
+            <a:r>
+              <a:rPr lang="en-US" dirty="0"/>
+              <a:t/>
+            </a:r>
+            <a:endParaRPr lang="en-US" dirty="0"/>
+          </a:p>
+        </p:txBody>
+      </p:sp>
+      <p:sp>
+        <p:nvSpPr>
+          <p:cNvPr id="4" name="Slide Number Placeholder 3"/>
+          <p:cNvSpPr>
+            <a:spLocks noGrp="1"/>
+          </p:cNvSpPr>
+          <p:nvPr>
+            <p:ph type="sldNum" sz="quarter" idx="10"/>
+          </p:nvPr>
+        </p:nvSpPr>
+        <p:spPr/>
+        <p:txBody>
+          <a:bodyPr/>
+          <a:lstStyle/>
+          <a:p>
+            <a:fld id="{F7021451-1387-4CA6-816F-3879F97B5CBC}" type="slidenum">
+              <a:rPr lang="en-US"/>
+              <a:t>8</a:t>
             </a:fld>
             <a:endParaRPr lang="en-US"/>
           </a:p>
@@ -1302,7 +1480,7 @@
     <p:bg>
       <p:bgPr>
         <a:solidFill>
-          <a:srgbClr val="16324F"/>
+          <a:srgbClr val="17324D"/>
         </a:solidFill>
       </p:bgPr>
     </p:bg>
@@ -1328,18 +1506,20 @@
         </p:nvSpPr>
         <p:spPr>
           <a:xfrm>
-            <a:off x="0" y="0"/>
-            <a:ext cx="12191695" cy="6858000"/>
-          </a:xfrm>
-          <a:prstGeom prst="rect">
+            <a:off x="8412480" y="-1143000"/>
+            <a:ext cx="5303520" cy="5303520"/>
+          </a:xfrm>
+          <a:prstGeom prst="ellipse">
             <a:avLst/>
           </a:prstGeom>
           <a:solidFill>
-            <a:srgbClr val="16324F"/>
+            <a:srgbClr val="4C88C2">
+              <a:alpha val="88000"/>
+            </a:srgbClr>
           </a:solidFill>
           <a:ln w="12700">
             <a:solidFill>
-              <a:srgbClr val="16324F">
+              <a:srgbClr val="4C88C2">
                 <a:alpha val="0"/>
               </a:srgbClr>
             </a:solidFill>
@@ -1354,45 +1534,16 @@
           <p:nvPr/>
         </p:nvSpPr>
         <p:spPr>
-          <a:xfrm rot="1500000">
-            <a:off x="7498080" y="-914400"/>
-            <a:ext cx="5943600" cy="5943600"/>
-          </a:xfrm>
-          <a:prstGeom prst="arc">
-            <a:avLst/>
-          </a:prstGeom>
-          <a:solidFill>
-            <a:srgbClr val="2F6FAD">
-              <a:alpha val="84000"/>
-            </a:srgbClr>
-          </a:solidFill>
-          <a:ln w="12700">
-            <a:solidFill>
-              <a:srgbClr val="2F6FAD">
-                <a:alpha val="0"/>
-              </a:srgbClr>
-            </a:solidFill>
-            <a:prstDash val="solid"/>
-          </a:ln>
-        </p:spPr>
-      </p:sp>
-      <p:sp>
-        <p:nvSpPr>
-          <p:cNvPr id="4" name="Shape 2"/>
-          <p:cNvSpPr/>
-          <p:nvPr/>
-        </p:nvSpPr>
-        <p:spPr>
-          <a:xfrm>
-            <a:off x="9646920" y="4434840"/>
-            <a:ext cx="2468880" cy="2468880"/>
+          <a:xfrm>
+            <a:off x="9829800" y="4251960"/>
+            <a:ext cx="2514600" cy="2514600"/>
           </a:xfrm>
           <a:prstGeom prst="ellipse">
             <a:avLst/>
           </a:prstGeom>
           <a:solidFill>
             <a:srgbClr val="2C7A7B">
-              <a:alpha val="75000"/>
+              <a:alpha val="80000"/>
             </a:srgbClr>
           </a:solidFill>
           <a:ln w="12700">
@@ -1407,13 +1558,13 @@
       </p:sp>
       <p:sp>
         <p:nvSpPr>
-          <p:cNvPr id="5" name="Shape 3"/>
-          <p:cNvSpPr/>
-          <p:nvPr/>
-        </p:nvSpPr>
-        <p:spPr>
-          <a:xfrm>
-            <a:off x="713232" y="1243584"/>
+          <p:cNvPr id="4" name="Shape 2"/>
+          <p:cNvSpPr/>
+          <p:nvPr/>
+        </p:nvSpPr>
+        <p:spPr>
+          <a:xfrm>
+            <a:off x="731520" y="1261872"/>
             <a:ext cx="1051560" cy="0"/>
           </a:xfrm>
           <a:prstGeom prst="line">
@@ -1422,22 +1573,22 @@
           <a:noFill/>
           <a:ln w="50800">
             <a:solidFill>
-              <a:srgbClr val="6FB4E5"/>
-            </a:solidFill>
-            <a:prstDash val="solid"/>
-          </a:ln>
-        </p:spPr>
-      </p:sp>
-      <p:sp>
-        <p:nvSpPr>
-          <p:cNvPr id="6" name="Text 4"/>
-          <p:cNvSpPr/>
-          <p:nvPr/>
-        </p:nvSpPr>
-        <p:spPr>
-          <a:xfrm>
-            <a:off x="713232" y="658368"/>
-            <a:ext cx="4023360" cy="310896"/>
+              <a:srgbClr val="6DB2E3"/>
+            </a:solidFill>
+            <a:prstDash val="solid"/>
+          </a:ln>
+        </p:spPr>
+      </p:sp>
+      <p:sp>
+        <p:nvSpPr>
+          <p:cNvPr id="5" name="Text 3"/>
+          <p:cNvSpPr/>
+          <p:nvPr/>
+        </p:nvSpPr>
+        <p:spPr>
+          <a:xfrm>
+            <a:off x="731520" y="658368"/>
+            <a:ext cx="3931920" cy="274320"/>
           </a:xfrm>
           <a:prstGeom prst="rect">
             <a:avLst/>
@@ -1455,9 +1606,9 @@
               <a:buNone/>
             </a:pPr>
             <a:r>
-              <a:rPr lang="en-US" sz="1200" b="1" spc="160" kern="0" dirty="0">
-                <a:solidFill>
-                  <a:srgbClr val="A9CDE9"/>
+              <a:rPr lang="en-US" sz="1200" b="1" spc="140" kern="0" dirty="0">
+                <a:solidFill>
+                  <a:srgbClr val="B8D4E8"/>
                 </a:solidFill>
                 <a:latin typeface="Aptos" pitchFamily="34" charset="0"/>
                 <a:ea typeface="Aptos" pitchFamily="34" charset="-122"/>
@@ -1471,14 +1622,14 @@
       </p:sp>
       <p:sp>
         <p:nvSpPr>
-          <p:cNvPr id="7" name="Text 5"/>
-          <p:cNvSpPr/>
-          <p:nvPr/>
-        </p:nvSpPr>
-        <p:spPr>
-          <a:xfrm>
-            <a:off x="713232" y="1444752"/>
-            <a:ext cx="8686800" cy="1554480"/>
+          <p:cNvPr id="6" name="Text 4"/>
+          <p:cNvSpPr/>
+          <p:nvPr/>
+        </p:nvSpPr>
+        <p:spPr>
+          <a:xfrm>
+            <a:off x="731520" y="1508760"/>
+            <a:ext cx="8641080" cy="1417320"/>
           </a:xfrm>
           <a:prstGeom prst="rect">
             <a:avLst/>
@@ -1512,14 +1663,14 @@
       </p:sp>
       <p:sp>
         <p:nvSpPr>
-          <p:cNvPr id="8" name="Text 6"/>
-          <p:cNvSpPr/>
-          <p:nvPr/>
-        </p:nvSpPr>
-        <p:spPr>
-          <a:xfrm>
-            <a:off x="749808" y="3346704"/>
-            <a:ext cx="7132320" cy="411480"/>
+          <p:cNvPr id="7" name="Text 5"/>
+          <p:cNvSpPr/>
+          <p:nvPr/>
+        </p:nvSpPr>
+        <p:spPr>
+          <a:xfrm>
+            <a:off x="749808" y="3246120"/>
+            <a:ext cx="6309360" cy="393192"/>
           </a:xfrm>
           <a:prstGeom prst="rect">
             <a:avLst/>
@@ -1537,39 +1688,39 @@
               <a:buNone/>
             </a:pPr>
             <a:r>
-              <a:rPr lang="en-US" sz="1900" dirty="0">
-                <a:solidFill>
-                  <a:srgbClr val="DCEAF5"/>
-                </a:solidFill>
-                <a:latin typeface="Aptos" pitchFamily="34" charset="0"/>
-                <a:ea typeface="Aptos" pitchFamily="34" charset="-122"/>
-                <a:cs typeface="Aptos" pitchFamily="34" charset="-120"/>
-              </a:rPr>
-              <a:t>Fortlaufende Wiederholungspräsentation</a:t>
-            </a:r>
-            <a:endParaRPr lang="en-US" sz="1900" dirty="0"/>
-          </a:p>
-        </p:txBody>
-      </p:sp>
-      <p:sp>
-        <p:nvSpPr>
-          <p:cNvPr id="9" name="Text 7"/>
-          <p:cNvSpPr/>
-          <p:nvPr/>
-        </p:nvSpPr>
-        <p:spPr>
-          <a:xfrm>
-            <a:off x="749808" y="3840480"/>
-            <a:ext cx="6949440" cy="749808"/>
-          </a:xfrm>
-          <a:prstGeom prst="rect">
-            <a:avLst/>
-          </a:prstGeom>
-          <a:noFill/>
-          <a:ln/>
-        </p:spPr>
-        <p:txBody>
-          <a:bodyPr wrap="square" lIns="0" tIns="0" rIns="0" bIns="0" rtlCol="0" anchor="t">
+              <a:rPr lang="en-US" sz="2000" dirty="0">
+                <a:solidFill>
+                  <a:srgbClr val="E5F0F7"/>
+                </a:solidFill>
+                <a:latin typeface="Aptos" pitchFamily="34" charset="0"/>
+                <a:ea typeface="Aptos" pitchFamily="34" charset="-122"/>
+                <a:cs typeface="Aptos" pitchFamily="34" charset="-120"/>
+              </a:rPr>
+              <a:t>KLP-basierte Wiederholung</a:t>
+            </a:r>
+            <a:endParaRPr lang="en-US" sz="2000" dirty="0"/>
+          </a:p>
+        </p:txBody>
+      </p:sp>
+      <p:sp>
+        <p:nvSpPr>
+          <p:cNvPr id="8" name="Text 6"/>
+          <p:cNvSpPr/>
+          <p:nvPr/>
+        </p:nvSpPr>
+        <p:spPr>
+          <a:xfrm>
+            <a:off x="749808" y="3776472"/>
+            <a:ext cx="7132320" cy="493776"/>
+          </a:xfrm>
+          <a:prstGeom prst="rect">
+            <a:avLst/>
+          </a:prstGeom>
+          <a:noFill/>
+          <a:ln/>
+        </p:spPr>
+        <p:txBody>
+          <a:bodyPr wrap="square" lIns="0" tIns="0" rIns="0" bIns="0" rtlCol="0" anchor="ctr">
             <a:normAutofit/>
           </a:bodyPr>
           <a:lstStyle/>
@@ -1580,13 +1731,13 @@
             <a:r>
               <a:rPr lang="en-US" sz="1500" dirty="0">
                 <a:solidFill>
-                  <a:srgbClr val="BFD3E3"/>
-                </a:solidFill>
-                <a:latin typeface="Aptos" pitchFamily="34" charset="0"/>
-                <a:ea typeface="Aptos" pitchFamily="34" charset="-122"/>
-                <a:cs typeface="Aptos" pitchFamily="34" charset="-120"/>
-              </a:rPr>
-              <a:t>Ein lebendes Dokument: Nach jeder Stunde wächst der Rückblick um eine neue Folie.</a:t>
+                  <a:srgbClr val="BED2E2"/>
+                </a:solidFill>
+                <a:latin typeface="Aptos" pitchFamily="34" charset="0"/>
+                <a:ea typeface="Aptos" pitchFamily="34" charset="-122"/>
+                <a:cs typeface="Aptos" pitchFamily="34" charset="-120"/>
+              </a:rPr>
+              <a:t>Vom sicheren Abruf über einfache Anwendungen bis zum Transfer.</a:t>
             </a:r>
             <a:endParaRPr lang="en-US" sz="1500" dirty="0"/>
           </a:p>
@@ -1594,22 +1745,22 @@
       </p:sp>
       <p:sp>
         <p:nvSpPr>
-          <p:cNvPr id="10" name="Shape 8"/>
-          <p:cNvSpPr/>
-          <p:nvPr/>
-        </p:nvSpPr>
-        <p:spPr>
-          <a:xfrm>
-            <a:off x="749808" y="5074920"/>
-            <a:ext cx="4114800" cy="566928"/>
+          <p:cNvPr id="9" name="Shape 7"/>
+          <p:cNvSpPr/>
+          <p:nvPr/>
+        </p:nvSpPr>
+        <p:spPr>
+          <a:xfrm>
+            <a:off x="749808" y="4892040"/>
+            <a:ext cx="4617720" cy="658368"/>
           </a:xfrm>
           <a:prstGeom prst="roundRect">
             <a:avLst>
-              <a:gd name="adj" fmla="val 12903"/>
+              <a:gd name="adj" fmla="val 8333"/>
             </a:avLst>
           </a:prstGeom>
           <a:solidFill>
-            <a:srgbClr val="1B405E"/>
+            <a:srgbClr val="1E425F"/>
           </a:solidFill>
           <a:ln w="12700">
             <a:solidFill>
@@ -1621,14 +1772,14 @@
       </p:sp>
       <p:sp>
         <p:nvSpPr>
-          <p:cNvPr id="11" name="Text 9"/>
-          <p:cNvSpPr/>
-          <p:nvPr/>
-        </p:nvSpPr>
-        <p:spPr>
-          <a:xfrm>
-            <a:off x="960120" y="5212080"/>
-            <a:ext cx="3703320" cy="237744"/>
+          <p:cNvPr id="10" name="Text 8"/>
+          <p:cNvSpPr/>
+          <p:nvPr/>
+        </p:nvSpPr>
+        <p:spPr>
+          <a:xfrm>
+            <a:off x="950976" y="5074920"/>
+            <a:ext cx="4206240" cy="228600"/>
           </a:xfrm>
           <a:prstGeom prst="rect">
             <a:avLst/>
@@ -1646,30 +1797,30 @@
               <a:buNone/>
             </a:pPr>
             <a:r>
-              <a:rPr lang="en-US" sz="1150" b="1" dirty="0">
-                <a:solidFill>
-                  <a:srgbClr val="DDEAF3"/>
-                </a:solidFill>
-                <a:latin typeface="Aptos" pitchFamily="34" charset="0"/>
-                <a:ea typeface="Aptos" pitchFamily="34" charset="-122"/>
-                <a:cs typeface="Aptos" pitchFamily="34" charset="-120"/>
-              </a:rPr>
-              <a:t>Kernideen · Begriffe · Beziehungen · Schnellcheck</a:t>
-            </a:r>
-            <a:endParaRPr lang="en-US" sz="1150" dirty="0"/>
-          </a:p>
-        </p:txBody>
-      </p:sp>
-      <p:sp>
-        <p:nvSpPr>
-          <p:cNvPr id="12" name="Text 10"/>
-          <p:cNvSpPr/>
-          <p:nvPr/>
-        </p:nvSpPr>
-        <p:spPr>
-          <a:xfrm>
-            <a:off x="749808" y="6236208"/>
-            <a:ext cx="2286000" cy="274320"/>
+              <a:rPr lang="en-US" sz="1170" b="1" dirty="0">
+                <a:solidFill>
+                  <a:srgbClr val="E2EEF6"/>
+                </a:solidFill>
+                <a:latin typeface="Aptos" pitchFamily="34" charset="0"/>
+                <a:ea typeface="Aptos" pitchFamily="34" charset="-122"/>
+                <a:cs typeface="Aptos" pitchFamily="34" charset="-120"/>
+              </a:rPr>
+              <a:t>1  Abrufen    2  Verstehen    3  Rechnen    4  Transfer</a:t>
+            </a:r>
+            <a:endParaRPr lang="en-US" sz="1170" dirty="0"/>
+          </a:p>
+        </p:txBody>
+      </p:sp>
+      <p:sp>
+        <p:nvSpPr>
+          <p:cNvPr id="11" name="Text 9"/>
+          <p:cNvSpPr/>
+          <p:nvPr/>
+        </p:nvSpPr>
+        <p:spPr>
+          <a:xfrm>
+            <a:off x="749808" y="6217920"/>
+            <a:ext cx="3474720" cy="219456"/>
           </a:xfrm>
           <a:prstGeom prst="rect">
             <a:avLst/>
@@ -1687,17 +1838,17 @@
               <a:buNone/>
             </a:pPr>
             <a:r>
-              <a:rPr lang="en-US" sz="1000" dirty="0">
-                <a:solidFill>
-                  <a:srgbClr val="A9C1D2"/>
-                </a:solidFill>
-                <a:latin typeface="Aptos" pitchFamily="34" charset="0"/>
-                <a:ea typeface="Aptos" pitchFamily="34" charset="-122"/>
-                <a:cs typeface="Aptos" pitchFamily="34" charset="-120"/>
-              </a:rPr>
-              <a:t>Physik NRW</a:t>
-            </a:r>
-            <a:endParaRPr lang="en-US" sz="1000" dirty="0"/>
+              <a:rPr lang="en-US" sz="970" dirty="0">
+                <a:solidFill>
+                  <a:srgbClr val="A9C2D4"/>
+                </a:solidFill>
+                <a:latin typeface="Aptos" pitchFamily="34" charset="0"/>
+                <a:ea typeface="Aptos" pitchFamily="34" charset="-122"/>
+                <a:cs typeface="Aptos" pitchFamily="34" charset="-120"/>
+              </a:rPr>
+              <a:t>KLP-Recherche: 2026-09-12</a:t>
+            </a:r>
+            <a:endParaRPr lang="en-US" sz="970" dirty="0"/>
           </a:p>
         </p:txBody>
       </p:sp>
@@ -1742,7 +1893,7 @@
         <p:spPr>
           <a:xfrm>
             <a:off x="0" y="0"/>
-            <a:ext cx="12191695" cy="164592"/>
+            <a:ext cx="12191695" cy="137160"/>
           </a:xfrm>
           <a:prstGeom prst="rect">
             <a:avLst/>
@@ -1768,8 +1919,8 @@
         </p:nvSpPr>
         <p:spPr>
           <a:xfrm>
-            <a:off x="566928" y="320040"/>
-            <a:ext cx="2423160" cy="310896"/>
+            <a:off x="566928" y="301752"/>
+            <a:ext cx="3383280" cy="237744"/>
           </a:xfrm>
           <a:prstGeom prst="rect">
             <a:avLst/>
@@ -1787,7 +1938,7 @@
               <a:buNone/>
             </a:pPr>
             <a:r>
-              <a:rPr lang="en-US" sz="1050" b="1" spc="130" kern="0" dirty="0">
+              <a:rPr lang="en-US" sz="1000" b="1" spc="120" kern="0" dirty="0">
                 <a:solidFill>
                   <a:srgbClr val="2F6FAD"/>
                 </a:solidFill>
@@ -1795,9 +1946,9 @@
                 <a:ea typeface="Aptos" pitchFamily="34" charset="-122"/>
                 <a:cs typeface="Aptos" pitchFamily="34" charset="-120"/>
               </a:rPr>
-              <a:t>ORIENTIERUNG</a:t>
-            </a:r>
-            <a:endParaRPr lang="en-US" sz="1050" dirty="0"/>
+              <a:t>KLP-KOMPASS</a:t>
+            </a:r>
+            <a:endParaRPr lang="en-US" sz="1000" dirty="0"/>
           </a:p>
         </p:txBody>
       </p:sp>
@@ -1809,8 +1960,8 @@
         </p:nvSpPr>
         <p:spPr>
           <a:xfrm>
-            <a:off x="566928" y="658368"/>
-            <a:ext cx="10927080" cy="640080"/>
+            <a:off x="566928" y="621792"/>
+            <a:ext cx="10698480" cy="548640"/>
           </a:xfrm>
           <a:prstGeom prst="rect">
             <a:avLst/>
@@ -1828,17 +1979,17 @@
               <a:buNone/>
             </a:pPr>
             <a:r>
-              <a:rPr lang="en-US" sz="2800" b="1" dirty="0">
-                <a:solidFill>
-                  <a:srgbClr val="16324F"/>
-                </a:solidFill>
-                <a:latin typeface="Aptos" pitchFamily="34" charset="0"/>
-                <a:ea typeface="Aptos" pitchFamily="34" charset="-122"/>
-                <a:cs typeface="Aptos" pitchFamily="34" charset="-120"/>
-              </a:rPr>
-              <a:t>Das bleibt hängen</a:t>
-            </a:r>
-            <a:endParaRPr lang="en-US" sz="2800" dirty="0"/>
+              <a:rPr lang="en-US" sz="2700" b="1" dirty="0">
+                <a:solidFill>
+                  <a:srgbClr val="17324D"/>
+                </a:solidFill>
+                <a:latin typeface="Aptos" pitchFamily="34" charset="0"/>
+                <a:ea typeface="Aptos" pitchFamily="34" charset="-122"/>
+                <a:cs typeface="Aptos" pitchFamily="34" charset="-120"/>
+              </a:rPr>
+              <a:t>Inhaltsfeld Ladungen, Felder und Induktion (LK)</a:t>
+            </a:r>
+            <a:endParaRPr lang="en-US" sz="2700" dirty="0"/>
           </a:p>
         </p:txBody>
       </p:sp>
@@ -1850,8 +2001,8 @@
         </p:nvSpPr>
         <p:spPr>
           <a:xfrm>
-            <a:off x="9784080" y="338328"/>
-            <a:ext cx="1737360" cy="246888"/>
+            <a:off x="9509760" y="310896"/>
+            <a:ext cx="2057400" cy="219456"/>
           </a:xfrm>
           <a:prstGeom prst="rect">
             <a:avLst/>
@@ -1869,9 +2020,9 @@
               <a:buNone/>
             </a:pPr>
             <a:r>
-              <a:rPr lang="en-US" sz="1050" b="1" dirty="0">
-                <a:solidFill>
-                  <a:srgbClr val="5B6B7B"/>
+              <a:rPr lang="en-US" sz="1020" b="1" dirty="0">
+                <a:solidFill>
+                  <a:srgbClr val="607080"/>
                 </a:solidFill>
                 <a:latin typeface="Aptos" pitchFamily="34" charset="0"/>
                 <a:ea typeface="Aptos" pitchFamily="34" charset="-122"/>
@@ -1879,7 +2030,7 @@
               </a:rPr>
               <a:t>Q1/Q2 Leistungskurs</a:t>
             </a:r>
-            <a:endParaRPr lang="en-US" sz="1050" dirty="0"/>
+            <a:endParaRPr lang="en-US" sz="1020" dirty="0"/>
           </a:p>
         </p:txBody>
       </p:sp>
@@ -1891,7 +2042,7 @@
         </p:nvSpPr>
         <p:spPr>
           <a:xfrm>
-            <a:off x="566928" y="1353312"/>
+            <a:off x="566928" y="1280160"/>
             <a:ext cx="11045952" cy="0"/>
           </a:xfrm>
           <a:prstGeom prst="line">
@@ -1900,7 +2051,7 @@
           <a:noFill/>
           <a:ln w="12700">
             <a:solidFill>
-              <a:srgbClr val="C8D5E2"/>
+              <a:srgbClr val="CDD8E2"/>
             </a:solidFill>
             <a:prstDash val="solid"/>
           </a:ln>
@@ -1914,8 +2065,8 @@
         </p:nvSpPr>
         <p:spPr>
           <a:xfrm>
-            <a:off x="566928" y="6528816"/>
-            <a:ext cx="5303520" cy="201168"/>
+            <a:off x="566928" y="6519672"/>
+            <a:ext cx="5212080" cy="182880"/>
           </a:xfrm>
           <a:prstGeom prst="rect">
             <a:avLst/>
@@ -1933,9 +2084,9 @@
               <a:buNone/>
             </a:pPr>
             <a:r>
-              <a:rPr lang="en-US" sz="950" dirty="0">
-                <a:solidFill>
-                  <a:srgbClr val="5B6B7B"/>
+              <a:rPr lang="en-US" sz="900" dirty="0">
+                <a:solidFill>
+                  <a:srgbClr val="607080"/>
                 </a:solidFill>
                 <a:latin typeface="Aptos" pitchFamily="34" charset="0"/>
                 <a:ea typeface="Aptos" pitchFamily="34" charset="-122"/>
@@ -1943,7 +2094,7 @@
               </a:rPr>
               <a:t>Fortlaufende Wiederholung · Physik NRW</a:t>
             </a:r>
-            <a:endParaRPr lang="en-US" sz="950" dirty="0"/>
+            <a:endParaRPr lang="en-US" sz="900" dirty="0"/>
           </a:p>
         </p:txBody>
       </p:sp>
@@ -1955,8 +2106,8 @@
         </p:nvSpPr>
         <p:spPr>
           <a:xfrm>
-            <a:off x="11109960" y="6528816"/>
-            <a:ext cx="502920" cy="201168"/>
+            <a:off x="11137392" y="6519672"/>
+            <a:ext cx="457200" cy="182880"/>
           </a:xfrm>
           <a:prstGeom prst="rect">
             <a:avLst/>
@@ -1974,9 +2125,9 @@
               <a:buNone/>
             </a:pPr>
             <a:r>
-              <a:rPr lang="en-US" sz="950" dirty="0">
-                <a:solidFill>
-                  <a:srgbClr val="5B6B7B"/>
+              <a:rPr lang="en-US" sz="900" dirty="0">
+                <a:solidFill>
+                  <a:srgbClr val="607080"/>
                 </a:solidFill>
                 <a:latin typeface="Aptos" pitchFamily="34" charset="0"/>
                 <a:ea typeface="Aptos" pitchFamily="34" charset="-122"/>
@@ -1984,7 +2135,7 @@
               </a:rPr>
               <a:t>2</a:t>
             </a:r>
-            <a:endParaRPr lang="en-US" sz="950" dirty="0"/>
+            <a:endParaRPr lang="en-US" sz="900" dirty="0"/>
           </a:p>
         </p:txBody>
       </p:sp>
@@ -1996,12 +2147,12 @@
         </p:nvSpPr>
         <p:spPr>
           <a:xfrm>
-            <a:off x="658368" y="1645920"/>
-            <a:ext cx="5413248" cy="1161288"/>
+            <a:off x="658368" y="1600200"/>
+            <a:ext cx="6492240" cy="4297680"/>
           </a:xfrm>
           <a:prstGeom prst="roundRect">
             <a:avLst>
-              <a:gd name="adj" fmla="val 5512"/>
+              <a:gd name="adj" fmla="val 1277"/>
             </a:avLst>
           </a:prstGeom>
           <a:solidFill>
@@ -2009,10 +2160,17 @@
           </a:solidFill>
           <a:ln w="12700">
             <a:solidFill>
-              <a:srgbClr val="C8D5E2"/>
-            </a:solidFill>
-            <a:prstDash val="solid"/>
-          </a:ln>
+              <a:srgbClr val="CDD8E2"/>
+            </a:solidFill>
+            <a:prstDash val="solid"/>
+          </a:ln>
+          <a:effectLst>
+            <a:outerShdw sx="100000" sy="100000" kx="0" ky="0" algn="bl" rotWithShape="0" blurRad="12700" dist="50800" dir="2700000">
+              <a:srgbClr val="A8B8C7">
+                <a:alpha val="11000"/>
+              </a:srgbClr>
+            </a:outerShdw>
+          </a:effectLst>
         </p:spPr>
       </p:sp>
       <p:sp>
@@ -2023,14 +2181,14 @@
         </p:nvSpPr>
         <p:spPr>
           <a:xfrm>
-            <a:off x="859536" y="1920240"/>
-            <a:ext cx="576072" cy="576072"/>
-          </a:xfrm>
-          <a:prstGeom prst="ellipse">
+            <a:off x="658368" y="1600200"/>
+            <a:ext cx="68580" cy="4297680"/>
+          </a:xfrm>
+          <a:prstGeom prst="rect">
             <a:avLst/>
           </a:prstGeom>
           <a:solidFill>
-            <a:srgbClr val="EAF3FB"/>
+            <a:srgbClr val="2F6FAD"/>
           </a:solidFill>
           <a:ln w="12700">
             <a:solidFill>
@@ -2050,58 +2208,17 @@
         </p:nvSpPr>
         <p:spPr>
           <a:xfrm>
-            <a:off x="859536" y="1929384"/>
-            <a:ext cx="576072" cy="530352"/>
-          </a:xfrm>
-          <a:prstGeom prst="rect">
-            <a:avLst/>
-          </a:prstGeom>
-          <a:noFill/>
-          <a:ln/>
-        </p:spPr>
-        <p:txBody>
-          <a:bodyPr wrap="square" lIns="0" tIns="0" rIns="0" bIns="0" rtlCol="0" anchor="ctr">
-            <a:normAutofit/>
-          </a:bodyPr>
-          <a:lstStyle/>
-          <a:p>
-            <a:pPr algn="ctr" indent="0" marL="0">
-              <a:buNone/>
-            </a:pPr>
-            <a:r>
-              <a:rPr lang="en-US" sz="1500" b="1" dirty="0">
-                <a:solidFill>
-                  <a:srgbClr val="2F6FAD"/>
-                </a:solidFill>
-                <a:latin typeface="Aptos" pitchFamily="34" charset="0"/>
-                <a:ea typeface="Aptos" pitchFamily="34" charset="-122"/>
-                <a:cs typeface="Aptos" pitchFamily="34" charset="-120"/>
-              </a:rPr>
-              <a:t>1</a:t>
-            </a:r>
-            <a:endParaRPr lang="en-US" sz="1500" dirty="0"/>
-          </a:p>
-        </p:txBody>
-      </p:sp>
-      <p:sp>
-        <p:nvSpPr>
-          <p:cNvPr id="12" name="Text 10"/>
-          <p:cNvSpPr/>
-          <p:nvPr/>
-        </p:nvSpPr>
-        <p:spPr>
-          <a:xfrm>
-            <a:off x="1591056" y="1810512"/>
-            <a:ext cx="4251960" cy="832104"/>
-          </a:xfrm>
-          <a:prstGeom prst="rect">
-            <a:avLst/>
-          </a:prstGeom>
-          <a:noFill/>
-          <a:ln/>
-        </p:spPr>
-        <p:txBody>
-          <a:bodyPr wrap="square" lIns="0" tIns="0" rIns="0" bIns="0" rtlCol="0" anchor="ctr">
+            <a:off x="859536" y="1719072"/>
+            <a:ext cx="6144768" cy="310896"/>
+          </a:xfrm>
+          <a:prstGeom prst="rect">
+            <a:avLst/>
+          </a:prstGeom>
+          <a:noFill/>
+          <a:ln/>
+        </p:spPr>
+        <p:txBody>
+          <a:bodyPr wrap="square" lIns="0" tIns="0" rIns="0" bIns="0" rtlCol="0" anchor="t">
             <a:normAutofit/>
           </a:bodyPr>
           <a:lstStyle/>
@@ -2110,7 +2227,49 @@
               <a:buNone/>
             </a:pPr>
             <a:r>
-              <a:rPr lang="en-US" sz="1600" b="1" dirty="0">
+              <a:rPr lang="en-US" sz="1550" b="1" dirty="0">
+                <a:solidFill>
+                  <a:srgbClr val="17324D"/>
+                </a:solidFill>
+                <a:latin typeface="Aptos" pitchFamily="34" charset="0"/>
+                <a:ea typeface="Aptos" pitchFamily="34" charset="-122"/>
+                <a:cs typeface="Aptos" pitchFamily="34" charset="-120"/>
+              </a:rPr>
+              <a:t>Verbindliche fachliche Schwerpunkte</a:t>
+            </a:r>
+            <a:endParaRPr lang="en-US" sz="1550" dirty="0"/>
+          </a:p>
+        </p:txBody>
+      </p:sp>
+      <p:sp>
+        <p:nvSpPr>
+          <p:cNvPr id="12" name="Text 10"/>
+          <p:cNvSpPr/>
+          <p:nvPr/>
+        </p:nvSpPr>
+        <p:spPr>
+          <a:xfrm>
+            <a:off x="859536" y="2093976"/>
+            <a:ext cx="6126480" cy="3675888"/>
+          </a:xfrm>
+          <a:prstGeom prst="rect">
+            <a:avLst/>
+          </a:prstGeom>
+          <a:noFill/>
+          <a:ln/>
+        </p:spPr>
+        <p:txBody>
+          <a:bodyPr wrap="square" lIns="254" tIns="254" rIns="254" bIns="254" rtlCol="0" anchor="t">
+            <a:normAutofit/>
+          </a:bodyPr>
+          <a:lstStyle/>
+          <a:p>
+            <a:pPr marL="165100" indent="-165100">
+              <a:buSzPct val="100000"/>
+              <a:buChar char="•"/>
+            </a:pPr>
+            <a:r>
+              <a:rPr lang="en-US" sz="1500" dirty="0">
                 <a:solidFill>
                   <a:srgbClr val="203040"/>
                 </a:solidFill>
@@ -2118,9 +2277,45 @@
                 <a:ea typeface="Aptos" pitchFamily="34" charset="-122"/>
                 <a:cs typeface="Aptos" pitchFamily="34" charset="-120"/>
               </a:rPr>
-              <a:t>Elektrische Felder, Potentiale und Kondensatoren quantitativ analysieren</a:t>
-            </a:r>
-            <a:endParaRPr lang="en-US" sz="1600" dirty="0"/>
+              <a:t>Elektrische Ladungen/Felder: E, Coulomb, Potential, Spannung, Kondensator/Kapazität; magnetische Felder/B</a:t>
+            </a:r>
+            <a:endParaRPr lang="en-US" sz="1500" dirty="0"/>
+          </a:p>
+          <a:p>
+            <a:pPr marL="165100" indent="-165100">
+              <a:buSzPct val="100000"/>
+              <a:buChar char="•"/>
+            </a:pPr>
+            <a:r>
+              <a:rPr lang="en-US" sz="1500" dirty="0">
+                <a:solidFill>
+                  <a:srgbClr val="203040"/>
+                </a:solidFill>
+                <a:latin typeface="Aptos" pitchFamily="34" charset="0"/>
+                <a:ea typeface="Aptos" pitchFamily="34" charset="-122"/>
+                <a:cs typeface="Aptos" pitchFamily="34" charset="-120"/>
+              </a:rPr>
+              <a:t>Bewegungen in Feldern: Längs-/Querfeld, Lorentzkraft, gekreuzte E- und B-Felder</a:t>
+            </a:r>
+            <a:endParaRPr lang="en-US" sz="1500" dirty="0"/>
+          </a:p>
+          <a:p>
+            <a:pPr marL="165100" indent="-165100">
+              <a:buSzPct val="100000"/>
+              <a:buChar char="•"/>
+            </a:pPr>
+            <a:r>
+              <a:rPr lang="en-US" sz="1500" dirty="0">
+                <a:solidFill>
+                  <a:srgbClr val="203040"/>
+                </a:solidFill>
+                <a:latin typeface="Aptos" pitchFamily="34" charset="0"/>
+                <a:ea typeface="Aptos" pitchFamily="34" charset="-122"/>
+                <a:cs typeface="Aptos" pitchFamily="34" charset="-120"/>
+              </a:rPr>
+              <a:t>Elektromagnetische Induktion: Φ, Induktionsgesetz, Lenz, Selbstinduktion, Induktivität</a:t>
+            </a:r>
+            <a:endParaRPr lang="en-US" sz="1500" dirty="0"/>
           </a:p>
         </p:txBody>
       </p:sp>
@@ -2132,23 +2327,30 @@
         </p:nvSpPr>
         <p:spPr>
           <a:xfrm>
-            <a:off x="6272784" y="1645920"/>
-            <a:ext cx="5257800" cy="1161288"/>
+            <a:off x="7360920" y="1600200"/>
+            <a:ext cx="4160520" cy="2029968"/>
           </a:xfrm>
           <a:prstGeom prst="roundRect">
             <a:avLst>
-              <a:gd name="adj" fmla="val 5512"/>
+              <a:gd name="adj" fmla="val 2703"/>
             </a:avLst>
           </a:prstGeom>
           <a:solidFill>
-            <a:srgbClr val="FFFFFF"/>
+            <a:srgbClr val="E8F4F2"/>
           </a:solidFill>
           <a:ln w="12700">
             <a:solidFill>
-              <a:srgbClr val="C8D5E2"/>
-            </a:solidFill>
-            <a:prstDash val="solid"/>
-          </a:ln>
+              <a:srgbClr val="CDD8E2"/>
+            </a:solidFill>
+            <a:prstDash val="solid"/>
+          </a:ln>
+          <a:effectLst>
+            <a:outerShdw sx="100000" sy="100000" kx="0" ky="0" algn="bl" rotWithShape="0" blurRad="12700" dist="50800" dir="2700000">
+              <a:srgbClr val="A8B8C7">
+                <a:alpha val="11000"/>
+              </a:srgbClr>
+            </a:outerShdw>
+          </a:effectLst>
         </p:spPr>
       </p:sp>
       <p:sp>
@@ -2159,18 +2361,18 @@
         </p:nvSpPr>
         <p:spPr>
           <a:xfrm>
-            <a:off x="6473952" y="1920240"/>
-            <a:ext cx="576072" cy="576072"/>
-          </a:xfrm>
-          <a:prstGeom prst="ellipse">
+            <a:off x="7360920" y="1600200"/>
+            <a:ext cx="68580" cy="2029968"/>
+          </a:xfrm>
+          <a:prstGeom prst="rect">
             <a:avLst/>
           </a:prstGeom>
           <a:solidFill>
-            <a:srgbClr val="EAF3FB"/>
+            <a:srgbClr val="2C7A7B"/>
           </a:solidFill>
           <a:ln w="12700">
             <a:solidFill>
-              <a:srgbClr val="2F6FAD">
+              <a:srgbClr val="2C7A7B">
                 <a:alpha val="0"/>
               </a:srgbClr>
             </a:solidFill>
@@ -2186,58 +2388,17 @@
         </p:nvSpPr>
         <p:spPr>
           <a:xfrm>
-            <a:off x="6473952" y="1929384"/>
-            <a:ext cx="576072" cy="530352"/>
-          </a:xfrm>
-          <a:prstGeom prst="rect">
-            <a:avLst/>
-          </a:prstGeom>
-          <a:noFill/>
-          <a:ln/>
-        </p:spPr>
-        <p:txBody>
-          <a:bodyPr wrap="square" lIns="0" tIns="0" rIns="0" bIns="0" rtlCol="0" anchor="ctr">
-            <a:normAutofit/>
-          </a:bodyPr>
-          <a:lstStyle/>
-          <a:p>
-            <a:pPr algn="ctr" indent="0" marL="0">
-              <a:buNone/>
-            </a:pPr>
-            <a:r>
-              <a:rPr lang="en-US" sz="1500" b="1" dirty="0">
-                <a:solidFill>
-                  <a:srgbClr val="2F6FAD"/>
-                </a:solidFill>
-                <a:latin typeface="Aptos" pitchFamily="34" charset="0"/>
-                <a:ea typeface="Aptos" pitchFamily="34" charset="-122"/>
-                <a:cs typeface="Aptos" pitchFamily="34" charset="-120"/>
-              </a:rPr>
-              <a:t>2</a:t>
-            </a:r>
-            <a:endParaRPr lang="en-US" sz="1500" dirty="0"/>
-          </a:p>
-        </p:txBody>
-      </p:sp>
-      <p:sp>
-        <p:nvSpPr>
-          <p:cNvPr id="16" name="Text 14"/>
-          <p:cNvSpPr/>
-          <p:nvPr/>
-        </p:nvSpPr>
-        <p:spPr>
-          <a:xfrm>
-            <a:off x="7205472" y="1810512"/>
-            <a:ext cx="4096512" cy="832104"/>
-          </a:xfrm>
-          <a:prstGeom prst="rect">
-            <a:avLst/>
-          </a:prstGeom>
-          <a:noFill/>
-          <a:ln/>
-        </p:spPr>
-        <p:txBody>
-          <a:bodyPr wrap="square" lIns="0" tIns="0" rIns="0" bIns="0" rtlCol="0" anchor="ctr">
+            <a:off x="7562088" y="1719072"/>
+            <a:ext cx="3813048" cy="310896"/>
+          </a:xfrm>
+          <a:prstGeom prst="rect">
+            <a:avLst/>
+          </a:prstGeom>
+          <a:noFill/>
+          <a:ln/>
+        </p:spPr>
+        <p:txBody>
+          <a:bodyPr wrap="square" lIns="0" tIns="0" rIns="0" bIns="0" rtlCol="0" anchor="t">
             <a:normAutofit/>
           </a:bodyPr>
           <a:lstStyle/>
@@ -2246,7 +2407,49 @@
               <a:buNone/>
             </a:pPr>
             <a:r>
-              <a:rPr lang="en-US" sz="1600" b="1" dirty="0">
+              <a:rPr lang="en-US" sz="1450" b="1" dirty="0">
+                <a:solidFill>
+                  <a:srgbClr val="17324D"/>
+                </a:solidFill>
+                <a:latin typeface="Aptos" pitchFamily="34" charset="0"/>
+                <a:ea typeface="Aptos" pitchFamily="34" charset="-122"/>
+                <a:cs typeface="Aptos" pitchFamily="34" charset="-120"/>
+              </a:rPr>
+              <a:t>Was du am Ende können sollst</a:t>
+            </a:r>
+            <a:endParaRPr lang="en-US" sz="1450" dirty="0"/>
+          </a:p>
+        </p:txBody>
+      </p:sp>
+      <p:sp>
+        <p:nvSpPr>
+          <p:cNvPr id="16" name="Text 14"/>
+          <p:cNvSpPr/>
+          <p:nvPr/>
+        </p:nvSpPr>
+        <p:spPr>
+          <a:xfrm>
+            <a:off x="7562088" y="2093976"/>
+            <a:ext cx="3794760" cy="1408176"/>
+          </a:xfrm>
+          <a:prstGeom prst="rect">
+            <a:avLst/>
+          </a:prstGeom>
+          <a:noFill/>
+          <a:ln/>
+        </p:spPr>
+        <p:txBody>
+          <a:bodyPr wrap="square" lIns="254" tIns="254" rIns="254" bIns="254" rtlCol="0" anchor="t">
+            <a:normAutofit/>
+          </a:bodyPr>
+          <a:lstStyle/>
+          <a:p>
+            <a:pPr marL="165100" indent="-165100">
+              <a:buSzPct val="100000"/>
+              <a:buChar char="•"/>
+            </a:pPr>
+            <a:r>
+              <a:rPr lang="en-US" sz="1250" dirty="0">
                 <a:solidFill>
                   <a:srgbClr val="203040"/>
                 </a:solidFill>
@@ -2254,9 +2457,63 @@
                 <a:ea typeface="Aptos" pitchFamily="34" charset="-122"/>
                 <a:cs typeface="Aptos" pitchFamily="34" charset="-120"/>
               </a:rPr>
+              <a:t>Elektrische Felder, Potentiale und Kondensatoren quantitativ analysieren</a:t>
+            </a:r>
+            <a:endParaRPr lang="en-US" sz="1250" dirty="0"/>
+          </a:p>
+          <a:p>
+            <a:pPr marL="165100" indent="-165100">
+              <a:buSzPct val="100000"/>
+              <a:buChar char="•"/>
+            </a:pPr>
+            <a:r>
+              <a:rPr lang="en-US" sz="1250" dirty="0">
+                <a:solidFill>
+                  <a:srgbClr val="203040"/>
+                </a:solidFill>
+                <a:latin typeface="Aptos" pitchFamily="34" charset="0"/>
+                <a:ea typeface="Aptos" pitchFamily="34" charset="-122"/>
+                <a:cs typeface="Aptos" pitchFamily="34" charset="-120"/>
+              </a:rPr>
               <a:t>Magnetische Felder und Lorentzkräfte auf bewegte Ladungen anwenden</a:t>
             </a:r>
-            <a:endParaRPr lang="en-US" sz="1600" dirty="0"/>
+            <a:endParaRPr lang="en-US" sz="1250" dirty="0"/>
+          </a:p>
+          <a:p>
+            <a:pPr marL="165100" indent="-165100">
+              <a:buSzPct val="100000"/>
+              <a:buChar char="•"/>
+            </a:pPr>
+            <a:r>
+              <a:rPr lang="en-US" sz="1250" dirty="0">
+                <a:solidFill>
+                  <a:srgbClr val="203040"/>
+                </a:solidFill>
+                <a:latin typeface="Aptos" pitchFamily="34" charset="0"/>
+                <a:ea typeface="Aptos" pitchFamily="34" charset="-122"/>
+                <a:cs typeface="Aptos" pitchFamily="34" charset="-120"/>
+              </a:rPr>
+              <a:t>Bahnbewegungen in Längs-, Quer- und gekreuzten Feldern modellieren</a:t>
+            </a:r>
+            <a:endParaRPr lang="en-US" sz="1250" dirty="0"/>
+          </a:p>
+          <a:p>
+            <a:pPr marL="165100" indent="-165100">
+              <a:buSzPct val="100000"/>
+              <a:buChar char="•"/>
+            </a:pPr>
+            <a:r>
+              <a:rPr lang="en-US" sz="1250" dirty="0">
+                <a:solidFill>
+                  <a:srgbClr val="203040"/>
+                </a:solidFill>
+                <a:latin typeface="Aptos" pitchFamily="34" charset="0"/>
+                <a:ea typeface="Aptos" pitchFamily="34" charset="-122"/>
+                <a:cs typeface="Aptos" pitchFamily="34" charset="-120"/>
+              </a:rPr>
+              <a:t>Magnetischen Fluss und elektromagnetische Induktion differenziert beschreiben</a:t>
+            </a:r>
+            <a:endParaRPr lang="en-US" sz="1250" dirty="0"/>
           </a:p>
         </p:txBody>
       </p:sp>
@@ -2268,23 +2525,30 @@
         </p:nvSpPr>
         <p:spPr>
           <a:xfrm>
-            <a:off x="658368" y="2999232"/>
-            <a:ext cx="5413248" cy="1161288"/>
+            <a:off x="7360920" y="3840480"/>
+            <a:ext cx="4160520" cy="2057400"/>
           </a:xfrm>
           <a:prstGeom prst="roundRect">
             <a:avLst>
-              <a:gd name="adj" fmla="val 5512"/>
+              <a:gd name="adj" fmla="val 2667"/>
             </a:avLst>
           </a:prstGeom>
           <a:solidFill>
-            <a:srgbClr val="FFFFFF"/>
+            <a:srgbClr val="FFF4DE"/>
           </a:solidFill>
           <a:ln w="12700">
             <a:solidFill>
-              <a:srgbClr val="C8D5E2"/>
-            </a:solidFill>
-            <a:prstDash val="solid"/>
-          </a:ln>
+              <a:srgbClr val="CDD8E2"/>
+            </a:solidFill>
+            <a:prstDash val="solid"/>
+          </a:ln>
+          <a:effectLst>
+            <a:outerShdw sx="100000" sy="100000" kx="0" ky="0" algn="bl" rotWithShape="0" blurRad="12700" dist="50800" dir="2700000">
+              <a:srgbClr val="A8B8C7">
+                <a:alpha val="11000"/>
+              </a:srgbClr>
+            </a:outerShdw>
+          </a:effectLst>
         </p:spPr>
       </p:sp>
       <p:sp>
@@ -2295,18 +2559,18 @@
         </p:nvSpPr>
         <p:spPr>
           <a:xfrm>
-            <a:off x="859536" y="3273552"/>
-            <a:ext cx="576072" cy="576072"/>
-          </a:xfrm>
-          <a:prstGeom prst="ellipse">
+            <a:off x="7360920" y="3840480"/>
+            <a:ext cx="68580" cy="2057400"/>
+          </a:xfrm>
+          <a:prstGeom prst="rect">
             <a:avLst/>
           </a:prstGeom>
           <a:solidFill>
-            <a:srgbClr val="EAF3FB"/>
+            <a:srgbClr val="D78C24"/>
           </a:solidFill>
           <a:ln w="12700">
             <a:solidFill>
-              <a:srgbClr val="2F6FAD">
+              <a:srgbClr val="D78C24">
                 <a:alpha val="0"/>
               </a:srgbClr>
             </a:solidFill>
@@ -2322,58 +2586,17 @@
         </p:nvSpPr>
         <p:spPr>
           <a:xfrm>
-            <a:off x="859536" y="3282696"/>
-            <a:ext cx="576072" cy="530352"/>
-          </a:xfrm>
-          <a:prstGeom prst="rect">
-            <a:avLst/>
-          </a:prstGeom>
-          <a:noFill/>
-          <a:ln/>
-        </p:spPr>
-        <p:txBody>
-          <a:bodyPr wrap="square" lIns="0" tIns="0" rIns="0" bIns="0" rtlCol="0" anchor="ctr">
-            <a:normAutofit/>
-          </a:bodyPr>
-          <a:lstStyle/>
-          <a:p>
-            <a:pPr algn="ctr" indent="0" marL="0">
-              <a:buNone/>
-            </a:pPr>
-            <a:r>
-              <a:rPr lang="en-US" sz="1500" b="1" dirty="0">
-                <a:solidFill>
-                  <a:srgbClr val="2F6FAD"/>
-                </a:solidFill>
-                <a:latin typeface="Aptos" pitchFamily="34" charset="0"/>
-                <a:ea typeface="Aptos" pitchFamily="34" charset="-122"/>
-                <a:cs typeface="Aptos" pitchFamily="34" charset="-120"/>
-              </a:rPr>
-              <a:t>3</a:t>
-            </a:r>
-            <a:endParaRPr lang="en-US" sz="1500" dirty="0"/>
-          </a:p>
-        </p:txBody>
-      </p:sp>
-      <p:sp>
-        <p:nvSpPr>
-          <p:cNvPr id="20" name="Text 18"/>
-          <p:cNvSpPr/>
-          <p:nvPr/>
-        </p:nvSpPr>
-        <p:spPr>
-          <a:xfrm>
-            <a:off x="1591056" y="3163824"/>
-            <a:ext cx="4251960" cy="832104"/>
-          </a:xfrm>
-          <a:prstGeom prst="rect">
-            <a:avLst/>
-          </a:prstGeom>
-          <a:noFill/>
-          <a:ln/>
-        </p:spPr>
-        <p:txBody>
-          <a:bodyPr wrap="square" lIns="0" tIns="0" rIns="0" bIns="0" rtlCol="0" anchor="ctr">
+            <a:off x="7562088" y="3959352"/>
+            <a:ext cx="3813048" cy="310896"/>
+          </a:xfrm>
+          <a:prstGeom prst="rect">
+            <a:avLst/>
+          </a:prstGeom>
+          <a:noFill/>
+          <a:ln/>
+        </p:spPr>
+        <p:txBody>
+          <a:bodyPr wrap="square" lIns="0" tIns="0" rIns="0" bIns="0" rtlCol="0" anchor="t">
             <a:normAutofit/>
           </a:bodyPr>
           <a:lstStyle/>
@@ -2382,7 +2605,49 @@
               <a:buNone/>
             </a:pPr>
             <a:r>
-              <a:rPr lang="en-US" sz="1600" b="1" dirty="0">
+              <a:rPr lang="en-US" sz="1450" b="1" dirty="0">
+                <a:solidFill>
+                  <a:srgbClr val="17324D"/>
+                </a:solidFill>
+                <a:latin typeface="Aptos" pitchFamily="34" charset="0"/>
+                <a:ea typeface="Aptos" pitchFamily="34" charset="-122"/>
+                <a:cs typeface="Aptos" pitchFamily="34" charset="-120"/>
+              </a:rPr>
+              <a:t>Lernweg dieser Präsentation</a:t>
+            </a:r>
+            <a:endParaRPr lang="en-US" sz="1450" dirty="0"/>
+          </a:p>
+        </p:txBody>
+      </p:sp>
+      <p:sp>
+        <p:nvSpPr>
+          <p:cNvPr id="20" name="Text 18"/>
+          <p:cNvSpPr/>
+          <p:nvPr/>
+        </p:nvSpPr>
+        <p:spPr>
+          <a:xfrm>
+            <a:off x="7562088" y="4334256"/>
+            <a:ext cx="3794760" cy="1435608"/>
+          </a:xfrm>
+          <a:prstGeom prst="rect">
+            <a:avLst/>
+          </a:prstGeom>
+          <a:noFill/>
+          <a:ln/>
+        </p:spPr>
+        <p:txBody>
+          <a:bodyPr wrap="square" lIns="254" tIns="254" rIns="254" bIns="254" rtlCol="0" anchor="t">
+            <a:normAutofit/>
+          </a:bodyPr>
+          <a:lstStyle/>
+          <a:p>
+            <a:pPr marL="165100" indent="-165100">
+              <a:buSzPct val="100000"/>
+              <a:buChar char="•"/>
+            </a:pPr>
+            <a:r>
+              <a:rPr lang="en-US" sz="1250" dirty="0">
                 <a:solidFill>
                   <a:srgbClr val="203040"/>
                 </a:solidFill>
@@ -2390,117 +2655,76 @@
                 <a:ea typeface="Aptos" pitchFamily="34" charset="-122"/>
                 <a:cs typeface="Aptos" pitchFamily="34" charset="-120"/>
               </a:rPr>
-              <a:t>Bahnbewegungen in Längs-, Quer- und gekreuzten Feldern modellieren</a:t>
-            </a:r>
-            <a:endParaRPr lang="en-US" sz="1600" dirty="0"/>
-          </a:p>
-        </p:txBody>
-      </p:sp>
-      <p:sp>
-        <p:nvSpPr>
-          <p:cNvPr id="21" name="Shape 19"/>
-          <p:cNvSpPr/>
-          <p:nvPr/>
-        </p:nvSpPr>
-        <p:spPr>
-          <a:xfrm>
-            <a:off x="6272784" y="2999232"/>
-            <a:ext cx="5257800" cy="1161288"/>
-          </a:xfrm>
-          <a:prstGeom prst="roundRect">
-            <a:avLst>
-              <a:gd name="adj" fmla="val 5512"/>
-            </a:avLst>
-          </a:prstGeom>
-          <a:solidFill>
-            <a:srgbClr val="FFFFFF"/>
-          </a:solidFill>
-          <a:ln w="12700">
-            <a:solidFill>
-              <a:srgbClr val="C8D5E2"/>
-            </a:solidFill>
-            <a:prstDash val="solid"/>
-          </a:ln>
-        </p:spPr>
-      </p:sp>
-      <p:sp>
-        <p:nvSpPr>
-          <p:cNvPr id="22" name="Shape 20"/>
-          <p:cNvSpPr/>
-          <p:nvPr/>
-        </p:nvSpPr>
-        <p:spPr>
-          <a:xfrm>
-            <a:off x="6473952" y="3273552"/>
-            <a:ext cx="576072" cy="576072"/>
-          </a:xfrm>
-          <a:prstGeom prst="ellipse">
-            <a:avLst/>
-          </a:prstGeom>
-          <a:solidFill>
-            <a:srgbClr val="EAF3FB"/>
-          </a:solidFill>
-          <a:ln w="12700">
-            <a:solidFill>
-              <a:srgbClr val="2F6FAD">
-                <a:alpha val="0"/>
-              </a:srgbClr>
-            </a:solidFill>
-            <a:prstDash val="solid"/>
-          </a:ln>
-        </p:spPr>
-      </p:sp>
-      <p:sp>
-        <p:nvSpPr>
-          <p:cNvPr id="23" name="Text 21"/>
-          <p:cNvSpPr/>
-          <p:nvPr/>
-        </p:nvSpPr>
-        <p:spPr>
-          <a:xfrm>
-            <a:off x="6473952" y="3282696"/>
-            <a:ext cx="576072" cy="530352"/>
-          </a:xfrm>
-          <a:prstGeom prst="rect">
-            <a:avLst/>
-          </a:prstGeom>
-          <a:noFill/>
-          <a:ln/>
-        </p:spPr>
-        <p:txBody>
-          <a:bodyPr wrap="square" lIns="0" tIns="0" rIns="0" bIns="0" rtlCol="0" anchor="ctr">
-            <a:normAutofit/>
-          </a:bodyPr>
-          <a:lstStyle/>
-          <a:p>
-            <a:pPr algn="ctr" indent="0" marL="0">
-              <a:buNone/>
-            </a:pPr>
-            <a:r>
-              <a:rPr lang="en-US" sz="1500" b="1" dirty="0">
-                <a:solidFill>
-                  <a:srgbClr val="2F6FAD"/>
-                </a:solidFill>
-                <a:latin typeface="Aptos" pitchFamily="34" charset="0"/>
-                <a:ea typeface="Aptos" pitchFamily="34" charset="-122"/>
-                <a:cs typeface="Aptos" pitchFamily="34" charset="-120"/>
-              </a:rPr>
-              <a:t>4</a:t>
-            </a:r>
-            <a:endParaRPr lang="en-US" sz="1500" dirty="0"/>
-          </a:p>
-        </p:txBody>
-      </p:sp>
-      <p:sp>
-        <p:nvSpPr>
-          <p:cNvPr id="24" name="Text 22"/>
-          <p:cNvSpPr/>
-          <p:nvPr/>
-        </p:nvSpPr>
-        <p:spPr>
-          <a:xfrm>
-            <a:off x="7205472" y="3163824"/>
-            <a:ext cx="4096512" cy="832104"/>
+              <a:t>sehr leichte Abruffragen</a:t>
+            </a:r>
+            <a:endParaRPr lang="en-US" sz="1250" dirty="0"/>
+          </a:p>
+          <a:p>
+            <a:pPr marL="165100" indent="-165100">
+              <a:buSzPct val="100000"/>
+              <a:buChar char="•"/>
+            </a:pPr>
+            <a:r>
+              <a:rPr lang="en-US" sz="1250" dirty="0">
+                <a:solidFill>
+                  <a:srgbClr val="203040"/>
+                </a:solidFill>
+                <a:latin typeface="Aptos" pitchFamily="34" charset="0"/>
+                <a:ea typeface="Aptos" pitchFamily="34" charset="-122"/>
+                <a:cs typeface="Aptos" pitchFamily="34" charset="-120"/>
+              </a:rPr>
+              <a:t>Begriffe und Formeln</a:t>
+            </a:r>
+            <a:endParaRPr lang="en-US" sz="1250" dirty="0"/>
+          </a:p>
+          <a:p>
+            <a:pPr marL="165100" indent="-165100">
+              <a:buSzPct val="100000"/>
+              <a:buChar char="•"/>
+            </a:pPr>
+            <a:r>
+              <a:rPr lang="en-US" sz="1250" dirty="0">
+                <a:solidFill>
+                  <a:srgbClr val="203040"/>
+                </a:solidFill>
+                <a:latin typeface="Aptos" pitchFamily="34" charset="0"/>
+                <a:ea typeface="Aptos" pitchFamily="34" charset="-122"/>
+                <a:cs typeface="Aptos" pitchFamily="34" charset="-120"/>
+              </a:rPr>
+              <a:t>einfache Aufgaben</a:t>
+            </a:r>
+            <a:endParaRPr lang="en-US" sz="1250" dirty="0"/>
+          </a:p>
+          <a:p>
+            <a:pPr marL="165100" indent="-165100">
+              <a:buSzPct val="100000"/>
+              <a:buChar char="•"/>
+            </a:pPr>
+            <a:r>
+              <a:rPr lang="en-US" sz="1250" dirty="0">
+                <a:solidFill>
+                  <a:srgbClr val="203040"/>
+                </a:solidFill>
+                <a:latin typeface="Aptos" pitchFamily="34" charset="0"/>
+                <a:ea typeface="Aptos" pitchFamily="34" charset="-122"/>
+                <a:cs typeface="Aptos" pitchFamily="34" charset="-120"/>
+              </a:rPr>
+              <a:t>Transfer und Grafik</a:t>
+            </a:r>
+            <a:endParaRPr lang="en-US" sz="1250" dirty="0"/>
+          </a:p>
+        </p:txBody>
+      </p:sp>
+      <p:sp>
+        <p:nvSpPr>
+          <p:cNvPr id="21" name="Text 19"/>
+          <p:cNvSpPr/>
+          <p:nvPr/>
+        </p:nvSpPr>
+        <p:spPr>
+          <a:xfrm>
+            <a:off x="713232" y="6062472"/>
+            <a:ext cx="6400800" cy="219456"/>
           </a:xfrm>
           <a:prstGeom prst="rect">
             <a:avLst/>
@@ -2518,153 +2742,17 @@
               <a:buNone/>
             </a:pPr>
             <a:r>
-              <a:rPr lang="en-US" sz="1600" b="1" dirty="0">
-                <a:solidFill>
-                  <a:srgbClr val="203040"/>
-                </a:solidFill>
-                <a:latin typeface="Aptos" pitchFamily="34" charset="0"/>
-                <a:ea typeface="Aptos" pitchFamily="34" charset="-122"/>
-                <a:cs typeface="Aptos" pitchFamily="34" charset="-120"/>
-              </a:rPr>
-              <a:t>Magnetischen Fluss und elektromagnetische Induktion differenziert beschreiben</a:t>
-            </a:r>
-            <a:endParaRPr lang="en-US" sz="1600" dirty="0"/>
-          </a:p>
-        </p:txBody>
-      </p:sp>
-      <p:sp>
-        <p:nvSpPr>
-          <p:cNvPr id="25" name="Shape 23"/>
-          <p:cNvSpPr/>
-          <p:nvPr/>
-        </p:nvSpPr>
-        <p:spPr>
-          <a:xfrm>
-            <a:off x="658368" y="4352544"/>
-            <a:ext cx="10872216" cy="1161288"/>
-          </a:xfrm>
-          <a:prstGeom prst="roundRect">
-            <a:avLst>
-              <a:gd name="adj" fmla="val 5512"/>
-            </a:avLst>
-          </a:prstGeom>
-          <a:solidFill>
-            <a:srgbClr val="FFFFFF"/>
-          </a:solidFill>
-          <a:ln w="12700">
-            <a:solidFill>
-              <a:srgbClr val="C8D5E2"/>
-            </a:solidFill>
-            <a:prstDash val="solid"/>
-          </a:ln>
-        </p:spPr>
-      </p:sp>
-      <p:sp>
-        <p:nvSpPr>
-          <p:cNvPr id="26" name="Shape 24"/>
-          <p:cNvSpPr/>
-          <p:nvPr/>
-        </p:nvSpPr>
-        <p:spPr>
-          <a:xfrm>
-            <a:off x="859536" y="4626864"/>
-            <a:ext cx="576072" cy="576072"/>
-          </a:xfrm>
-          <a:prstGeom prst="ellipse">
-            <a:avLst/>
-          </a:prstGeom>
-          <a:solidFill>
-            <a:srgbClr val="EAF3FB"/>
-          </a:solidFill>
-          <a:ln w="12700">
-            <a:solidFill>
-              <a:srgbClr val="2F6FAD">
-                <a:alpha val="0"/>
-              </a:srgbClr>
-            </a:solidFill>
-            <a:prstDash val="solid"/>
-          </a:ln>
-        </p:spPr>
-      </p:sp>
-      <p:sp>
-        <p:nvSpPr>
-          <p:cNvPr id="27" name="Text 25"/>
-          <p:cNvSpPr/>
-          <p:nvPr/>
-        </p:nvSpPr>
-        <p:spPr>
-          <a:xfrm>
-            <a:off x="859536" y="4636008"/>
-            <a:ext cx="576072" cy="530352"/>
-          </a:xfrm>
-          <a:prstGeom prst="rect">
-            <a:avLst/>
-          </a:prstGeom>
-          <a:noFill/>
-          <a:ln/>
-        </p:spPr>
-        <p:txBody>
-          <a:bodyPr wrap="square" lIns="0" tIns="0" rIns="0" bIns="0" rtlCol="0" anchor="ctr">
-            <a:normAutofit/>
-          </a:bodyPr>
-          <a:lstStyle/>
-          <a:p>
-            <a:pPr algn="ctr" indent="0" marL="0">
-              <a:buNone/>
-            </a:pPr>
-            <a:r>
-              <a:rPr lang="en-US" sz="1500" b="1" dirty="0">
-                <a:solidFill>
-                  <a:srgbClr val="2F6FAD"/>
-                </a:solidFill>
-                <a:latin typeface="Aptos" pitchFamily="34" charset="0"/>
-                <a:ea typeface="Aptos" pitchFamily="34" charset="-122"/>
-                <a:cs typeface="Aptos" pitchFamily="34" charset="-120"/>
-              </a:rPr>
-              <a:t>5</a:t>
-            </a:r>
-            <a:endParaRPr lang="en-US" sz="1500" dirty="0"/>
-          </a:p>
-        </p:txBody>
-      </p:sp>
-      <p:sp>
-        <p:nvSpPr>
-          <p:cNvPr id="28" name="Text 26"/>
-          <p:cNvSpPr/>
-          <p:nvPr/>
-        </p:nvSpPr>
-        <p:spPr>
-          <a:xfrm>
-            <a:off x="1591056" y="4517136"/>
-            <a:ext cx="9710928" cy="832104"/>
-          </a:xfrm>
-          <a:prstGeom prst="rect">
-            <a:avLst/>
-          </a:prstGeom>
-          <a:noFill/>
-          <a:ln/>
-        </p:spPr>
-        <p:txBody>
-          <a:bodyPr wrap="square" lIns="0" tIns="0" rIns="0" bIns="0" rtlCol="0" anchor="ctr">
-            <a:normAutofit/>
-          </a:bodyPr>
-          <a:lstStyle/>
-          <a:p>
-            <a:pPr indent="0" marL="0">
-              <a:buNone/>
-            </a:pPr>
-            <a:r>
-              <a:rPr lang="en-US" sz="1700" b="1" dirty="0">
-                <a:solidFill>
-                  <a:srgbClr val="203040"/>
-                </a:solidFill>
-                <a:latin typeface="Aptos" pitchFamily="34" charset="0"/>
-                <a:ea typeface="Aptos" pitchFamily="34" charset="-122"/>
-                <a:cs typeface="Aptos" pitchFamily="34" charset="-120"/>
-              </a:rPr>
-              <a:t>Feldenergie und technische Anwendungen bilanzieren</a:t>
-            </a:r>
-            <a:endParaRPr lang="en-US" sz="1700" dirty="0"/>
+              <a:rPr lang="en-US" sz="950" dirty="0">
+                <a:solidFill>
+                  <a:srgbClr val="607080"/>
+                </a:solidFill>
+                <a:latin typeface="Aptos" pitchFamily="34" charset="0"/>
+                <a:ea typeface="Aptos" pitchFamily="34" charset="-122"/>
+                <a:cs typeface="Aptos" pitchFamily="34" charset="-120"/>
+              </a:rPr>
+              <a:t>KLP Physik NRW 2022 · S. 45–47</a:t>
+            </a:r>
+            <a:endParaRPr lang="en-US" sz="950" dirty="0"/>
           </a:p>
         </p:txBody>
       </p:sp>
@@ -2709,7 +2797,7 @@
         <p:spPr>
           <a:xfrm>
             <a:off x="0" y="0"/>
-            <a:ext cx="12191695" cy="164592"/>
+            <a:ext cx="12191695" cy="137160"/>
           </a:xfrm>
           <a:prstGeom prst="rect">
             <a:avLst/>
@@ -2735,8 +2823,8 @@
         </p:nvSpPr>
         <p:spPr>
           <a:xfrm>
-            <a:off x="566928" y="320040"/>
-            <a:ext cx="2423160" cy="310896"/>
+            <a:off x="566928" y="301752"/>
+            <a:ext cx="3383280" cy="237744"/>
           </a:xfrm>
           <a:prstGeom prst="rect">
             <a:avLst/>
@@ -2754,7 +2842,7 @@
               <a:buNone/>
             </a:pPr>
             <a:r>
-              <a:rPr lang="en-US" sz="1050" b="1" spc="130" kern="0" dirty="0">
+              <a:rPr lang="en-US" sz="1000" b="1" spc="120" kern="0" dirty="0">
                 <a:solidFill>
                   <a:srgbClr val="2F6FAD"/>
                 </a:solidFill>
@@ -2762,9 +2850,9 @@
                 <a:ea typeface="Aptos" pitchFamily="34" charset="-122"/>
                 <a:cs typeface="Aptos" pitchFamily="34" charset="-120"/>
               </a:rPr>
-              <a:t>WERKZEUGKASTEN</a:t>
-            </a:r>
-            <a:endParaRPr lang="en-US" sz="1050" dirty="0"/>
+              <a:t>STUFE 1 · ABRUFEN</a:t>
+            </a:r>
+            <a:endParaRPr lang="en-US" sz="1000" dirty="0"/>
           </a:p>
         </p:txBody>
       </p:sp>
@@ -2776,8 +2864,8 @@
         </p:nvSpPr>
         <p:spPr>
           <a:xfrm>
-            <a:off x="566928" y="658368"/>
-            <a:ext cx="10927080" cy="640080"/>
+            <a:off x="566928" y="621792"/>
+            <a:ext cx="10698480" cy="548640"/>
           </a:xfrm>
           <a:prstGeom prst="rect">
             <a:avLst/>
@@ -2795,17 +2883,17 @@
               <a:buNone/>
             </a:pPr>
             <a:r>
-              <a:rPr lang="en-US" sz="2800" b="1" dirty="0">
-                <a:solidFill>
-                  <a:srgbClr val="16324F"/>
-                </a:solidFill>
-                <a:latin typeface="Aptos" pitchFamily="34" charset="0"/>
-                <a:ea typeface="Aptos" pitchFamily="34" charset="-122"/>
-                <a:cs typeface="Aptos" pitchFamily="34" charset="-120"/>
-              </a:rPr>
-              <a:t>Begriffe und Modelle</a:t>
-            </a:r>
-            <a:endParaRPr lang="en-US" sz="2800" dirty="0"/>
+              <a:rPr lang="en-US" sz="2700" b="1" dirty="0">
+                <a:solidFill>
+                  <a:srgbClr val="17324D"/>
+                </a:solidFill>
+                <a:latin typeface="Aptos" pitchFamily="34" charset="0"/>
+                <a:ea typeface="Aptos" pitchFamily="34" charset="-122"/>
+                <a:cs typeface="Aptos" pitchFamily="34" charset="-120"/>
+              </a:rPr>
+              <a:t>Leichter Einstieg → sicherer Abruf</a:t>
+            </a:r>
+            <a:endParaRPr lang="en-US" sz="2700" dirty="0"/>
           </a:p>
         </p:txBody>
       </p:sp>
@@ -2817,8 +2905,8 @@
         </p:nvSpPr>
         <p:spPr>
           <a:xfrm>
-            <a:off x="9784080" y="338328"/>
-            <a:ext cx="1737360" cy="246888"/>
+            <a:off x="9509760" y="310896"/>
+            <a:ext cx="2057400" cy="219456"/>
           </a:xfrm>
           <a:prstGeom prst="rect">
             <a:avLst/>
@@ -2836,9 +2924,9 @@
               <a:buNone/>
             </a:pPr>
             <a:r>
-              <a:rPr lang="en-US" sz="1050" b="1" dirty="0">
-                <a:solidFill>
-                  <a:srgbClr val="5B6B7B"/>
+              <a:rPr lang="en-US" sz="1020" b="1" dirty="0">
+                <a:solidFill>
+                  <a:srgbClr val="607080"/>
                 </a:solidFill>
                 <a:latin typeface="Aptos" pitchFamily="34" charset="0"/>
                 <a:ea typeface="Aptos" pitchFamily="34" charset="-122"/>
@@ -2846,7 +2934,7 @@
               </a:rPr>
               <a:t>Q1/Q2 Leistungskurs</a:t>
             </a:r>
-            <a:endParaRPr lang="en-US" sz="1050" dirty="0"/>
+            <a:endParaRPr lang="en-US" sz="1020" dirty="0"/>
           </a:p>
         </p:txBody>
       </p:sp>
@@ -2858,7 +2946,7 @@
         </p:nvSpPr>
         <p:spPr>
           <a:xfrm>
-            <a:off x="566928" y="1353312"/>
+            <a:off x="566928" y="1280160"/>
             <a:ext cx="11045952" cy="0"/>
           </a:xfrm>
           <a:prstGeom prst="line">
@@ -2867,7 +2955,7 @@
           <a:noFill/>
           <a:ln w="12700">
             <a:solidFill>
-              <a:srgbClr val="C8D5E2"/>
+              <a:srgbClr val="CDD8E2"/>
             </a:solidFill>
             <a:prstDash val="solid"/>
           </a:ln>
@@ -2881,8 +2969,8 @@
         </p:nvSpPr>
         <p:spPr>
           <a:xfrm>
-            <a:off x="566928" y="6528816"/>
-            <a:ext cx="5303520" cy="201168"/>
+            <a:off x="566928" y="6519672"/>
+            <a:ext cx="5212080" cy="182880"/>
           </a:xfrm>
           <a:prstGeom prst="rect">
             <a:avLst/>
@@ -2900,9 +2988,9 @@
               <a:buNone/>
             </a:pPr>
             <a:r>
-              <a:rPr lang="en-US" sz="950" dirty="0">
-                <a:solidFill>
-                  <a:srgbClr val="5B6B7B"/>
+              <a:rPr lang="en-US" sz="900" dirty="0">
+                <a:solidFill>
+                  <a:srgbClr val="607080"/>
                 </a:solidFill>
                 <a:latin typeface="Aptos" pitchFamily="34" charset="0"/>
                 <a:ea typeface="Aptos" pitchFamily="34" charset="-122"/>
@@ -2910,7 +2998,7 @@
               </a:rPr>
               <a:t>Fortlaufende Wiederholung · Physik NRW</a:t>
             </a:r>
-            <a:endParaRPr lang="en-US" sz="950" dirty="0"/>
+            <a:endParaRPr lang="en-US" sz="900" dirty="0"/>
           </a:p>
         </p:txBody>
       </p:sp>
@@ -2922,8 +3010,8 @@
         </p:nvSpPr>
         <p:spPr>
           <a:xfrm>
-            <a:off x="11109960" y="6528816"/>
-            <a:ext cx="502920" cy="201168"/>
+            <a:off x="11137392" y="6519672"/>
+            <a:ext cx="457200" cy="182880"/>
           </a:xfrm>
           <a:prstGeom prst="rect">
             <a:avLst/>
@@ -2941,9 +3029,9 @@
               <a:buNone/>
             </a:pPr>
             <a:r>
-              <a:rPr lang="en-US" sz="950" dirty="0">
-                <a:solidFill>
-                  <a:srgbClr val="5B6B7B"/>
+              <a:rPr lang="en-US" sz="900" dirty="0">
+                <a:solidFill>
+                  <a:srgbClr val="607080"/>
                 </a:solidFill>
                 <a:latin typeface="Aptos" pitchFamily="34" charset="0"/>
                 <a:ea typeface="Aptos" pitchFamily="34" charset="-122"/>
@@ -2951,24 +3039,65 @@
               </a:rPr>
               <a:t>3</a:t>
             </a:r>
-            <a:endParaRPr lang="en-US" sz="950" dirty="0"/>
-          </a:p>
-        </p:txBody>
-      </p:sp>
-      <p:sp>
-        <p:nvSpPr>
-          <p:cNvPr id="9" name="Shape 7"/>
-          <p:cNvSpPr/>
-          <p:nvPr/>
-        </p:nvSpPr>
-        <p:spPr>
-          <a:xfrm>
-            <a:off x="658368" y="1627632"/>
-            <a:ext cx="5394960" cy="1417320"/>
+            <a:endParaRPr lang="en-US" sz="900" dirty="0"/>
+          </a:p>
+        </p:txBody>
+      </p:sp>
+      <p:sp>
+        <p:nvSpPr>
+          <p:cNvPr id="9" name="Text 7"/>
+          <p:cNvSpPr/>
+          <p:nvPr/>
+        </p:nvSpPr>
+        <p:spPr>
+          <a:xfrm>
+            <a:off x="658368" y="1472184"/>
+            <a:ext cx="10515600" cy="292608"/>
+          </a:xfrm>
+          <a:prstGeom prst="rect">
+            <a:avLst/>
+          </a:prstGeom>
+          <a:noFill/>
+          <a:ln/>
+        </p:spPr>
+        <p:txBody>
+          <a:bodyPr wrap="square" lIns="0" tIns="0" rIns="0" bIns="0" rtlCol="0" anchor="ctr">
+            <a:normAutofit/>
+          </a:bodyPr>
+          <a:lstStyle/>
+          <a:p>
+            <a:pPr indent="0" marL="0">
+              <a:buNone/>
+            </a:pPr>
+            <a:r>
+              <a:rPr lang="en-US" sz="1400" dirty="0">
+                <a:solidFill>
+                  <a:srgbClr val="607080"/>
+                </a:solidFill>
+                <a:latin typeface="Aptos" pitchFamily="34" charset="0"/>
+                <a:ea typeface="Aptos" pitchFamily="34" charset="-122"/>
+                <a:cs typeface="Aptos" pitchFamily="34" charset="-120"/>
+              </a:rPr>
+              <a:t>Fragen 1–2 sind bewusst sehr leicht. Danach wird der Abruf schrittweise fachlicher.</a:t>
+            </a:r>
+            <a:endParaRPr lang="en-US" sz="1400" dirty="0"/>
+          </a:p>
+        </p:txBody>
+      </p:sp>
+      <p:sp>
+        <p:nvSpPr>
+          <p:cNvPr id="10" name="Shape 8"/>
+          <p:cNvSpPr/>
+          <p:nvPr/>
+        </p:nvSpPr>
+        <p:spPr>
+          <a:xfrm>
+            <a:off x="749808" y="1856232"/>
+            <a:ext cx="10607040" cy="658368"/>
           </a:xfrm>
           <a:prstGeom prst="roundRect">
             <a:avLst>
-              <a:gd name="adj" fmla="val 5161"/>
+              <a:gd name="adj" fmla="val 6944"/>
             </a:avLst>
           </a:prstGeom>
           <a:solidFill>
@@ -2976,31 +3105,24 @@
           </a:solidFill>
           <a:ln w="12700">
             <a:solidFill>
-              <a:srgbClr val="C8D5E2"/>
-            </a:solidFill>
-            <a:prstDash val="solid"/>
-          </a:ln>
-          <a:effectLst>
-            <a:outerShdw sx="100000" sy="100000" kx="0" ky="0" algn="bl" rotWithShape="0" blurRad="12700" dist="50800" dir="2700000">
-              <a:srgbClr val="B7C5D2">
-                <a:alpha val="12000"/>
-              </a:srgbClr>
-            </a:outerShdw>
-          </a:effectLst>
-        </p:spPr>
-      </p:sp>
-      <p:sp>
-        <p:nvSpPr>
-          <p:cNvPr id="10" name="Shape 8"/>
-          <p:cNvSpPr/>
-          <p:nvPr/>
-        </p:nvSpPr>
-        <p:spPr>
-          <a:xfrm>
-            <a:off x="658368" y="1627632"/>
-            <a:ext cx="73152" cy="1417320"/>
-          </a:xfrm>
-          <a:prstGeom prst="rect">
+              <a:srgbClr val="CDD8E2"/>
+            </a:solidFill>
+            <a:prstDash val="solid"/>
+          </a:ln>
+        </p:spPr>
+      </p:sp>
+      <p:sp>
+        <p:nvSpPr>
+          <p:cNvPr id="11" name="Shape 9"/>
+          <p:cNvSpPr/>
+          <p:nvPr/>
+        </p:nvSpPr>
+        <p:spPr>
+          <a:xfrm>
+            <a:off x="923544" y="1938528"/>
+            <a:ext cx="493776" cy="493776"/>
+          </a:xfrm>
+          <a:prstGeom prst="ellipse">
             <a:avLst/>
           </a:prstGeom>
           <a:solidFill>
@@ -3018,23 +3140,64 @@
       </p:sp>
       <p:sp>
         <p:nvSpPr>
-          <p:cNvPr id="11" name="Text 9"/>
-          <p:cNvSpPr/>
-          <p:nvPr/>
-        </p:nvSpPr>
-        <p:spPr>
-          <a:xfrm>
-            <a:off x="859536" y="1773936"/>
-            <a:ext cx="5010912" cy="320040"/>
-          </a:xfrm>
-          <a:prstGeom prst="rect">
-            <a:avLst/>
-          </a:prstGeom>
-          <a:noFill/>
-          <a:ln/>
-        </p:spPr>
-        <p:txBody>
-          <a:bodyPr wrap="square" lIns="0" tIns="0" rIns="0" bIns="0" rtlCol="0" anchor="t">
+          <p:cNvPr id="12" name="Text 10"/>
+          <p:cNvSpPr/>
+          <p:nvPr/>
+        </p:nvSpPr>
+        <p:spPr>
+          <a:xfrm>
+            <a:off x="923544" y="1947672"/>
+            <a:ext cx="493776" cy="457200"/>
+          </a:xfrm>
+          <a:prstGeom prst="rect">
+            <a:avLst/>
+          </a:prstGeom>
+          <a:noFill/>
+          <a:ln/>
+        </p:spPr>
+        <p:txBody>
+          <a:bodyPr wrap="square" lIns="0" tIns="0" rIns="0" bIns="0" rtlCol="0" anchor="ctr">
+            <a:normAutofit/>
+          </a:bodyPr>
+          <a:lstStyle/>
+          <a:p>
+            <a:pPr algn="ctr" indent="0" marL="0">
+              <a:buNone/>
+            </a:pPr>
+            <a:r>
+              <a:rPr lang="en-US" sz="1400" b="1" dirty="0">
+                <a:solidFill>
+                  <a:srgbClr val="FFFFFF"/>
+                </a:solidFill>
+                <a:latin typeface="Aptos" pitchFamily="34" charset="0"/>
+                <a:ea typeface="Aptos" pitchFamily="34" charset="-122"/>
+                <a:cs typeface="Aptos" pitchFamily="34" charset="-120"/>
+              </a:rPr>
+              <a:t>1</a:t>
+            </a:r>
+            <a:endParaRPr lang="en-US" sz="1400" dirty="0"/>
+          </a:p>
+        </p:txBody>
+      </p:sp>
+      <p:sp>
+        <p:nvSpPr>
+          <p:cNvPr id="13" name="Text 11"/>
+          <p:cNvSpPr/>
+          <p:nvPr/>
+        </p:nvSpPr>
+        <p:spPr>
+          <a:xfrm>
+            <a:off x="1609344" y="1947672"/>
+            <a:ext cx="9573768" cy="475488"/>
+          </a:xfrm>
+          <a:prstGeom prst="rect">
+            <a:avLst/>
+          </a:prstGeom>
+          <a:noFill/>
+          <a:ln/>
+        </p:spPr>
+        <p:txBody>
+          <a:bodyPr wrap="square" lIns="0" tIns="0" rIns="0" bIns="0" rtlCol="0" anchor="ctr">
             <a:normAutofit/>
           </a:bodyPr>
           <a:lstStyle/>
@@ -3043,48 +3206,7 @@
               <a:buNone/>
             </a:pPr>
             <a:r>
-              <a:rPr lang="en-US" sz="1450" b="1" dirty="0">
-                <a:solidFill>
-                  <a:srgbClr val="16324F"/>
-                </a:solidFill>
-                <a:latin typeface="Aptos" pitchFamily="34" charset="0"/>
-                <a:ea typeface="Aptos" pitchFamily="34" charset="-122"/>
-                <a:cs typeface="Aptos" pitchFamily="34" charset="-120"/>
-              </a:rPr>
-              <a:t>Coulomb-Kraft</a:t>
-            </a:r>
-            <a:endParaRPr lang="en-US" sz="1450" dirty="0"/>
-          </a:p>
-        </p:txBody>
-      </p:sp>
-      <p:sp>
-        <p:nvSpPr>
-          <p:cNvPr id="12" name="Text 10"/>
-          <p:cNvSpPr/>
-          <p:nvPr/>
-        </p:nvSpPr>
-        <p:spPr>
-          <a:xfrm>
-            <a:off x="877824" y="2157984"/>
-            <a:ext cx="4974336" cy="740664"/>
-          </a:xfrm>
-          <a:prstGeom prst="rect">
-            <a:avLst/>
-          </a:prstGeom>
-          <a:noFill/>
-          <a:ln/>
-        </p:spPr>
-        <p:txBody>
-          <a:bodyPr wrap="square" lIns="0" tIns="0" rIns="0" bIns="0" rtlCol="0" anchor="t">
-            <a:normAutofit/>
-          </a:bodyPr>
-          <a:lstStyle/>
-          <a:p>
-            <a:pPr indent="0" marL="0">
-              <a:buNone/>
-            </a:pPr>
-            <a:r>
-              <a:rPr lang="en-US" sz="1350" dirty="0">
+              <a:rPr lang="en-US" sz="1600" b="1" dirty="0">
                 <a:solidFill>
                   <a:srgbClr val="203040"/>
                 </a:solidFill>
@@ -3092,26 +3214,26 @@
                 <a:ea typeface="Aptos" pitchFamily="34" charset="-122"/>
                 <a:cs typeface="Aptos" pitchFamily="34" charset="-120"/>
               </a:rPr>
-              <a:t>Elektrostatische Wechselwirkung zwischen Punktladungen.</a:t>
-            </a:r>
-            <a:endParaRPr lang="en-US" sz="1350" dirty="0"/>
-          </a:p>
-        </p:txBody>
-      </p:sp>
-      <p:sp>
-        <p:nvSpPr>
-          <p:cNvPr id="13" name="Shape 11"/>
-          <p:cNvSpPr/>
-          <p:nvPr/>
-        </p:nvSpPr>
-        <p:spPr>
-          <a:xfrm>
-            <a:off x="6272784" y="1627632"/>
-            <a:ext cx="5394960" cy="1417320"/>
+              <a:t>Ein geladener Luftballon zieht Papierschnipsel an: Ist das vor allem eine elektrische oder magnetische Wirkung?</a:t>
+            </a:r>
+            <a:endParaRPr lang="en-US" sz="1600" dirty="0"/>
+          </a:p>
+        </p:txBody>
+      </p:sp>
+      <p:sp>
+        <p:nvSpPr>
+          <p:cNvPr id="14" name="Shape 12"/>
+          <p:cNvSpPr/>
+          <p:nvPr/>
+        </p:nvSpPr>
+        <p:spPr>
+          <a:xfrm>
+            <a:off x="749808" y="2670048"/>
+            <a:ext cx="10607040" cy="658368"/>
           </a:xfrm>
           <a:prstGeom prst="roundRect">
             <a:avLst>
-              <a:gd name="adj" fmla="val 5161"/>
+              <a:gd name="adj" fmla="val 6944"/>
             </a:avLst>
           </a:prstGeom>
           <a:solidFill>
@@ -3119,31 +3241,160 @@
           </a:solidFill>
           <a:ln w="12700">
             <a:solidFill>
-              <a:srgbClr val="C8D5E2"/>
-            </a:solidFill>
-            <a:prstDash val="solid"/>
-          </a:ln>
-          <a:effectLst>
-            <a:outerShdw sx="100000" sy="100000" kx="0" ky="0" algn="bl" rotWithShape="0" blurRad="12700" dist="50800" dir="2700000">
-              <a:srgbClr val="B7C5D2">
-                <a:alpha val="12000"/>
+              <a:srgbClr val="CDD8E2"/>
+            </a:solidFill>
+            <a:prstDash val="solid"/>
+          </a:ln>
+        </p:spPr>
+      </p:sp>
+      <p:sp>
+        <p:nvSpPr>
+          <p:cNvPr id="15" name="Shape 13"/>
+          <p:cNvSpPr/>
+          <p:nvPr/>
+        </p:nvSpPr>
+        <p:spPr>
+          <a:xfrm>
+            <a:off x="923544" y="2752344"/>
+            <a:ext cx="493776" cy="493776"/>
+          </a:xfrm>
+          <a:prstGeom prst="ellipse">
+            <a:avLst/>
+          </a:prstGeom>
+          <a:solidFill>
+            <a:srgbClr val="4C88C2"/>
+          </a:solidFill>
+          <a:ln w="12700">
+            <a:solidFill>
+              <a:srgbClr val="4C88C2">
+                <a:alpha val="0"/>
               </a:srgbClr>
-            </a:outerShdw>
-          </a:effectLst>
-        </p:spPr>
-      </p:sp>
-      <p:sp>
-        <p:nvSpPr>
-          <p:cNvPr id="14" name="Shape 12"/>
-          <p:cNvSpPr/>
-          <p:nvPr/>
-        </p:nvSpPr>
-        <p:spPr>
-          <a:xfrm>
-            <a:off x="6272784" y="1627632"/>
-            <a:ext cx="73152" cy="1417320"/>
-          </a:xfrm>
-          <a:prstGeom prst="rect">
+            </a:solidFill>
+            <a:prstDash val="solid"/>
+          </a:ln>
+        </p:spPr>
+      </p:sp>
+      <p:sp>
+        <p:nvSpPr>
+          <p:cNvPr id="16" name="Text 14"/>
+          <p:cNvSpPr/>
+          <p:nvPr/>
+        </p:nvSpPr>
+        <p:spPr>
+          <a:xfrm>
+            <a:off x="923544" y="2761488"/>
+            <a:ext cx="493776" cy="457200"/>
+          </a:xfrm>
+          <a:prstGeom prst="rect">
+            <a:avLst/>
+          </a:prstGeom>
+          <a:noFill/>
+          <a:ln/>
+        </p:spPr>
+        <p:txBody>
+          <a:bodyPr wrap="square" lIns="0" tIns="0" rIns="0" bIns="0" rtlCol="0" anchor="ctr">
+            <a:normAutofit/>
+          </a:bodyPr>
+          <a:lstStyle/>
+          <a:p>
+            <a:pPr algn="ctr" indent="0" marL="0">
+              <a:buNone/>
+            </a:pPr>
+            <a:r>
+              <a:rPr lang="en-US" sz="1400" b="1" dirty="0">
+                <a:solidFill>
+                  <a:srgbClr val="FFFFFF"/>
+                </a:solidFill>
+                <a:latin typeface="Aptos" pitchFamily="34" charset="0"/>
+                <a:ea typeface="Aptos" pitchFamily="34" charset="-122"/>
+                <a:cs typeface="Aptos" pitchFamily="34" charset="-120"/>
+              </a:rPr>
+              <a:t>2</a:t>
+            </a:r>
+            <a:endParaRPr lang="en-US" sz="1400" dirty="0"/>
+          </a:p>
+        </p:txBody>
+      </p:sp>
+      <p:sp>
+        <p:nvSpPr>
+          <p:cNvPr id="17" name="Text 15"/>
+          <p:cNvSpPr/>
+          <p:nvPr/>
+        </p:nvSpPr>
+        <p:spPr>
+          <a:xfrm>
+            <a:off x="1609344" y="2761488"/>
+            <a:ext cx="9573768" cy="475488"/>
+          </a:xfrm>
+          <a:prstGeom prst="rect">
+            <a:avLst/>
+          </a:prstGeom>
+          <a:noFill/>
+          <a:ln/>
+        </p:spPr>
+        <p:txBody>
+          <a:bodyPr wrap="square" lIns="0" tIns="0" rIns="0" bIns="0" rtlCol="0" anchor="ctr">
+            <a:normAutofit/>
+          </a:bodyPr>
+          <a:lstStyle/>
+          <a:p>
+            <a:pPr indent="0" marL="0">
+              <a:buNone/>
+            </a:pPr>
+            <a:r>
+              <a:rPr lang="en-US" sz="1600" b="1" dirty="0">
+                <a:solidFill>
+                  <a:srgbClr val="203040"/>
+                </a:solidFill>
+                <a:latin typeface="Aptos" pitchFamily="34" charset="0"/>
+                <a:ea typeface="Aptos" pitchFamily="34" charset="-122"/>
+                <a:cs typeface="Aptos" pitchFamily="34" charset="-120"/>
+              </a:rPr>
+              <a:t>Eine stromdurchflossene Spule zieht einen Eisenkern an: Ist das vor allem eine elektrische oder magnetische Wirkung?</a:t>
+            </a:r>
+            <a:endParaRPr lang="en-US" sz="1600" dirty="0"/>
+          </a:p>
+        </p:txBody>
+      </p:sp>
+      <p:sp>
+        <p:nvSpPr>
+          <p:cNvPr id="18" name="Shape 16"/>
+          <p:cNvSpPr/>
+          <p:nvPr/>
+        </p:nvSpPr>
+        <p:spPr>
+          <a:xfrm>
+            <a:off x="749808" y="3483864"/>
+            <a:ext cx="10607040" cy="658368"/>
+          </a:xfrm>
+          <a:prstGeom prst="roundRect">
+            <a:avLst>
+              <a:gd name="adj" fmla="val 6944"/>
+            </a:avLst>
+          </a:prstGeom>
+          <a:solidFill>
+            <a:srgbClr val="FFFFFF"/>
+          </a:solidFill>
+          <a:ln w="12700">
+            <a:solidFill>
+              <a:srgbClr val="CDD8E2"/>
+            </a:solidFill>
+            <a:prstDash val="solid"/>
+          </a:ln>
+        </p:spPr>
+      </p:sp>
+      <p:sp>
+        <p:nvSpPr>
+          <p:cNvPr id="19" name="Shape 17"/>
+          <p:cNvSpPr/>
+          <p:nvPr/>
+        </p:nvSpPr>
+        <p:spPr>
+          <a:xfrm>
+            <a:off x="923544" y="3566160"/>
+            <a:ext cx="493776" cy="493776"/>
+          </a:xfrm>
+          <a:prstGeom prst="ellipse">
             <a:avLst/>
           </a:prstGeom>
           <a:solidFill>
@@ -3161,23 +3412,64 @@
       </p:sp>
       <p:sp>
         <p:nvSpPr>
-          <p:cNvPr id="15" name="Text 13"/>
-          <p:cNvSpPr/>
-          <p:nvPr/>
-        </p:nvSpPr>
-        <p:spPr>
-          <a:xfrm>
-            <a:off x="6473952" y="1773936"/>
-            <a:ext cx="5010912" cy="320040"/>
-          </a:xfrm>
-          <a:prstGeom prst="rect">
-            <a:avLst/>
-          </a:prstGeom>
-          <a:noFill/>
-          <a:ln/>
-        </p:spPr>
-        <p:txBody>
-          <a:bodyPr wrap="square" lIns="0" tIns="0" rIns="0" bIns="0" rtlCol="0" anchor="t">
+          <p:cNvPr id="20" name="Text 18"/>
+          <p:cNvSpPr/>
+          <p:nvPr/>
+        </p:nvSpPr>
+        <p:spPr>
+          <a:xfrm>
+            <a:off x="923544" y="3575304"/>
+            <a:ext cx="493776" cy="457200"/>
+          </a:xfrm>
+          <a:prstGeom prst="rect">
+            <a:avLst/>
+          </a:prstGeom>
+          <a:noFill/>
+          <a:ln/>
+        </p:spPr>
+        <p:txBody>
+          <a:bodyPr wrap="square" lIns="0" tIns="0" rIns="0" bIns="0" rtlCol="0" anchor="ctr">
+            <a:normAutofit/>
+          </a:bodyPr>
+          <a:lstStyle/>
+          <a:p>
+            <a:pPr algn="ctr" indent="0" marL="0">
+              <a:buNone/>
+            </a:pPr>
+            <a:r>
+              <a:rPr lang="en-US" sz="1400" b="1" dirty="0">
+                <a:solidFill>
+                  <a:srgbClr val="FFFFFF"/>
+                </a:solidFill>
+                <a:latin typeface="Aptos" pitchFamily="34" charset="0"/>
+                <a:ea typeface="Aptos" pitchFamily="34" charset="-122"/>
+                <a:cs typeface="Aptos" pitchFamily="34" charset="-120"/>
+              </a:rPr>
+              <a:t>3</a:t>
+            </a:r>
+            <a:endParaRPr lang="en-US" sz="1400" dirty="0"/>
+          </a:p>
+        </p:txBody>
+      </p:sp>
+      <p:sp>
+        <p:nvSpPr>
+          <p:cNvPr id="21" name="Text 19"/>
+          <p:cNvSpPr/>
+          <p:nvPr/>
+        </p:nvSpPr>
+        <p:spPr>
+          <a:xfrm>
+            <a:off x="1609344" y="3575304"/>
+            <a:ext cx="9573768" cy="475488"/>
+          </a:xfrm>
+          <a:prstGeom prst="rect">
+            <a:avLst/>
+          </a:prstGeom>
+          <a:noFill/>
+          <a:ln/>
+        </p:spPr>
+        <p:txBody>
+          <a:bodyPr wrap="square" lIns="0" tIns="0" rIns="0" bIns="0" rtlCol="0" anchor="ctr">
             <a:normAutofit/>
           </a:bodyPr>
           <a:lstStyle/>
@@ -3186,48 +3478,7 @@
               <a:buNone/>
             </a:pPr>
             <a:r>
-              <a:rPr lang="en-US" sz="1450" b="1" dirty="0">
-                <a:solidFill>
-                  <a:srgbClr val="16324F"/>
-                </a:solidFill>
-                <a:latin typeface="Aptos" pitchFamily="34" charset="0"/>
-                <a:ea typeface="Aptos" pitchFamily="34" charset="-122"/>
-                <a:cs typeface="Aptos" pitchFamily="34" charset="-120"/>
-              </a:rPr>
-              <a:t>Potential φ</a:t>
-            </a:r>
-            <a:endParaRPr lang="en-US" sz="1450" dirty="0"/>
-          </a:p>
-        </p:txBody>
-      </p:sp>
-      <p:sp>
-        <p:nvSpPr>
-          <p:cNvPr id="16" name="Text 14"/>
-          <p:cNvSpPr/>
-          <p:nvPr/>
-        </p:nvSpPr>
-        <p:spPr>
-          <a:xfrm>
-            <a:off x="6492240" y="2157984"/>
-            <a:ext cx="4974336" cy="740664"/>
-          </a:xfrm>
-          <a:prstGeom prst="rect">
-            <a:avLst/>
-          </a:prstGeom>
-          <a:noFill/>
-          <a:ln/>
-        </p:spPr>
-        <p:txBody>
-          <a:bodyPr wrap="square" lIns="0" tIns="0" rIns="0" bIns="0" rtlCol="0" anchor="t">
-            <a:normAutofit/>
-          </a:bodyPr>
-          <a:lstStyle/>
-          <a:p>
-            <a:pPr indent="0" marL="0">
-              <a:buNone/>
-            </a:pPr>
-            <a:r>
-              <a:rPr lang="en-US" sz="1350" dirty="0">
+              <a:rPr lang="en-US" sz="1600" b="1" dirty="0">
                 <a:solidFill>
                   <a:srgbClr val="203040"/>
                 </a:solidFill>
@@ -3235,26 +3486,26 @@
                 <a:ea typeface="Aptos" pitchFamily="34" charset="-122"/>
                 <a:cs typeface="Aptos" pitchFamily="34" charset="-120"/>
               </a:rPr>
-              <a:t>Potentielle elektrische Energie pro Ladung.</a:t>
-            </a:r>
-            <a:endParaRPr lang="en-US" sz="1350" dirty="0"/>
-          </a:p>
-        </p:txBody>
-      </p:sp>
-      <p:sp>
-        <p:nvSpPr>
-          <p:cNvPr id="17" name="Shape 15"/>
-          <p:cNvSpPr/>
-          <p:nvPr/>
-        </p:nvSpPr>
-        <p:spPr>
-          <a:xfrm>
-            <a:off x="658368" y="3200400"/>
-            <a:ext cx="5394960" cy="1417320"/>
+              <a:t>Welche Einheit hat die elektrische Spannung?</a:t>
+            </a:r>
+            <a:endParaRPr lang="en-US" sz="1600" dirty="0"/>
+          </a:p>
+        </p:txBody>
+      </p:sp>
+      <p:sp>
+        <p:nvSpPr>
+          <p:cNvPr id="22" name="Shape 20"/>
+          <p:cNvSpPr/>
+          <p:nvPr/>
+        </p:nvSpPr>
+        <p:spPr>
+          <a:xfrm>
+            <a:off x="749808" y="4297680"/>
+            <a:ext cx="10607040" cy="658368"/>
           </a:xfrm>
           <a:prstGeom prst="roundRect">
             <a:avLst>
-              <a:gd name="adj" fmla="val 5161"/>
+              <a:gd name="adj" fmla="val 6944"/>
             </a:avLst>
           </a:prstGeom>
           <a:solidFill>
@@ -3262,39 +3513,32 @@
           </a:solidFill>
           <a:ln w="12700">
             <a:solidFill>
-              <a:srgbClr val="C8D5E2"/>
-            </a:solidFill>
-            <a:prstDash val="solid"/>
-          </a:ln>
-          <a:effectLst>
-            <a:outerShdw sx="100000" sy="100000" kx="0" ky="0" algn="bl" rotWithShape="0" blurRad="12700" dist="50800" dir="2700000">
-              <a:srgbClr val="B7C5D2">
-                <a:alpha val="12000"/>
-              </a:srgbClr>
-            </a:outerShdw>
-          </a:effectLst>
-        </p:spPr>
-      </p:sp>
-      <p:sp>
-        <p:nvSpPr>
-          <p:cNvPr id="18" name="Shape 16"/>
-          <p:cNvSpPr/>
-          <p:nvPr/>
-        </p:nvSpPr>
-        <p:spPr>
-          <a:xfrm>
-            <a:off x="658368" y="3200400"/>
-            <a:ext cx="73152" cy="1417320"/>
-          </a:xfrm>
-          <a:prstGeom prst="rect">
+              <a:srgbClr val="CDD8E2"/>
+            </a:solidFill>
+            <a:prstDash val="solid"/>
+          </a:ln>
+        </p:spPr>
+      </p:sp>
+      <p:sp>
+        <p:nvSpPr>
+          <p:cNvPr id="23" name="Shape 21"/>
+          <p:cNvSpPr/>
+          <p:nvPr/>
+        </p:nvSpPr>
+        <p:spPr>
+          <a:xfrm>
+            <a:off x="923544" y="4379976"/>
+            <a:ext cx="493776" cy="493776"/>
+          </a:xfrm>
+          <a:prstGeom prst="ellipse">
             <a:avLst/>
           </a:prstGeom>
           <a:solidFill>
-            <a:srgbClr val="2F6FAD"/>
+            <a:srgbClr val="4E7A5A"/>
           </a:solidFill>
           <a:ln w="12700">
             <a:solidFill>
-              <a:srgbClr val="2F6FAD">
+              <a:srgbClr val="4E7A5A">
                 <a:alpha val="0"/>
               </a:srgbClr>
             </a:solidFill>
@@ -3304,23 +3548,64 @@
       </p:sp>
       <p:sp>
         <p:nvSpPr>
-          <p:cNvPr id="19" name="Text 17"/>
-          <p:cNvSpPr/>
-          <p:nvPr/>
-        </p:nvSpPr>
-        <p:spPr>
-          <a:xfrm>
-            <a:off x="859536" y="3346704"/>
-            <a:ext cx="5010912" cy="320040"/>
-          </a:xfrm>
-          <a:prstGeom prst="rect">
-            <a:avLst/>
-          </a:prstGeom>
-          <a:noFill/>
-          <a:ln/>
-        </p:spPr>
-        <p:txBody>
-          <a:bodyPr wrap="square" lIns="0" tIns="0" rIns="0" bIns="0" rtlCol="0" anchor="t">
+          <p:cNvPr id="24" name="Text 22"/>
+          <p:cNvSpPr/>
+          <p:nvPr/>
+        </p:nvSpPr>
+        <p:spPr>
+          <a:xfrm>
+            <a:off x="923544" y="4389120"/>
+            <a:ext cx="493776" cy="457200"/>
+          </a:xfrm>
+          <a:prstGeom prst="rect">
+            <a:avLst/>
+          </a:prstGeom>
+          <a:noFill/>
+          <a:ln/>
+        </p:spPr>
+        <p:txBody>
+          <a:bodyPr wrap="square" lIns="0" tIns="0" rIns="0" bIns="0" rtlCol="0" anchor="ctr">
+            <a:normAutofit/>
+          </a:bodyPr>
+          <a:lstStyle/>
+          <a:p>
+            <a:pPr algn="ctr" indent="0" marL="0">
+              <a:buNone/>
+            </a:pPr>
+            <a:r>
+              <a:rPr lang="en-US" sz="1400" b="1" dirty="0">
+                <a:solidFill>
+                  <a:srgbClr val="FFFFFF"/>
+                </a:solidFill>
+                <a:latin typeface="Aptos" pitchFamily="34" charset="0"/>
+                <a:ea typeface="Aptos" pitchFamily="34" charset="-122"/>
+                <a:cs typeface="Aptos" pitchFamily="34" charset="-120"/>
+              </a:rPr>
+              <a:t>4</a:t>
+            </a:r>
+            <a:endParaRPr lang="en-US" sz="1400" dirty="0"/>
+          </a:p>
+        </p:txBody>
+      </p:sp>
+      <p:sp>
+        <p:nvSpPr>
+          <p:cNvPr id="25" name="Text 23"/>
+          <p:cNvSpPr/>
+          <p:nvPr/>
+        </p:nvSpPr>
+        <p:spPr>
+          <a:xfrm>
+            <a:off x="1609344" y="4389120"/>
+            <a:ext cx="9573768" cy="475488"/>
+          </a:xfrm>
+          <a:prstGeom prst="rect">
+            <a:avLst/>
+          </a:prstGeom>
+          <a:noFill/>
+          <a:ln/>
+        </p:spPr>
+        <p:txBody>
+          <a:bodyPr wrap="square" lIns="0" tIns="0" rIns="0" bIns="0" rtlCol="0" anchor="ctr">
             <a:normAutofit/>
           </a:bodyPr>
           <a:lstStyle/>
@@ -3329,48 +3614,7 @@
               <a:buNone/>
             </a:pPr>
             <a:r>
-              <a:rPr lang="en-US" sz="1450" b="1" dirty="0">
-                <a:solidFill>
-                  <a:srgbClr val="16324F"/>
-                </a:solidFill>
-                <a:latin typeface="Aptos" pitchFamily="34" charset="0"/>
-                <a:ea typeface="Aptos" pitchFamily="34" charset="-122"/>
-                <a:cs typeface="Aptos" pitchFamily="34" charset="-120"/>
-              </a:rPr>
-              <a:t>Kapazität C</a:t>
-            </a:r>
-            <a:endParaRPr lang="en-US" sz="1450" dirty="0"/>
-          </a:p>
-        </p:txBody>
-      </p:sp>
-      <p:sp>
-        <p:nvSpPr>
-          <p:cNvPr id="20" name="Text 18"/>
-          <p:cNvSpPr/>
-          <p:nvPr/>
-        </p:nvSpPr>
-        <p:spPr>
-          <a:xfrm>
-            <a:off x="877824" y="3730752"/>
-            <a:ext cx="4974336" cy="740664"/>
-          </a:xfrm>
-          <a:prstGeom prst="rect">
-            <a:avLst/>
-          </a:prstGeom>
-          <a:noFill/>
-          <a:ln/>
-        </p:spPr>
-        <p:txBody>
-          <a:bodyPr wrap="square" lIns="0" tIns="0" rIns="0" bIns="0" rtlCol="0" anchor="t">
-            <a:normAutofit/>
-          </a:bodyPr>
-          <a:lstStyle/>
-          <a:p>
-            <a:pPr indent="0" marL="0">
-              <a:buNone/>
-            </a:pPr>
-            <a:r>
-              <a:rPr lang="en-US" sz="1350" dirty="0">
+              <a:rPr lang="en-US" sz="1600" b="1" dirty="0">
                 <a:solidFill>
                   <a:srgbClr val="203040"/>
                 </a:solidFill>
@@ -3378,26 +3622,26 @@
                 <a:ea typeface="Aptos" pitchFamily="34" charset="-122"/>
                 <a:cs typeface="Aptos" pitchFamily="34" charset="-120"/>
               </a:rPr>
-              <a:t>Ladung pro Spannung eines Kondensators.</a:t>
-            </a:r>
-            <a:endParaRPr lang="en-US" sz="1350" dirty="0"/>
-          </a:p>
-        </p:txBody>
-      </p:sp>
-      <p:sp>
-        <p:nvSpPr>
-          <p:cNvPr id="21" name="Shape 19"/>
-          <p:cNvSpPr/>
-          <p:nvPr/>
-        </p:nvSpPr>
-        <p:spPr>
-          <a:xfrm>
-            <a:off x="6272784" y="3200400"/>
-            <a:ext cx="5394960" cy="1417320"/>
+              <a:t>Wirkt auf eine ruhende Ladung in einem reinen Magnetfeld eine Lorentzkraft?</a:t>
+            </a:r>
+            <a:endParaRPr lang="en-US" sz="1600" dirty="0"/>
+          </a:p>
+        </p:txBody>
+      </p:sp>
+      <p:sp>
+        <p:nvSpPr>
+          <p:cNvPr id="26" name="Shape 24"/>
+          <p:cNvSpPr/>
+          <p:nvPr/>
+        </p:nvSpPr>
+        <p:spPr>
+          <a:xfrm>
+            <a:off x="749808" y="5111496"/>
+            <a:ext cx="10607040" cy="658368"/>
           </a:xfrm>
           <a:prstGeom prst="roundRect">
             <a:avLst>
-              <a:gd name="adj" fmla="val 5161"/>
+              <a:gd name="adj" fmla="val 6944"/>
             </a:avLst>
           </a:prstGeom>
           <a:solidFill>
@@ -3405,39 +3649,32 @@
           </a:solidFill>
           <a:ln w="12700">
             <a:solidFill>
-              <a:srgbClr val="C8D5E2"/>
-            </a:solidFill>
-            <a:prstDash val="solid"/>
-          </a:ln>
-          <a:effectLst>
-            <a:outerShdw sx="100000" sy="100000" kx="0" ky="0" algn="bl" rotWithShape="0" blurRad="12700" dist="50800" dir="2700000">
-              <a:srgbClr val="B7C5D2">
-                <a:alpha val="12000"/>
-              </a:srgbClr>
-            </a:outerShdw>
-          </a:effectLst>
-        </p:spPr>
-      </p:sp>
-      <p:sp>
-        <p:nvSpPr>
-          <p:cNvPr id="22" name="Shape 20"/>
-          <p:cNvSpPr/>
-          <p:nvPr/>
-        </p:nvSpPr>
-        <p:spPr>
-          <a:xfrm>
-            <a:off x="6272784" y="3200400"/>
-            <a:ext cx="73152" cy="1417320"/>
-          </a:xfrm>
-          <a:prstGeom prst="rect">
+              <a:srgbClr val="CDD8E2"/>
+            </a:solidFill>
+            <a:prstDash val="solid"/>
+          </a:ln>
+        </p:spPr>
+      </p:sp>
+      <p:sp>
+        <p:nvSpPr>
+          <p:cNvPr id="27" name="Shape 25"/>
+          <p:cNvSpPr/>
+          <p:nvPr/>
+        </p:nvSpPr>
+        <p:spPr>
+          <a:xfrm>
+            <a:off x="923544" y="5193792"/>
+            <a:ext cx="493776" cy="493776"/>
+          </a:xfrm>
+          <a:prstGeom prst="ellipse">
             <a:avLst/>
           </a:prstGeom>
           <a:solidFill>
-            <a:srgbClr val="2C7A7B"/>
+            <a:srgbClr val="D78C24"/>
           </a:solidFill>
           <a:ln w="12700">
             <a:solidFill>
-              <a:srgbClr val="2C7A7B">
+              <a:srgbClr val="D78C24">
                 <a:alpha val="0"/>
               </a:srgbClr>
             </a:solidFill>
@@ -3447,23 +3684,64 @@
       </p:sp>
       <p:sp>
         <p:nvSpPr>
-          <p:cNvPr id="23" name="Text 21"/>
-          <p:cNvSpPr/>
-          <p:nvPr/>
-        </p:nvSpPr>
-        <p:spPr>
-          <a:xfrm>
-            <a:off x="6473952" y="3346704"/>
-            <a:ext cx="5010912" cy="320040"/>
-          </a:xfrm>
-          <a:prstGeom prst="rect">
-            <a:avLst/>
-          </a:prstGeom>
-          <a:noFill/>
-          <a:ln/>
-        </p:spPr>
-        <p:txBody>
-          <a:bodyPr wrap="square" lIns="0" tIns="0" rIns="0" bIns="0" rtlCol="0" anchor="t">
+          <p:cNvPr id="28" name="Text 26"/>
+          <p:cNvSpPr/>
+          <p:nvPr/>
+        </p:nvSpPr>
+        <p:spPr>
+          <a:xfrm>
+            <a:off x="923544" y="5202936"/>
+            <a:ext cx="493776" cy="457200"/>
+          </a:xfrm>
+          <a:prstGeom prst="rect">
+            <a:avLst/>
+          </a:prstGeom>
+          <a:noFill/>
+          <a:ln/>
+        </p:spPr>
+        <p:txBody>
+          <a:bodyPr wrap="square" lIns="0" tIns="0" rIns="0" bIns="0" rtlCol="0" anchor="ctr">
+            <a:normAutofit/>
+          </a:bodyPr>
+          <a:lstStyle/>
+          <a:p>
+            <a:pPr algn="ctr" indent="0" marL="0">
+              <a:buNone/>
+            </a:pPr>
+            <a:r>
+              <a:rPr lang="en-US" sz="1400" b="1" dirty="0">
+                <a:solidFill>
+                  <a:srgbClr val="FFFFFF"/>
+                </a:solidFill>
+                <a:latin typeface="Aptos" pitchFamily="34" charset="0"/>
+                <a:ea typeface="Aptos" pitchFamily="34" charset="-122"/>
+                <a:cs typeface="Aptos" pitchFamily="34" charset="-120"/>
+              </a:rPr>
+              <a:t>5</a:t>
+            </a:r>
+            <a:endParaRPr lang="en-US" sz="1400" dirty="0"/>
+          </a:p>
+        </p:txBody>
+      </p:sp>
+      <p:sp>
+        <p:nvSpPr>
+          <p:cNvPr id="29" name="Text 27"/>
+          <p:cNvSpPr/>
+          <p:nvPr/>
+        </p:nvSpPr>
+        <p:spPr>
+          <a:xfrm>
+            <a:off x="1609344" y="5202936"/>
+            <a:ext cx="9573768" cy="475488"/>
+          </a:xfrm>
+          <a:prstGeom prst="rect">
+            <a:avLst/>
+          </a:prstGeom>
+          <a:noFill/>
+          <a:ln/>
+        </p:spPr>
+        <p:txBody>
+          <a:bodyPr wrap="square" lIns="0" tIns="0" rIns="0" bIns="0" rtlCol="0" anchor="ctr">
             <a:normAutofit/>
           </a:bodyPr>
           <a:lstStyle/>
@@ -3472,48 +3750,7 @@
               <a:buNone/>
             </a:pPr>
             <a:r>
-              <a:rPr lang="en-US" sz="1450" b="1" dirty="0">
-                <a:solidFill>
-                  <a:srgbClr val="16324F"/>
-                </a:solidFill>
-                <a:latin typeface="Aptos" pitchFamily="34" charset="0"/>
-                <a:ea typeface="Aptos" pitchFamily="34" charset="-122"/>
-                <a:cs typeface="Aptos" pitchFamily="34" charset="-120"/>
-              </a:rPr>
-              <a:t>Lorentzkraft</a:t>
-            </a:r>
-            <a:endParaRPr lang="en-US" sz="1450" dirty="0"/>
-          </a:p>
-        </p:txBody>
-      </p:sp>
-      <p:sp>
-        <p:nvSpPr>
-          <p:cNvPr id="24" name="Text 22"/>
-          <p:cNvSpPr/>
-          <p:nvPr/>
-        </p:nvSpPr>
-        <p:spPr>
-          <a:xfrm>
-            <a:off x="6492240" y="3730752"/>
-            <a:ext cx="4974336" cy="740664"/>
-          </a:xfrm>
-          <a:prstGeom prst="rect">
-            <a:avLst/>
-          </a:prstGeom>
-          <a:noFill/>
-          <a:ln/>
-        </p:spPr>
-        <p:txBody>
-          <a:bodyPr wrap="square" lIns="0" tIns="0" rIns="0" bIns="0" rtlCol="0" anchor="t">
-            <a:normAutofit/>
-          </a:bodyPr>
-          <a:lstStyle/>
-          <a:p>
-            <a:pPr indent="0" marL="0">
-              <a:buNone/>
-            </a:pPr>
-            <a:r>
-              <a:rPr lang="en-US" sz="1350" dirty="0">
+              <a:rPr lang="en-US" sz="1600" b="1" dirty="0">
                 <a:solidFill>
                   <a:srgbClr val="203040"/>
                 </a:solidFill>
@@ -3521,295 +3758,9 @@
                 <a:ea typeface="Aptos" pitchFamily="34" charset="-122"/>
                 <a:cs typeface="Aptos" pitchFamily="34" charset="-120"/>
               </a:rPr>
-              <a:t>Kraft auf bewegte Ladung im magnetischen Feld.</a:t>
-            </a:r>
-            <a:endParaRPr lang="en-US" sz="1350" dirty="0"/>
-          </a:p>
-        </p:txBody>
-      </p:sp>
-      <p:sp>
-        <p:nvSpPr>
-          <p:cNvPr id="25" name="Shape 23"/>
-          <p:cNvSpPr/>
-          <p:nvPr/>
-        </p:nvSpPr>
-        <p:spPr>
-          <a:xfrm>
-            <a:off x="658368" y="4773168"/>
-            <a:ext cx="5394960" cy="1417320"/>
-          </a:xfrm>
-          <a:prstGeom prst="roundRect">
-            <a:avLst>
-              <a:gd name="adj" fmla="val 5161"/>
-            </a:avLst>
-          </a:prstGeom>
-          <a:solidFill>
-            <a:srgbClr val="FFFFFF"/>
-          </a:solidFill>
-          <a:ln w="12700">
-            <a:solidFill>
-              <a:srgbClr val="C8D5E2"/>
-            </a:solidFill>
-            <a:prstDash val="solid"/>
-          </a:ln>
-          <a:effectLst>
-            <a:outerShdw sx="100000" sy="100000" kx="0" ky="0" algn="bl" rotWithShape="0" blurRad="12700" dist="50800" dir="2700000">
-              <a:srgbClr val="B7C5D2">
-                <a:alpha val="12000"/>
-              </a:srgbClr>
-            </a:outerShdw>
-          </a:effectLst>
-        </p:spPr>
-      </p:sp>
-      <p:sp>
-        <p:nvSpPr>
-          <p:cNvPr id="26" name="Shape 24"/>
-          <p:cNvSpPr/>
-          <p:nvPr/>
-        </p:nvSpPr>
-        <p:spPr>
-          <a:xfrm>
-            <a:off x="658368" y="4773168"/>
-            <a:ext cx="73152" cy="1417320"/>
-          </a:xfrm>
-          <a:prstGeom prst="rect">
-            <a:avLst/>
-          </a:prstGeom>
-          <a:solidFill>
-            <a:srgbClr val="2F6FAD"/>
-          </a:solidFill>
-          <a:ln w="12700">
-            <a:solidFill>
-              <a:srgbClr val="2F6FAD">
-                <a:alpha val="0"/>
-              </a:srgbClr>
-            </a:solidFill>
-            <a:prstDash val="solid"/>
-          </a:ln>
-        </p:spPr>
-      </p:sp>
-      <p:sp>
-        <p:nvSpPr>
-          <p:cNvPr id="27" name="Text 25"/>
-          <p:cNvSpPr/>
-          <p:nvPr/>
-        </p:nvSpPr>
-        <p:spPr>
-          <a:xfrm>
-            <a:off x="859536" y="4919472"/>
-            <a:ext cx="5010912" cy="320040"/>
-          </a:xfrm>
-          <a:prstGeom prst="rect">
-            <a:avLst/>
-          </a:prstGeom>
-          <a:noFill/>
-          <a:ln/>
-        </p:spPr>
-        <p:txBody>
-          <a:bodyPr wrap="square" lIns="0" tIns="0" rIns="0" bIns="0" rtlCol="0" anchor="t">
-            <a:normAutofit/>
-          </a:bodyPr>
-          <a:lstStyle/>
-          <a:p>
-            <a:pPr indent="0" marL="0">
-              <a:buNone/>
-            </a:pPr>
-            <a:r>
-              <a:rPr lang="en-US" sz="1450" b="1" dirty="0">
-                <a:solidFill>
-                  <a:srgbClr val="16324F"/>
-                </a:solidFill>
-                <a:latin typeface="Aptos" pitchFamily="34" charset="0"/>
-                <a:ea typeface="Aptos" pitchFamily="34" charset="-122"/>
-                <a:cs typeface="Aptos" pitchFamily="34" charset="-120"/>
-              </a:rPr>
-              <a:t>Magnetischer Fluss Φ</a:t>
-            </a:r>
-            <a:endParaRPr lang="en-US" sz="1450" dirty="0"/>
-          </a:p>
-        </p:txBody>
-      </p:sp>
-      <p:sp>
-        <p:nvSpPr>
-          <p:cNvPr id="28" name="Text 26"/>
-          <p:cNvSpPr/>
-          <p:nvPr/>
-        </p:nvSpPr>
-        <p:spPr>
-          <a:xfrm>
-            <a:off x="877824" y="5303520"/>
-            <a:ext cx="4974336" cy="740664"/>
-          </a:xfrm>
-          <a:prstGeom prst="rect">
-            <a:avLst/>
-          </a:prstGeom>
-          <a:noFill/>
-          <a:ln/>
-        </p:spPr>
-        <p:txBody>
-          <a:bodyPr wrap="square" lIns="0" tIns="0" rIns="0" bIns="0" rtlCol="0" anchor="t">
-            <a:normAutofit/>
-          </a:bodyPr>
-          <a:lstStyle/>
-          <a:p>
-            <a:pPr indent="0" marL="0">
-              <a:buNone/>
-            </a:pPr>
-            <a:r>
-              <a:rPr lang="en-US" sz="1350" dirty="0">
-                <a:solidFill>
-                  <a:srgbClr val="203040"/>
-                </a:solidFill>
-                <a:latin typeface="Aptos" pitchFamily="34" charset="0"/>
-                <a:ea typeface="Aptos" pitchFamily="34" charset="-122"/>
-                <a:cs typeface="Aptos" pitchFamily="34" charset="-120"/>
-              </a:rPr>
-              <a:t>Flächenbezogene Durchsetzung eines Magnetfeldes.</a:t>
-            </a:r>
-            <a:endParaRPr lang="en-US" sz="1350" dirty="0"/>
-          </a:p>
-        </p:txBody>
-      </p:sp>
-      <p:sp>
-        <p:nvSpPr>
-          <p:cNvPr id="29" name="Shape 27"/>
-          <p:cNvSpPr/>
-          <p:nvPr/>
-        </p:nvSpPr>
-        <p:spPr>
-          <a:xfrm>
-            <a:off x="6272784" y="4773168"/>
-            <a:ext cx="5394960" cy="1417320"/>
-          </a:xfrm>
-          <a:prstGeom prst="roundRect">
-            <a:avLst>
-              <a:gd name="adj" fmla="val 5161"/>
-            </a:avLst>
-          </a:prstGeom>
-          <a:solidFill>
-            <a:srgbClr val="FFFFFF"/>
-          </a:solidFill>
-          <a:ln w="12700">
-            <a:solidFill>
-              <a:srgbClr val="C8D5E2"/>
-            </a:solidFill>
-            <a:prstDash val="solid"/>
-          </a:ln>
-          <a:effectLst>
-            <a:outerShdw sx="100000" sy="100000" kx="0" ky="0" algn="bl" rotWithShape="0" blurRad="12700" dist="50800" dir="2700000">
-              <a:srgbClr val="B7C5D2">
-                <a:alpha val="12000"/>
-              </a:srgbClr>
-            </a:outerShdw>
-          </a:effectLst>
-        </p:spPr>
-      </p:sp>
-      <p:sp>
-        <p:nvSpPr>
-          <p:cNvPr id="30" name="Shape 28"/>
-          <p:cNvSpPr/>
-          <p:nvPr/>
-        </p:nvSpPr>
-        <p:spPr>
-          <a:xfrm>
-            <a:off x="6272784" y="4773168"/>
-            <a:ext cx="73152" cy="1417320"/>
-          </a:xfrm>
-          <a:prstGeom prst="rect">
-            <a:avLst/>
-          </a:prstGeom>
-          <a:solidFill>
-            <a:srgbClr val="2C7A7B"/>
-          </a:solidFill>
-          <a:ln w="12700">
-            <a:solidFill>
-              <a:srgbClr val="2C7A7B">
-                <a:alpha val="0"/>
-              </a:srgbClr>
-            </a:solidFill>
-            <a:prstDash val="solid"/>
-          </a:ln>
-        </p:spPr>
-      </p:sp>
-      <p:sp>
-        <p:nvSpPr>
-          <p:cNvPr id="31" name="Text 29"/>
-          <p:cNvSpPr/>
-          <p:nvPr/>
-        </p:nvSpPr>
-        <p:spPr>
-          <a:xfrm>
-            <a:off x="6473952" y="4919472"/>
-            <a:ext cx="5010912" cy="320040"/>
-          </a:xfrm>
-          <a:prstGeom prst="rect">
-            <a:avLst/>
-          </a:prstGeom>
-          <a:noFill/>
-          <a:ln/>
-        </p:spPr>
-        <p:txBody>
-          <a:bodyPr wrap="square" lIns="0" tIns="0" rIns="0" bIns="0" rtlCol="0" anchor="t">
-            <a:normAutofit/>
-          </a:bodyPr>
-          <a:lstStyle/>
-          <a:p>
-            <a:pPr indent="0" marL="0">
-              <a:buNone/>
-            </a:pPr>
-            <a:r>
-              <a:rPr lang="en-US" sz="1450" b="1" dirty="0">
-                <a:solidFill>
-                  <a:srgbClr val="16324F"/>
-                </a:solidFill>
-                <a:latin typeface="Aptos" pitchFamily="34" charset="0"/>
-                <a:ea typeface="Aptos" pitchFamily="34" charset="-122"/>
-                <a:cs typeface="Aptos" pitchFamily="34" charset="-120"/>
-              </a:rPr>
-              <a:t>Induktion</a:t>
-            </a:r>
-            <a:endParaRPr lang="en-US" sz="1450" dirty="0"/>
-          </a:p>
-        </p:txBody>
-      </p:sp>
-      <p:sp>
-        <p:nvSpPr>
-          <p:cNvPr id="32" name="Text 30"/>
-          <p:cNvSpPr/>
-          <p:nvPr/>
-        </p:nvSpPr>
-        <p:spPr>
-          <a:xfrm>
-            <a:off x="6492240" y="5303520"/>
-            <a:ext cx="4974336" cy="740664"/>
-          </a:xfrm>
-          <a:prstGeom prst="rect">
-            <a:avLst/>
-          </a:prstGeom>
-          <a:noFill/>
-          <a:ln/>
-        </p:spPr>
-        <p:txBody>
-          <a:bodyPr wrap="square" lIns="0" tIns="0" rIns="0" bIns="0" rtlCol="0" anchor="t">
-            <a:normAutofit/>
-          </a:bodyPr>
-          <a:lstStyle/>
-          <a:p>
-            <a:pPr indent="0" marL="0">
-              <a:buNone/>
-            </a:pPr>
-            <a:r>
-              <a:rPr lang="en-US" sz="1350" dirty="0">
-                <a:solidFill>
-                  <a:srgbClr val="203040"/>
-                </a:solidFill>
-                <a:latin typeface="Aptos" pitchFamily="34" charset="0"/>
-                <a:ea typeface="Aptos" pitchFamily="34" charset="-122"/>
-                <a:cs typeface="Aptos" pitchFamily="34" charset="-120"/>
-              </a:rPr>
-              <a:t>Elektrische Spannung infolge einer Änderung des magnetischen Flusses.</a:t>
-            </a:r>
-            <a:endParaRPr lang="en-US" sz="1350" dirty="0"/>
+              <a:t>Was beobachtet man, wenn sich der magnetische Fluss durch eine Spule ändert?</a:t>
+            </a:r>
+            <a:endParaRPr lang="en-US" sz="1600" dirty="0"/>
           </a:p>
         </p:txBody>
       </p:sp>
@@ -3854,7 +3805,7 @@
         <p:spPr>
           <a:xfrm>
             <a:off x="0" y="0"/>
-            <a:ext cx="12191695" cy="164592"/>
+            <a:ext cx="12191695" cy="137160"/>
           </a:xfrm>
           <a:prstGeom prst="rect">
             <a:avLst/>
@@ -3880,8 +3831,8 @@
         </p:nvSpPr>
         <p:spPr>
           <a:xfrm>
-            <a:off x="566928" y="320040"/>
-            <a:ext cx="2423160" cy="310896"/>
+            <a:off x="566928" y="301752"/>
+            <a:ext cx="3383280" cy="237744"/>
           </a:xfrm>
           <a:prstGeom prst="rect">
             <a:avLst/>
@@ -3899,7 +3850,7 @@
               <a:buNone/>
             </a:pPr>
             <a:r>
-              <a:rPr lang="en-US" sz="1050" b="1" spc="130" kern="0" dirty="0">
+              <a:rPr lang="en-US" sz="1000" b="1" spc="120" kern="0" dirty="0">
                 <a:solidFill>
                   <a:srgbClr val="2F6FAD"/>
                 </a:solidFill>
@@ -3907,9 +3858,9 @@
                 <a:ea typeface="Aptos" pitchFamily="34" charset="-122"/>
                 <a:cs typeface="Aptos" pitchFamily="34" charset="-120"/>
               </a:rPr>
-              <a:t>ZUSAMMENHÄNGE</a:t>
-            </a:r>
-            <a:endParaRPr lang="en-US" sz="1050" dirty="0"/>
+              <a:t>STUFE 2 · VERSTEHEN</a:t>
+            </a:r>
+            <a:endParaRPr lang="en-US" sz="1000" dirty="0"/>
           </a:p>
         </p:txBody>
       </p:sp>
@@ -3921,8 +3872,8 @@
         </p:nvSpPr>
         <p:spPr>
           <a:xfrm>
-            <a:off x="566928" y="658368"/>
-            <a:ext cx="10927080" cy="640080"/>
+            <a:off x="566928" y="621792"/>
+            <a:ext cx="10698480" cy="548640"/>
           </a:xfrm>
           <a:prstGeom prst="rect">
             <a:avLst/>
@@ -3940,17 +3891,17 @@
               <a:buNone/>
             </a:pPr>
             <a:r>
-              <a:rPr lang="en-US" sz="2800" b="1" dirty="0">
-                <a:solidFill>
-                  <a:srgbClr val="16324F"/>
-                </a:solidFill>
-                <a:latin typeface="Aptos" pitchFamily="34" charset="0"/>
-                <a:ea typeface="Aptos" pitchFamily="34" charset="-122"/>
-                <a:cs typeface="Aptos" pitchFamily="34" charset="-120"/>
-              </a:rPr>
-              <a:t>Formeln, Beziehungen und zentrale Aussagen</a:t>
-            </a:r>
-            <a:endParaRPr lang="en-US" sz="2800" dirty="0"/>
+              <a:rPr lang="en-US" sz="2700" b="1" dirty="0">
+                <a:solidFill>
+                  <a:srgbClr val="17324D"/>
+                </a:solidFill>
+                <a:latin typeface="Aptos" pitchFamily="34" charset="0"/>
+                <a:ea typeface="Aptos" pitchFamily="34" charset="-122"/>
+                <a:cs typeface="Aptos" pitchFamily="34" charset="-120"/>
+              </a:rPr>
+              <a:t>Fachbegriffe und Formeln</a:t>
+            </a:r>
+            <a:endParaRPr lang="en-US" sz="2700" dirty="0"/>
           </a:p>
         </p:txBody>
       </p:sp>
@@ -3962,8 +3913,8 @@
         </p:nvSpPr>
         <p:spPr>
           <a:xfrm>
-            <a:off x="9784080" y="338328"/>
-            <a:ext cx="1737360" cy="246888"/>
+            <a:off x="9509760" y="310896"/>
+            <a:ext cx="2057400" cy="219456"/>
           </a:xfrm>
           <a:prstGeom prst="rect">
             <a:avLst/>
@@ -3981,9 +3932,9 @@
               <a:buNone/>
             </a:pPr>
             <a:r>
-              <a:rPr lang="en-US" sz="1050" b="1" dirty="0">
-                <a:solidFill>
-                  <a:srgbClr val="5B6B7B"/>
+              <a:rPr lang="en-US" sz="1020" b="1" dirty="0">
+                <a:solidFill>
+                  <a:srgbClr val="607080"/>
                 </a:solidFill>
                 <a:latin typeface="Aptos" pitchFamily="34" charset="0"/>
                 <a:ea typeface="Aptos" pitchFamily="34" charset="-122"/>
@@ -3991,7 +3942,7 @@
               </a:rPr>
               <a:t>Q1/Q2 Leistungskurs</a:t>
             </a:r>
-            <a:endParaRPr lang="en-US" sz="1050" dirty="0"/>
+            <a:endParaRPr lang="en-US" sz="1020" dirty="0"/>
           </a:p>
         </p:txBody>
       </p:sp>
@@ -4003,7 +3954,7 @@
         </p:nvSpPr>
         <p:spPr>
           <a:xfrm>
-            <a:off x="566928" y="1353312"/>
+            <a:off x="566928" y="1280160"/>
             <a:ext cx="11045952" cy="0"/>
           </a:xfrm>
           <a:prstGeom prst="line">
@@ -4012,7 +3963,7 @@
           <a:noFill/>
           <a:ln w="12700">
             <a:solidFill>
-              <a:srgbClr val="C8D5E2"/>
+              <a:srgbClr val="CDD8E2"/>
             </a:solidFill>
             <a:prstDash val="solid"/>
           </a:ln>
@@ -4026,8 +3977,8 @@
         </p:nvSpPr>
         <p:spPr>
           <a:xfrm>
-            <a:off x="566928" y="6528816"/>
-            <a:ext cx="5303520" cy="201168"/>
+            <a:off x="566928" y="6519672"/>
+            <a:ext cx="5212080" cy="182880"/>
           </a:xfrm>
           <a:prstGeom prst="rect">
             <a:avLst/>
@@ -4045,9 +3996,9 @@
               <a:buNone/>
             </a:pPr>
             <a:r>
-              <a:rPr lang="en-US" sz="950" dirty="0">
-                <a:solidFill>
-                  <a:srgbClr val="5B6B7B"/>
+              <a:rPr lang="en-US" sz="900" dirty="0">
+                <a:solidFill>
+                  <a:srgbClr val="607080"/>
                 </a:solidFill>
                 <a:latin typeface="Aptos" pitchFamily="34" charset="0"/>
                 <a:ea typeface="Aptos" pitchFamily="34" charset="-122"/>
@@ -4055,7 +4006,7 @@
               </a:rPr>
               <a:t>Fortlaufende Wiederholung · Physik NRW</a:t>
             </a:r>
-            <a:endParaRPr lang="en-US" sz="950" dirty="0"/>
+            <a:endParaRPr lang="en-US" sz="900" dirty="0"/>
           </a:p>
         </p:txBody>
       </p:sp>
@@ -4067,8 +4018,8 @@
         </p:nvSpPr>
         <p:spPr>
           <a:xfrm>
-            <a:off x="11109960" y="6528816"/>
-            <a:ext cx="502920" cy="201168"/>
+            <a:off x="11137392" y="6519672"/>
+            <a:ext cx="457200" cy="182880"/>
           </a:xfrm>
           <a:prstGeom prst="rect">
             <a:avLst/>
@@ -4086,9 +4037,9 @@
               <a:buNone/>
             </a:pPr>
             <a:r>
-              <a:rPr lang="en-US" sz="950" dirty="0">
-                <a:solidFill>
-                  <a:srgbClr val="5B6B7B"/>
+              <a:rPr lang="en-US" sz="900" dirty="0">
+                <a:solidFill>
+                  <a:srgbClr val="607080"/>
                 </a:solidFill>
                 <a:latin typeface="Aptos" pitchFamily="34" charset="0"/>
                 <a:ea typeface="Aptos" pitchFamily="34" charset="-122"/>
@@ -4096,7 +4047,7 @@
               </a:rPr>
               <a:t>4</a:t>
             </a:r>
-            <a:endParaRPr lang="en-US" sz="950" dirty="0"/>
+            <a:endParaRPr lang="en-US" sz="900" dirty="0"/>
           </a:p>
         </p:txBody>
       </p:sp>
@@ -4108,12 +4059,192 @@
         </p:nvSpPr>
         <p:spPr>
           <a:xfrm>
-            <a:off x="658368" y="1618488"/>
-            <a:ext cx="5394960" cy="1389888"/>
+            <a:off x="658368" y="1600200"/>
+            <a:ext cx="5340096" cy="1938528"/>
           </a:xfrm>
           <a:prstGeom prst="roundRect">
             <a:avLst>
-              <a:gd name="adj" fmla="val 4605"/>
+              <a:gd name="adj" fmla="val 2830"/>
+            </a:avLst>
+          </a:prstGeom>
+          <a:solidFill>
+            <a:srgbClr val="F0F4F7"/>
+          </a:solidFill>
+          <a:ln w="12700">
+            <a:solidFill>
+              <a:srgbClr val="CDD8E2"/>
+            </a:solidFill>
+            <a:prstDash val="solid"/>
+          </a:ln>
+          <a:effectLst>
+            <a:outerShdw sx="100000" sy="100000" kx="0" ky="0" algn="bl" rotWithShape="0" blurRad="12700" dist="50800" dir="2700000">
+              <a:srgbClr val="A8B8C7">
+                <a:alpha val="11000"/>
+              </a:srgbClr>
+            </a:outerShdw>
+          </a:effectLst>
+        </p:spPr>
+      </p:sp>
+      <p:sp>
+        <p:nvSpPr>
+          <p:cNvPr id="10" name="Shape 8"/>
+          <p:cNvSpPr/>
+          <p:nvPr/>
+        </p:nvSpPr>
+        <p:spPr>
+          <a:xfrm>
+            <a:off x="658368" y="1600200"/>
+            <a:ext cx="68580" cy="1938528"/>
+          </a:xfrm>
+          <a:prstGeom prst="rect">
+            <a:avLst/>
+          </a:prstGeom>
+          <a:solidFill>
+            <a:srgbClr val="2F6FAD"/>
+          </a:solidFill>
+          <a:ln w="12700">
+            <a:solidFill>
+              <a:srgbClr val="2F6FAD">
+                <a:alpha val="0"/>
+              </a:srgbClr>
+            </a:solidFill>
+            <a:prstDash val="solid"/>
+          </a:ln>
+        </p:spPr>
+      </p:sp>
+      <p:sp>
+        <p:nvSpPr>
+          <p:cNvPr id="11" name="Text 9"/>
+          <p:cNvSpPr/>
+          <p:nvPr/>
+        </p:nvSpPr>
+        <p:spPr>
+          <a:xfrm>
+            <a:off x="859536" y="1719072"/>
+            <a:ext cx="4992624" cy="310896"/>
+          </a:xfrm>
+          <a:prstGeom prst="rect">
+            <a:avLst/>
+          </a:prstGeom>
+          <a:noFill/>
+          <a:ln/>
+        </p:spPr>
+        <p:txBody>
+          <a:bodyPr wrap="square" lIns="0" tIns="0" rIns="0" bIns="0" rtlCol="0" anchor="t">
+            <a:normAutofit/>
+          </a:bodyPr>
+          <a:lstStyle/>
+          <a:p>
+            <a:pPr indent="0" marL="0">
+              <a:buNone/>
+            </a:pPr>
+            <a:r>
+              <a:rPr lang="en-US" sz="1530" b="1" dirty="0">
+                <a:solidFill>
+                  <a:srgbClr val="17324D"/>
+                </a:solidFill>
+                <a:latin typeface="Aptos" pitchFamily="34" charset="0"/>
+                <a:ea typeface="Aptos" pitchFamily="34" charset="-122"/>
+                <a:cs typeface="Aptos" pitchFamily="34" charset="-120"/>
+              </a:rPr>
+              <a:t>Elektrische Feldstärke E</a:t>
+            </a:r>
+            <a:endParaRPr lang="en-US" sz="1530" dirty="0"/>
+          </a:p>
+        </p:txBody>
+      </p:sp>
+      <p:sp>
+        <p:nvSpPr>
+          <p:cNvPr id="12" name="Text 10"/>
+          <p:cNvSpPr/>
+          <p:nvPr/>
+        </p:nvSpPr>
+        <p:spPr>
+          <a:xfrm>
+            <a:off x="859536" y="2093976"/>
+            <a:ext cx="4974336" cy="1316736"/>
+          </a:xfrm>
+          <a:prstGeom prst="rect">
+            <a:avLst/>
+          </a:prstGeom>
+          <a:noFill/>
+          <a:ln/>
+        </p:spPr>
+        <p:txBody>
+          <a:bodyPr wrap="square" lIns="254" tIns="254" rIns="254" bIns="254" rtlCol="0" anchor="t">
+            <a:normAutofit/>
+          </a:bodyPr>
+          <a:lstStyle/>
+          <a:p>
+            <a:pPr marL="165100" indent="-165100">
+              <a:buSzPct val="100000"/>
+              <a:buChar char="•"/>
+            </a:pPr>
+            <a:r>
+              <a:rPr lang="en-US" sz="1300" dirty="0">
+                <a:solidFill>
+                  <a:srgbClr val="203040"/>
+                </a:solidFill>
+                <a:latin typeface="Aptos" pitchFamily="34" charset="0"/>
+                <a:ea typeface="Aptos" pitchFamily="34" charset="-122"/>
+                <a:cs typeface="Aptos" pitchFamily="34" charset="-120"/>
+              </a:rPr>
+              <a:t>Kraft pro Probeladung; im Plattenkondensator E≈U/d.</a:t>
+            </a:r>
+            <a:endParaRPr lang="en-US" sz="1300" dirty="0"/>
+          </a:p>
+          <a:p>
+            <a:pPr marL="165100" indent="-165100">
+              <a:buSzPct val="100000"/>
+              <a:buChar char="•"/>
+            </a:pPr>
+            <a:r>
+              <a:rPr lang="en-US" sz="1300" dirty="0">
+                <a:solidFill>
+                  <a:srgbClr val="203040"/>
+                </a:solidFill>
+                <a:latin typeface="Aptos" pitchFamily="34" charset="0"/>
+                <a:ea typeface="Aptos" pitchFamily="34" charset="-122"/>
+                <a:cs typeface="Aptos" pitchFamily="34" charset="-120"/>
+              </a:rPr>
+              <a:t>Einheit: V/m</a:t>
+            </a:r>
+            <a:endParaRPr lang="en-US" sz="1300" dirty="0"/>
+          </a:p>
+          <a:p>
+            <a:pPr marL="165100" indent="-165100">
+              <a:buSzPct val="100000"/>
+              <a:buChar char="•"/>
+            </a:pPr>
+            <a:r>
+              <a:rPr lang="en-US" sz="1300" dirty="0">
+                <a:solidFill>
+                  <a:srgbClr val="203040"/>
+                </a:solidFill>
+                <a:latin typeface="Aptos" pitchFamily="34" charset="0"/>
+                <a:ea typeface="Aptos" pitchFamily="34" charset="-122"/>
+                <a:cs typeface="Aptos" pitchFamily="34" charset="-120"/>
+              </a:rPr>
+              <a:t>Beziehung: E = F/q</a:t>
+            </a:r>
+            <a:endParaRPr lang="en-US" sz="1300" dirty="0"/>
+          </a:p>
+        </p:txBody>
+      </p:sp>
+      <p:sp>
+        <p:nvSpPr>
+          <p:cNvPr id="13" name="Shape 11"/>
+          <p:cNvSpPr/>
+          <p:nvPr/>
+        </p:nvSpPr>
+        <p:spPr>
+          <a:xfrm>
+            <a:off x="6181344" y="1600200"/>
+            <a:ext cx="5340096" cy="1938528"/>
+          </a:xfrm>
+          <a:prstGeom prst="roundRect">
+            <a:avLst>
+              <a:gd name="adj" fmla="val 2830"/>
             </a:avLst>
           </a:prstGeom>
           <a:solidFill>
@@ -4121,22 +4252,56 @@
           </a:solidFill>
           <a:ln w="12700">
             <a:solidFill>
-              <a:srgbClr val="C8D5E2"/>
-            </a:solidFill>
-            <a:prstDash val="solid"/>
-          </a:ln>
-        </p:spPr>
-      </p:sp>
-      <p:sp>
-        <p:nvSpPr>
-          <p:cNvPr id="10" name="Text 8"/>
-          <p:cNvSpPr/>
-          <p:nvPr/>
-        </p:nvSpPr>
-        <p:spPr>
-          <a:xfrm>
-            <a:off x="859536" y="1746504"/>
-            <a:ext cx="4992624" cy="256032"/>
+              <a:srgbClr val="CDD8E2"/>
+            </a:solidFill>
+            <a:prstDash val="solid"/>
+          </a:ln>
+          <a:effectLst>
+            <a:outerShdw sx="100000" sy="100000" kx="0" ky="0" algn="bl" rotWithShape="0" blurRad="12700" dist="50800" dir="2700000">
+              <a:srgbClr val="A8B8C7">
+                <a:alpha val="11000"/>
+              </a:srgbClr>
+            </a:outerShdw>
+          </a:effectLst>
+        </p:spPr>
+      </p:sp>
+      <p:sp>
+        <p:nvSpPr>
+          <p:cNvPr id="14" name="Shape 12"/>
+          <p:cNvSpPr/>
+          <p:nvPr/>
+        </p:nvSpPr>
+        <p:spPr>
+          <a:xfrm>
+            <a:off x="6181344" y="1600200"/>
+            <a:ext cx="68580" cy="1938528"/>
+          </a:xfrm>
+          <a:prstGeom prst="rect">
+            <a:avLst/>
+          </a:prstGeom>
+          <a:solidFill>
+            <a:srgbClr val="2C7A7B"/>
+          </a:solidFill>
+          <a:ln w="12700">
+            <a:solidFill>
+              <a:srgbClr val="2C7A7B">
+                <a:alpha val="0"/>
+              </a:srgbClr>
+            </a:solidFill>
+            <a:prstDash val="solid"/>
+          </a:ln>
+        </p:spPr>
+      </p:sp>
+      <p:sp>
+        <p:nvSpPr>
+          <p:cNvPr id="15" name="Text 13"/>
+          <p:cNvSpPr/>
+          <p:nvPr/>
+        </p:nvSpPr>
+        <p:spPr>
+          <a:xfrm>
+            <a:off x="6382512" y="1719072"/>
+            <a:ext cx="4992624" cy="310896"/>
           </a:xfrm>
           <a:prstGeom prst="rect">
             <a:avLst/>
@@ -4154,30 +4319,151 @@
               <a:buNone/>
             </a:pPr>
             <a:r>
-              <a:rPr lang="en-US" sz="1380" b="1" dirty="0">
-                <a:solidFill>
-                  <a:srgbClr val="16324F"/>
-                </a:solidFill>
-                <a:latin typeface="Aptos" pitchFamily="34" charset="0"/>
-                <a:ea typeface="Aptos" pitchFamily="34" charset="-122"/>
-                <a:cs typeface="Aptos" pitchFamily="34" charset="-120"/>
-              </a:rPr>
-              <a:t>Coulomb-Gesetz</a:t>
-            </a:r>
-            <a:endParaRPr lang="en-US" sz="1380" dirty="0"/>
-          </a:p>
-        </p:txBody>
-      </p:sp>
-      <p:sp>
-        <p:nvSpPr>
-          <p:cNvPr id="11" name="Text 9"/>
-          <p:cNvSpPr/>
-          <p:nvPr/>
-        </p:nvSpPr>
-        <p:spPr>
-          <a:xfrm>
-            <a:off x="859536" y="2093976"/>
-            <a:ext cx="4992624" cy="585216"/>
+              <a:rPr lang="en-US" sz="1530" b="1" dirty="0">
+                <a:solidFill>
+                  <a:srgbClr val="17324D"/>
+                </a:solidFill>
+                <a:latin typeface="Aptos" pitchFamily="34" charset="0"/>
+                <a:ea typeface="Aptos" pitchFamily="34" charset="-122"/>
+                <a:cs typeface="Aptos" pitchFamily="34" charset="-120"/>
+              </a:rPr>
+              <a:t>Potential φ</a:t>
+            </a:r>
+            <a:endParaRPr lang="en-US" sz="1530" dirty="0"/>
+          </a:p>
+        </p:txBody>
+      </p:sp>
+      <p:sp>
+        <p:nvSpPr>
+          <p:cNvPr id="16" name="Text 14"/>
+          <p:cNvSpPr/>
+          <p:nvPr/>
+        </p:nvSpPr>
+        <p:spPr>
+          <a:xfrm>
+            <a:off x="6382512" y="2093976"/>
+            <a:ext cx="4974336" cy="1316736"/>
+          </a:xfrm>
+          <a:prstGeom prst="rect">
+            <a:avLst/>
+          </a:prstGeom>
+          <a:noFill/>
+          <a:ln/>
+        </p:spPr>
+        <p:txBody>
+          <a:bodyPr wrap="square" lIns="254" tIns="254" rIns="254" bIns="254" rtlCol="0" anchor="t">
+            <a:normAutofit/>
+          </a:bodyPr>
+          <a:lstStyle/>
+          <a:p>
+            <a:pPr marL="165100" indent="-165100">
+              <a:buSzPct val="100000"/>
+              <a:buChar char="•"/>
+            </a:pPr>
+            <a:r>
+              <a:rPr lang="en-US" sz="1300" dirty="0">
+                <a:solidFill>
+                  <a:srgbClr val="203040"/>
+                </a:solidFill>
+                <a:latin typeface="Aptos" pitchFamily="34" charset="0"/>
+                <a:ea typeface="Aptos" pitchFamily="34" charset="-122"/>
+                <a:cs typeface="Aptos" pitchFamily="34" charset="-120"/>
+              </a:rPr>
+              <a:t>Potentielle elektrische Energie pro Ladung.</a:t>
+            </a:r>
+            <a:endParaRPr lang="en-US" sz="1300" dirty="0"/>
+          </a:p>
+          <a:p>
+            <a:pPr marL="165100" indent="-165100">
+              <a:buSzPct val="100000"/>
+              <a:buChar char="•"/>
+            </a:pPr>
+            <a:r>
+              <a:rPr lang="en-US" sz="1300" dirty="0">
+                <a:solidFill>
+                  <a:srgbClr val="203040"/>
+                </a:solidFill>
+                <a:latin typeface="Aptos" pitchFamily="34" charset="0"/>
+                <a:ea typeface="Aptos" pitchFamily="34" charset="-122"/>
+                <a:cs typeface="Aptos" pitchFamily="34" charset="-120"/>
+              </a:rPr>
+              <a:t>Einheit: V</a:t>
+            </a:r>
+            <a:endParaRPr lang="en-US" sz="1300" dirty="0"/>
+          </a:p>
+        </p:txBody>
+      </p:sp>
+      <p:sp>
+        <p:nvSpPr>
+          <p:cNvPr id="17" name="Shape 15"/>
+          <p:cNvSpPr/>
+          <p:nvPr/>
+        </p:nvSpPr>
+        <p:spPr>
+          <a:xfrm>
+            <a:off x="658368" y="3822192"/>
+            <a:ext cx="5340096" cy="1938528"/>
+          </a:xfrm>
+          <a:prstGeom prst="roundRect">
+            <a:avLst>
+              <a:gd name="adj" fmla="val 2830"/>
+            </a:avLst>
+          </a:prstGeom>
+          <a:solidFill>
+            <a:srgbClr val="F0F4F7"/>
+          </a:solidFill>
+          <a:ln w="12700">
+            <a:solidFill>
+              <a:srgbClr val="CDD8E2"/>
+            </a:solidFill>
+            <a:prstDash val="solid"/>
+          </a:ln>
+          <a:effectLst>
+            <a:outerShdw sx="100000" sy="100000" kx="0" ky="0" algn="bl" rotWithShape="0" blurRad="12700" dist="50800" dir="2700000">
+              <a:srgbClr val="A8B8C7">
+                <a:alpha val="11000"/>
+              </a:srgbClr>
+            </a:outerShdw>
+          </a:effectLst>
+        </p:spPr>
+      </p:sp>
+      <p:sp>
+        <p:nvSpPr>
+          <p:cNvPr id="18" name="Shape 16"/>
+          <p:cNvSpPr/>
+          <p:nvPr/>
+        </p:nvSpPr>
+        <p:spPr>
+          <a:xfrm>
+            <a:off x="658368" y="3822192"/>
+            <a:ext cx="68580" cy="1938528"/>
+          </a:xfrm>
+          <a:prstGeom prst="rect">
+            <a:avLst/>
+          </a:prstGeom>
+          <a:solidFill>
+            <a:srgbClr val="D78C24"/>
+          </a:solidFill>
+          <a:ln w="12700">
+            <a:solidFill>
+              <a:srgbClr val="D78C24">
+                <a:alpha val="0"/>
+              </a:srgbClr>
+            </a:solidFill>
+            <a:prstDash val="solid"/>
+          </a:ln>
+        </p:spPr>
+      </p:sp>
+      <p:sp>
+        <p:nvSpPr>
+          <p:cNvPr id="19" name="Text 17"/>
+          <p:cNvSpPr/>
+          <p:nvPr/>
+        </p:nvSpPr>
+        <p:spPr>
+          <a:xfrm>
+            <a:off x="859536" y="3941064"/>
+            <a:ext cx="4992624" cy="310896"/>
           </a:xfrm>
           <a:prstGeom prst="rect">
             <a:avLst/>
@@ -4195,7 +4481,49 @@
               <a:buNone/>
             </a:pPr>
             <a:r>
-              <a:rPr lang="en-US" sz="1270" dirty="0">
+              <a:rPr lang="en-US" sz="1530" b="1" dirty="0">
+                <a:solidFill>
+                  <a:srgbClr val="17324D"/>
+                </a:solidFill>
+                <a:latin typeface="Aptos" pitchFamily="34" charset="0"/>
+                <a:ea typeface="Aptos" pitchFamily="34" charset="-122"/>
+                <a:cs typeface="Aptos" pitchFamily="34" charset="-120"/>
+              </a:rPr>
+              <a:t>Kapazität C</a:t>
+            </a:r>
+            <a:endParaRPr lang="en-US" sz="1530" dirty="0"/>
+          </a:p>
+        </p:txBody>
+      </p:sp>
+      <p:sp>
+        <p:nvSpPr>
+          <p:cNvPr id="20" name="Text 18"/>
+          <p:cNvSpPr/>
+          <p:nvPr/>
+        </p:nvSpPr>
+        <p:spPr>
+          <a:xfrm>
+            <a:off x="859536" y="4315968"/>
+            <a:ext cx="4974336" cy="1316736"/>
+          </a:xfrm>
+          <a:prstGeom prst="rect">
+            <a:avLst/>
+          </a:prstGeom>
+          <a:noFill/>
+          <a:ln/>
+        </p:spPr>
+        <p:txBody>
+          <a:bodyPr wrap="square" lIns="254" tIns="254" rIns="254" bIns="254" rtlCol="0" anchor="t">
+            <a:normAutofit/>
+          </a:bodyPr>
+          <a:lstStyle/>
+          <a:p>
+            <a:pPr marL="165100" indent="-165100">
+              <a:buSzPct val="100000"/>
+              <a:buChar char="•"/>
+            </a:pPr>
+            <a:r>
+              <a:rPr lang="en-US" sz="1300" dirty="0">
                 <a:solidFill>
                   <a:srgbClr val="203040"/>
                 </a:solidFill>
@@ -4203,96 +4531,44 @@
                 <a:ea typeface="Aptos" pitchFamily="34" charset="-122"/>
                 <a:cs typeface="Aptos" pitchFamily="34" charset="-120"/>
               </a:rPr>
-              <a:t>Betrag der Kraft zwischen zwei Punktladungen.</a:t>
-            </a:r>
-            <a:endParaRPr lang="en-US" sz="1270" dirty="0"/>
-          </a:p>
-        </p:txBody>
-      </p:sp>
-      <p:sp>
-        <p:nvSpPr>
-          <p:cNvPr id="12" name="Shape 10"/>
-          <p:cNvSpPr/>
-          <p:nvPr/>
-        </p:nvSpPr>
-        <p:spPr>
-          <a:xfrm>
-            <a:off x="859536" y="2697480"/>
-            <a:ext cx="2139696" cy="237744"/>
+              <a:t>Q/U eines Kondensators.</a:t>
+            </a:r>
+            <a:endParaRPr lang="en-US" sz="1300" dirty="0"/>
+          </a:p>
+          <a:p>
+            <a:pPr marL="165100" indent="-165100">
+              <a:buSzPct val="100000"/>
+              <a:buChar char="•"/>
+            </a:pPr>
+            <a:r>
+              <a:rPr lang="en-US" sz="1300" dirty="0">
+                <a:solidFill>
+                  <a:srgbClr val="203040"/>
+                </a:solidFill>
+                <a:latin typeface="Aptos" pitchFamily="34" charset="0"/>
+                <a:ea typeface="Aptos" pitchFamily="34" charset="-122"/>
+                <a:cs typeface="Aptos" pitchFamily="34" charset="-120"/>
+              </a:rPr>
+              <a:t>Einheit: F</a:t>
+            </a:r>
+            <a:endParaRPr lang="en-US" sz="1300" dirty="0"/>
+          </a:p>
+        </p:txBody>
+      </p:sp>
+      <p:sp>
+        <p:nvSpPr>
+          <p:cNvPr id="21" name="Shape 19"/>
+          <p:cNvSpPr/>
+          <p:nvPr/>
+        </p:nvSpPr>
+        <p:spPr>
+          <a:xfrm>
+            <a:off x="6181344" y="3822192"/>
+            <a:ext cx="5340096" cy="1938528"/>
           </a:xfrm>
           <a:prstGeom prst="roundRect">
             <a:avLst>
-              <a:gd name="adj" fmla="val 15385"/>
-            </a:avLst>
-          </a:prstGeom>
-          <a:solidFill>
-            <a:srgbClr val="EAF3FB"/>
-          </a:solidFill>
-          <a:ln w="12700">
-            <a:solidFill>
-              <a:srgbClr val="D9EBF8">
-                <a:alpha val="0"/>
-              </a:srgbClr>
-            </a:solidFill>
-            <a:prstDash val="solid"/>
-          </a:ln>
-        </p:spPr>
-      </p:sp>
-      <p:sp>
-        <p:nvSpPr>
-          <p:cNvPr id="13" name="Text 11"/>
-          <p:cNvSpPr/>
-          <p:nvPr/>
-        </p:nvSpPr>
-        <p:spPr>
-          <a:xfrm>
-            <a:off x="950976" y="2715768"/>
-            <a:ext cx="2020824" cy="192024"/>
-          </a:xfrm>
-          <a:prstGeom prst="rect">
-            <a:avLst/>
-          </a:prstGeom>
-          <a:noFill/>
-          <a:ln/>
-        </p:spPr>
-        <p:txBody>
-          <a:bodyPr wrap="square" lIns="0" tIns="0" rIns="0" bIns="0" rtlCol="0" anchor="ctr">
-            <a:normAutofit/>
-          </a:bodyPr>
-          <a:lstStyle/>
-          <a:p>
-            <a:pPr indent="0" marL="0">
-              <a:buNone/>
-            </a:pPr>
-            <a:r>
-              <a:rPr lang="en-US" sz="1040" b="1" dirty="0">
-                <a:solidFill>
-                  <a:srgbClr val="2F6FAD"/>
-                </a:solidFill>
-                <a:latin typeface="Aptos" pitchFamily="34" charset="0"/>
-                <a:ea typeface="Aptos" pitchFamily="34" charset="-122"/>
-                <a:cs typeface="Aptos" pitchFamily="34" charset="-120"/>
-              </a:rPr>
-              <a:t>F = (1/(4πɛ₀)) · |q₁q₂|/r²</a:t>
-            </a:r>
-            <a:endParaRPr lang="en-US" sz="1040" dirty="0"/>
-          </a:p>
-        </p:txBody>
-      </p:sp>
-      <p:sp>
-        <p:nvSpPr>
-          <p:cNvPr id="14" name="Shape 12"/>
-          <p:cNvSpPr/>
-          <p:nvPr/>
-        </p:nvSpPr>
-        <p:spPr>
-          <a:xfrm>
-            <a:off x="6272784" y="1618488"/>
-            <a:ext cx="5394960" cy="1389888"/>
-          </a:xfrm>
-          <a:prstGeom prst="roundRect">
-            <a:avLst>
-              <a:gd name="adj" fmla="val 4605"/>
+              <a:gd name="adj" fmla="val 2830"/>
             </a:avLst>
           </a:prstGeom>
           <a:solidFill>
@@ -4300,22 +4576,56 @@
           </a:solidFill>
           <a:ln w="12700">
             <a:solidFill>
-              <a:srgbClr val="C8D5E2"/>
-            </a:solidFill>
-            <a:prstDash val="solid"/>
-          </a:ln>
-        </p:spPr>
-      </p:sp>
-      <p:sp>
-        <p:nvSpPr>
-          <p:cNvPr id="15" name="Text 13"/>
-          <p:cNvSpPr/>
-          <p:nvPr/>
-        </p:nvSpPr>
-        <p:spPr>
-          <a:xfrm>
-            <a:off x="6473952" y="1746504"/>
-            <a:ext cx="4992624" cy="256032"/>
+              <a:srgbClr val="CDD8E2"/>
+            </a:solidFill>
+            <a:prstDash val="solid"/>
+          </a:ln>
+          <a:effectLst>
+            <a:outerShdw sx="100000" sy="100000" kx="0" ky="0" algn="bl" rotWithShape="0" blurRad="12700" dist="50800" dir="2700000">
+              <a:srgbClr val="A8B8C7">
+                <a:alpha val="11000"/>
+              </a:srgbClr>
+            </a:outerShdw>
+          </a:effectLst>
+        </p:spPr>
+      </p:sp>
+      <p:sp>
+        <p:nvSpPr>
+          <p:cNvPr id="22" name="Shape 20"/>
+          <p:cNvSpPr/>
+          <p:nvPr/>
+        </p:nvSpPr>
+        <p:spPr>
+          <a:xfrm>
+            <a:off x="6181344" y="3822192"/>
+            <a:ext cx="68580" cy="1938528"/>
+          </a:xfrm>
+          <a:prstGeom prst="rect">
+            <a:avLst/>
+          </a:prstGeom>
+          <a:solidFill>
+            <a:srgbClr val="4E7A5A"/>
+          </a:solidFill>
+          <a:ln w="12700">
+            <a:solidFill>
+              <a:srgbClr val="4E7A5A">
+                <a:alpha val="0"/>
+              </a:srgbClr>
+            </a:solidFill>
+            <a:prstDash val="solid"/>
+          </a:ln>
+        </p:spPr>
+      </p:sp>
+      <p:sp>
+        <p:nvSpPr>
+          <p:cNvPr id="23" name="Text 21"/>
+          <p:cNvSpPr/>
+          <p:nvPr/>
+        </p:nvSpPr>
+        <p:spPr>
+          <a:xfrm>
+            <a:off x="6382512" y="3941064"/>
+            <a:ext cx="4992624" cy="310896"/>
           </a:xfrm>
           <a:prstGeom prst="rect">
             <a:avLst/>
@@ -4333,48 +4643,49 @@
               <a:buNone/>
             </a:pPr>
             <a:r>
-              <a:rPr lang="en-US" sz="1380" b="1" dirty="0">
-                <a:solidFill>
-                  <a:srgbClr val="16324F"/>
-                </a:solidFill>
-                <a:latin typeface="Aptos" pitchFamily="34" charset="0"/>
-                <a:ea typeface="Aptos" pitchFamily="34" charset="-122"/>
-                <a:cs typeface="Aptos" pitchFamily="34" charset="-120"/>
-              </a:rPr>
-              <a:t>Elektrisches Feld</a:t>
-            </a:r>
-            <a:endParaRPr lang="en-US" sz="1380" dirty="0"/>
-          </a:p>
-        </p:txBody>
-      </p:sp>
-      <p:sp>
-        <p:nvSpPr>
-          <p:cNvPr id="16" name="Text 14"/>
-          <p:cNvSpPr/>
-          <p:nvPr/>
-        </p:nvSpPr>
-        <p:spPr>
-          <a:xfrm>
-            <a:off x="6473952" y="2093976"/>
-            <a:ext cx="4992624" cy="585216"/>
-          </a:xfrm>
-          <a:prstGeom prst="rect">
-            <a:avLst/>
-          </a:prstGeom>
-          <a:noFill/>
-          <a:ln/>
-        </p:spPr>
-        <p:txBody>
-          <a:bodyPr wrap="square" lIns="0" tIns="0" rIns="0" bIns="0" rtlCol="0" anchor="t">
-            <a:normAutofit/>
-          </a:bodyPr>
-          <a:lstStyle/>
-          <a:p>
-            <a:pPr indent="0" marL="0">
-              <a:buNone/>
-            </a:pPr>
-            <a:r>
-              <a:rPr lang="en-US" sz="1270" dirty="0">
+              <a:rPr lang="en-US" sz="1530" b="1" dirty="0">
+                <a:solidFill>
+                  <a:srgbClr val="17324D"/>
+                </a:solidFill>
+                <a:latin typeface="Aptos" pitchFamily="34" charset="0"/>
+                <a:ea typeface="Aptos" pitchFamily="34" charset="-122"/>
+                <a:cs typeface="Aptos" pitchFamily="34" charset="-120"/>
+              </a:rPr>
+              <a:t>Induktivität L</a:t>
+            </a:r>
+            <a:endParaRPr lang="en-US" sz="1530" dirty="0"/>
+          </a:p>
+        </p:txBody>
+      </p:sp>
+      <p:sp>
+        <p:nvSpPr>
+          <p:cNvPr id="24" name="Text 22"/>
+          <p:cNvSpPr/>
+          <p:nvPr/>
+        </p:nvSpPr>
+        <p:spPr>
+          <a:xfrm>
+            <a:off x="6382512" y="4315968"/>
+            <a:ext cx="4974336" cy="1316736"/>
+          </a:xfrm>
+          <a:prstGeom prst="rect">
+            <a:avLst/>
+          </a:prstGeom>
+          <a:noFill/>
+          <a:ln/>
+        </p:spPr>
+        <p:txBody>
+          <a:bodyPr wrap="square" lIns="254" tIns="254" rIns="254" bIns="254" rtlCol="0" anchor="t">
+            <a:normAutofit/>
+          </a:bodyPr>
+          <a:lstStyle/>
+          <a:p>
+            <a:pPr marL="165100" indent="-165100">
+              <a:buSzPct val="100000"/>
+              <a:buChar char="•"/>
+            </a:pPr>
+            <a:r>
+              <a:rPr lang="en-US" sz="1300" dirty="0">
                 <a:solidFill>
                   <a:srgbClr val="203040"/>
                 </a:solidFill>
@@ -4382,178 +4693,17 @@
                 <a:ea typeface="Aptos" pitchFamily="34" charset="-122"/>
                 <a:cs typeface="Aptos" pitchFamily="34" charset="-120"/>
               </a:rPr>
-              <a:t>Feldstärke und Kraft auf eine Probeladung.</a:t>
-            </a:r>
-            <a:endParaRPr lang="en-US" sz="1270" dirty="0"/>
-          </a:p>
-        </p:txBody>
-      </p:sp>
-      <p:sp>
-        <p:nvSpPr>
-          <p:cNvPr id="17" name="Shape 15"/>
-          <p:cNvSpPr/>
-          <p:nvPr/>
-        </p:nvSpPr>
-        <p:spPr>
-          <a:xfrm>
-            <a:off x="6473952" y="2697480"/>
-            <a:ext cx="2011680" cy="237744"/>
-          </a:xfrm>
-          <a:prstGeom prst="roundRect">
-            <a:avLst>
-              <a:gd name="adj" fmla="val 15385"/>
-            </a:avLst>
-          </a:prstGeom>
-          <a:solidFill>
-            <a:srgbClr val="EAF3FB"/>
-          </a:solidFill>
-          <a:ln w="12700">
-            <a:solidFill>
-              <a:srgbClr val="D9EBF8">
-                <a:alpha val="0"/>
-              </a:srgbClr>
-            </a:solidFill>
-            <a:prstDash val="solid"/>
-          </a:ln>
-        </p:spPr>
-      </p:sp>
-      <p:sp>
-        <p:nvSpPr>
-          <p:cNvPr id="18" name="Text 16"/>
-          <p:cNvSpPr/>
-          <p:nvPr/>
-        </p:nvSpPr>
-        <p:spPr>
-          <a:xfrm>
-            <a:off x="6565392" y="2715768"/>
-            <a:ext cx="1828800" cy="192024"/>
-          </a:xfrm>
-          <a:prstGeom prst="rect">
-            <a:avLst/>
-          </a:prstGeom>
-          <a:noFill/>
-          <a:ln/>
-        </p:spPr>
-        <p:txBody>
-          <a:bodyPr wrap="square" lIns="0" tIns="0" rIns="0" bIns="0" rtlCol="0" anchor="ctr">
-            <a:normAutofit/>
-          </a:bodyPr>
-          <a:lstStyle/>
-          <a:p>
-            <a:pPr indent="0" marL="0">
-              <a:buNone/>
-            </a:pPr>
-            <a:r>
-              <a:rPr lang="en-US" sz="1040" b="1" dirty="0">
-                <a:solidFill>
-                  <a:srgbClr val="2F6FAD"/>
-                </a:solidFill>
-                <a:latin typeface="Aptos" pitchFamily="34" charset="0"/>
-                <a:ea typeface="Aptos" pitchFamily="34" charset="-122"/>
-                <a:cs typeface="Aptos" pitchFamily="34" charset="-120"/>
-              </a:rPr>
-              <a:t>E = F/q</a:t>
-            </a:r>
-            <a:endParaRPr lang="en-US" sz="1040" dirty="0"/>
-          </a:p>
-        </p:txBody>
-      </p:sp>
-      <p:sp>
-        <p:nvSpPr>
-          <p:cNvPr id="19" name="Shape 17"/>
-          <p:cNvSpPr/>
-          <p:nvPr/>
-        </p:nvSpPr>
-        <p:spPr>
-          <a:xfrm>
-            <a:off x="658368" y="3182112"/>
-            <a:ext cx="5394960" cy="1389888"/>
-          </a:xfrm>
-          <a:prstGeom prst="roundRect">
-            <a:avLst>
-              <a:gd name="adj" fmla="val 4605"/>
-            </a:avLst>
-          </a:prstGeom>
-          <a:solidFill>
-            <a:srgbClr val="FFFFFF"/>
-          </a:solidFill>
-          <a:ln w="12700">
-            <a:solidFill>
-              <a:srgbClr val="C8D5E2"/>
-            </a:solidFill>
-            <a:prstDash val="solid"/>
-          </a:ln>
-        </p:spPr>
-      </p:sp>
-      <p:sp>
-        <p:nvSpPr>
-          <p:cNvPr id="20" name="Text 18"/>
-          <p:cNvSpPr/>
-          <p:nvPr/>
-        </p:nvSpPr>
-        <p:spPr>
-          <a:xfrm>
-            <a:off x="859536" y="3310128"/>
-            <a:ext cx="4992624" cy="256032"/>
-          </a:xfrm>
-          <a:prstGeom prst="rect">
-            <a:avLst/>
-          </a:prstGeom>
-          <a:noFill/>
-          <a:ln/>
-        </p:spPr>
-        <p:txBody>
-          <a:bodyPr wrap="square" lIns="0" tIns="0" rIns="0" bIns="0" rtlCol="0" anchor="t">
-            <a:normAutofit/>
-          </a:bodyPr>
-          <a:lstStyle/>
-          <a:p>
-            <a:pPr indent="0" marL="0">
-              <a:buNone/>
-            </a:pPr>
-            <a:r>
-              <a:rPr lang="en-US" sz="1380" b="1" dirty="0">
-                <a:solidFill>
-                  <a:srgbClr val="16324F"/>
-                </a:solidFill>
-                <a:latin typeface="Aptos" pitchFamily="34" charset="0"/>
-                <a:ea typeface="Aptos" pitchFamily="34" charset="-122"/>
-                <a:cs typeface="Aptos" pitchFamily="34" charset="-120"/>
-              </a:rPr>
-              <a:t>Kondensator</a:t>
-            </a:r>
-            <a:endParaRPr lang="en-US" sz="1380" dirty="0"/>
-          </a:p>
-        </p:txBody>
-      </p:sp>
-      <p:sp>
-        <p:nvSpPr>
-          <p:cNvPr id="21" name="Text 19"/>
-          <p:cNvSpPr/>
-          <p:nvPr/>
-        </p:nvSpPr>
-        <p:spPr>
-          <a:xfrm>
-            <a:off x="859536" y="3657600"/>
-            <a:ext cx="4992624" cy="585216"/>
-          </a:xfrm>
-          <a:prstGeom prst="rect">
-            <a:avLst/>
-          </a:prstGeom>
-          <a:noFill/>
-          <a:ln/>
-        </p:spPr>
-        <p:txBody>
-          <a:bodyPr wrap="square" lIns="0" tIns="0" rIns="0" bIns="0" rtlCol="0" anchor="t">
-            <a:normAutofit/>
-          </a:bodyPr>
-          <a:lstStyle/>
-          <a:p>
-            <a:pPr indent="0" marL="0">
-              <a:buNone/>
-            </a:pPr>
-            <a:r>
-              <a:rPr lang="en-US" sz="1270" dirty="0">
+              <a:t>Kenngröße für Selbstinduktion einer Spule.</a:t>
+            </a:r>
+            <a:endParaRPr lang="en-US" sz="1300" dirty="0"/>
+          </a:p>
+          <a:p>
+            <a:pPr marL="165100" indent="-165100">
+              <a:buSzPct val="100000"/>
+              <a:buChar char="•"/>
+            </a:pPr>
+            <a:r>
+              <a:rPr lang="en-US" sz="1300" dirty="0">
                 <a:solidFill>
                   <a:srgbClr val="203040"/>
                 </a:solidFill>
@@ -4561,437 +4711,9 @@
                 <a:ea typeface="Aptos" pitchFamily="34" charset="-122"/>
                 <a:cs typeface="Aptos" pitchFamily="34" charset="-120"/>
               </a:rPr>
-              <a:t>Kapazität und gespeicherte Energie.</a:t>
-            </a:r>
-            <a:endParaRPr lang="en-US" sz="1270" dirty="0"/>
-          </a:p>
-        </p:txBody>
-      </p:sp>
-      <p:sp>
-        <p:nvSpPr>
-          <p:cNvPr id="22" name="Shape 20"/>
-          <p:cNvSpPr/>
-          <p:nvPr/>
-        </p:nvSpPr>
-        <p:spPr>
-          <a:xfrm>
-            <a:off x="859536" y="4261104"/>
-            <a:ext cx="2011680" cy="237744"/>
-          </a:xfrm>
-          <a:prstGeom prst="roundRect">
-            <a:avLst>
-              <a:gd name="adj" fmla="val 15385"/>
-            </a:avLst>
-          </a:prstGeom>
-          <a:solidFill>
-            <a:srgbClr val="EAF3FB"/>
-          </a:solidFill>
-          <a:ln w="12700">
-            <a:solidFill>
-              <a:srgbClr val="D9EBF8">
-                <a:alpha val="0"/>
-              </a:srgbClr>
-            </a:solidFill>
-            <a:prstDash val="solid"/>
-          </a:ln>
-        </p:spPr>
-      </p:sp>
-      <p:sp>
-        <p:nvSpPr>
-          <p:cNvPr id="23" name="Text 21"/>
-          <p:cNvSpPr/>
-          <p:nvPr/>
-        </p:nvSpPr>
-        <p:spPr>
-          <a:xfrm>
-            <a:off x="950976" y="4279392"/>
-            <a:ext cx="1828800" cy="192024"/>
-          </a:xfrm>
-          <a:prstGeom prst="rect">
-            <a:avLst/>
-          </a:prstGeom>
-          <a:noFill/>
-          <a:ln/>
-        </p:spPr>
-        <p:txBody>
-          <a:bodyPr wrap="square" lIns="0" tIns="0" rIns="0" bIns="0" rtlCol="0" anchor="ctr">
-            <a:normAutofit/>
-          </a:bodyPr>
-          <a:lstStyle/>
-          <a:p>
-            <a:pPr indent="0" marL="0">
-              <a:buNone/>
-            </a:pPr>
-            <a:r>
-              <a:rPr lang="en-US" sz="1040" b="1" dirty="0">
-                <a:solidFill>
-                  <a:srgbClr val="2F6FAD"/>
-                </a:solidFill>
-                <a:latin typeface="Aptos" pitchFamily="34" charset="0"/>
-                <a:ea typeface="Aptos" pitchFamily="34" charset="-122"/>
-                <a:cs typeface="Aptos" pitchFamily="34" charset="-120"/>
-              </a:rPr>
-              <a:t>C = Q/U;  E_C = ½ C U²</a:t>
-            </a:r>
-            <a:endParaRPr lang="en-US" sz="1040" dirty="0"/>
-          </a:p>
-        </p:txBody>
-      </p:sp>
-      <p:sp>
-        <p:nvSpPr>
-          <p:cNvPr id="24" name="Shape 22"/>
-          <p:cNvSpPr/>
-          <p:nvPr/>
-        </p:nvSpPr>
-        <p:spPr>
-          <a:xfrm>
-            <a:off x="6272784" y="3182112"/>
-            <a:ext cx="5394960" cy="1389888"/>
-          </a:xfrm>
-          <a:prstGeom prst="roundRect">
-            <a:avLst>
-              <a:gd name="adj" fmla="val 4605"/>
-            </a:avLst>
-          </a:prstGeom>
-          <a:solidFill>
-            <a:srgbClr val="FFFFFF"/>
-          </a:solidFill>
-          <a:ln w="12700">
-            <a:solidFill>
-              <a:srgbClr val="C8D5E2"/>
-            </a:solidFill>
-            <a:prstDash val="solid"/>
-          </a:ln>
-        </p:spPr>
-      </p:sp>
-      <p:sp>
-        <p:nvSpPr>
-          <p:cNvPr id="25" name="Text 23"/>
-          <p:cNvSpPr/>
-          <p:nvPr/>
-        </p:nvSpPr>
-        <p:spPr>
-          <a:xfrm>
-            <a:off x="6473952" y="3310128"/>
-            <a:ext cx="4992624" cy="256032"/>
-          </a:xfrm>
-          <a:prstGeom prst="rect">
-            <a:avLst/>
-          </a:prstGeom>
-          <a:noFill/>
-          <a:ln/>
-        </p:spPr>
-        <p:txBody>
-          <a:bodyPr wrap="square" lIns="0" tIns="0" rIns="0" bIns="0" rtlCol="0" anchor="t">
-            <a:normAutofit/>
-          </a:bodyPr>
-          <a:lstStyle/>
-          <a:p>
-            <a:pPr indent="0" marL="0">
-              <a:buNone/>
-            </a:pPr>
-            <a:r>
-              <a:rPr lang="en-US" sz="1380" b="1" dirty="0">
-                <a:solidFill>
-                  <a:srgbClr val="16324F"/>
-                </a:solidFill>
-                <a:latin typeface="Aptos" pitchFamily="34" charset="0"/>
-                <a:ea typeface="Aptos" pitchFamily="34" charset="-122"/>
-                <a:cs typeface="Aptos" pitchFamily="34" charset="-120"/>
-              </a:rPr>
-              <a:t>Lorentzkraft</a:t>
-            </a:r>
-            <a:endParaRPr lang="en-US" sz="1380" dirty="0"/>
-          </a:p>
-        </p:txBody>
-      </p:sp>
-      <p:sp>
-        <p:nvSpPr>
-          <p:cNvPr id="26" name="Text 24"/>
-          <p:cNvSpPr/>
-          <p:nvPr/>
-        </p:nvSpPr>
-        <p:spPr>
-          <a:xfrm>
-            <a:off x="6473952" y="3657600"/>
-            <a:ext cx="4992624" cy="585216"/>
-          </a:xfrm>
-          <a:prstGeom prst="rect">
-            <a:avLst/>
-          </a:prstGeom>
-          <a:noFill/>
-          <a:ln/>
-        </p:spPr>
-        <p:txBody>
-          <a:bodyPr wrap="square" lIns="0" tIns="0" rIns="0" bIns="0" rtlCol="0" anchor="t">
-            <a:normAutofit/>
-          </a:bodyPr>
-          <a:lstStyle/>
-          <a:p>
-            <a:pPr indent="0" marL="0">
-              <a:buNone/>
-            </a:pPr>
-            <a:r>
-              <a:rPr lang="en-US" sz="1270" dirty="0">
-                <a:solidFill>
-                  <a:srgbClr val="203040"/>
-                </a:solidFill>
-                <a:latin typeface="Aptos" pitchFamily="34" charset="0"/>
-                <a:ea typeface="Aptos" pitchFamily="34" charset="-122"/>
-                <a:cs typeface="Aptos" pitchFamily="34" charset="-120"/>
-              </a:rPr>
-              <a:t>Bei senkrechter Bewegung im homogenen B-Feld:</a:t>
-            </a:r>
-            <a:endParaRPr lang="en-US" sz="1270" dirty="0"/>
-          </a:p>
-        </p:txBody>
-      </p:sp>
-      <p:sp>
-        <p:nvSpPr>
-          <p:cNvPr id="27" name="Shape 25"/>
-          <p:cNvSpPr/>
-          <p:nvPr/>
-        </p:nvSpPr>
-        <p:spPr>
-          <a:xfrm>
-            <a:off x="6473952" y="4261104"/>
-            <a:ext cx="2011680" cy="237744"/>
-          </a:xfrm>
-          <a:prstGeom prst="roundRect">
-            <a:avLst>
-              <a:gd name="adj" fmla="val 15385"/>
-            </a:avLst>
-          </a:prstGeom>
-          <a:solidFill>
-            <a:srgbClr val="EAF3FB"/>
-          </a:solidFill>
-          <a:ln w="12700">
-            <a:solidFill>
-              <a:srgbClr val="D9EBF8">
-                <a:alpha val="0"/>
-              </a:srgbClr>
-            </a:solidFill>
-            <a:prstDash val="solid"/>
-          </a:ln>
-        </p:spPr>
-      </p:sp>
-      <p:sp>
-        <p:nvSpPr>
-          <p:cNvPr id="28" name="Text 26"/>
-          <p:cNvSpPr/>
-          <p:nvPr/>
-        </p:nvSpPr>
-        <p:spPr>
-          <a:xfrm>
-            <a:off x="6565392" y="4279392"/>
-            <a:ext cx="1828800" cy="192024"/>
-          </a:xfrm>
-          <a:prstGeom prst="rect">
-            <a:avLst/>
-          </a:prstGeom>
-          <a:noFill/>
-          <a:ln/>
-        </p:spPr>
-        <p:txBody>
-          <a:bodyPr wrap="square" lIns="0" tIns="0" rIns="0" bIns="0" rtlCol="0" anchor="ctr">
-            <a:normAutofit/>
-          </a:bodyPr>
-          <a:lstStyle/>
-          <a:p>
-            <a:pPr indent="0" marL="0">
-              <a:buNone/>
-            </a:pPr>
-            <a:r>
-              <a:rPr lang="en-US" sz="1040" b="1" dirty="0">
-                <a:solidFill>
-                  <a:srgbClr val="2F6FAD"/>
-                </a:solidFill>
-                <a:latin typeface="Aptos" pitchFamily="34" charset="0"/>
-                <a:ea typeface="Aptos" pitchFamily="34" charset="-122"/>
-                <a:cs typeface="Aptos" pitchFamily="34" charset="-120"/>
-              </a:rPr>
-              <a:t>F_L = |q|vB</a:t>
-            </a:r>
-            <a:endParaRPr lang="en-US" sz="1040" dirty="0"/>
-          </a:p>
-        </p:txBody>
-      </p:sp>
-      <p:sp>
-        <p:nvSpPr>
-          <p:cNvPr id="29" name="Shape 27"/>
-          <p:cNvSpPr/>
-          <p:nvPr/>
-        </p:nvSpPr>
-        <p:spPr>
-          <a:xfrm>
-            <a:off x="658368" y="4745736"/>
-            <a:ext cx="11009376" cy="1298448"/>
-          </a:xfrm>
-          <a:prstGeom prst="roundRect">
-            <a:avLst>
-              <a:gd name="adj" fmla="val 4930"/>
-            </a:avLst>
-          </a:prstGeom>
-          <a:solidFill>
-            <a:srgbClr val="FFFFFF"/>
-          </a:solidFill>
-          <a:ln w="12700">
-            <a:solidFill>
-              <a:srgbClr val="C8D5E2"/>
-            </a:solidFill>
-            <a:prstDash val="solid"/>
-          </a:ln>
-        </p:spPr>
-      </p:sp>
-      <p:sp>
-        <p:nvSpPr>
-          <p:cNvPr id="30" name="Text 28"/>
-          <p:cNvSpPr/>
-          <p:nvPr/>
-        </p:nvSpPr>
-        <p:spPr>
-          <a:xfrm>
-            <a:off x="859536" y="4873752"/>
-            <a:ext cx="10607040" cy="256032"/>
-          </a:xfrm>
-          <a:prstGeom prst="rect">
-            <a:avLst/>
-          </a:prstGeom>
-          <a:noFill/>
-          <a:ln/>
-        </p:spPr>
-        <p:txBody>
-          <a:bodyPr wrap="square" lIns="0" tIns="0" rIns="0" bIns="0" rtlCol="0" anchor="t">
-            <a:normAutofit/>
-          </a:bodyPr>
-          <a:lstStyle/>
-          <a:p>
-            <a:pPr indent="0" marL="0">
-              <a:buNone/>
-            </a:pPr>
-            <a:r>
-              <a:rPr lang="en-US" sz="1380" b="1" dirty="0">
-                <a:solidFill>
-                  <a:srgbClr val="16324F"/>
-                </a:solidFill>
-                <a:latin typeface="Aptos" pitchFamily="34" charset="0"/>
-                <a:ea typeface="Aptos" pitchFamily="34" charset="-122"/>
-                <a:cs typeface="Aptos" pitchFamily="34" charset="-120"/>
-              </a:rPr>
-              <a:t>Induktion</a:t>
-            </a:r>
-            <a:endParaRPr lang="en-US" sz="1380" dirty="0"/>
-          </a:p>
-        </p:txBody>
-      </p:sp>
-      <p:sp>
-        <p:nvSpPr>
-          <p:cNvPr id="31" name="Text 29"/>
-          <p:cNvSpPr/>
-          <p:nvPr/>
-        </p:nvSpPr>
-        <p:spPr>
-          <a:xfrm>
-            <a:off x="859536" y="5221224"/>
-            <a:ext cx="10607040" cy="493776"/>
-          </a:xfrm>
-          <a:prstGeom prst="rect">
-            <a:avLst/>
-          </a:prstGeom>
-          <a:noFill/>
-          <a:ln/>
-        </p:spPr>
-        <p:txBody>
-          <a:bodyPr wrap="square" lIns="0" tIns="0" rIns="0" bIns="0" rtlCol="0" anchor="t">
-            <a:normAutofit/>
-          </a:bodyPr>
-          <a:lstStyle/>
-          <a:p>
-            <a:pPr indent="0" marL="0">
-              <a:buNone/>
-            </a:pPr>
-            <a:r>
-              <a:rPr lang="en-US" sz="1270" dirty="0">
-                <a:solidFill>
-                  <a:srgbClr val="203040"/>
-                </a:solidFill>
-                <a:latin typeface="Aptos" pitchFamily="34" charset="0"/>
-                <a:ea typeface="Aptos" pitchFamily="34" charset="-122"/>
-                <a:cs typeface="Aptos" pitchFamily="34" charset="-120"/>
-              </a:rPr>
-              <a:t>Zeitliche Flussänderung erzeugt Spannung.</a:t>
-            </a:r>
-            <a:endParaRPr lang="en-US" sz="1270" dirty="0"/>
-          </a:p>
-        </p:txBody>
-      </p:sp>
-      <p:sp>
-        <p:nvSpPr>
-          <p:cNvPr id="32" name="Shape 30"/>
-          <p:cNvSpPr/>
-          <p:nvPr/>
-        </p:nvSpPr>
-        <p:spPr>
-          <a:xfrm>
-            <a:off x="859536" y="5733288"/>
-            <a:ext cx="2011680" cy="237744"/>
-          </a:xfrm>
-          <a:prstGeom prst="roundRect">
-            <a:avLst>
-              <a:gd name="adj" fmla="val 15385"/>
-            </a:avLst>
-          </a:prstGeom>
-          <a:solidFill>
-            <a:srgbClr val="EAF3FB"/>
-          </a:solidFill>
-          <a:ln w="12700">
-            <a:solidFill>
-              <a:srgbClr val="D9EBF8">
-                <a:alpha val="0"/>
-              </a:srgbClr>
-            </a:solidFill>
-            <a:prstDash val="solid"/>
-          </a:ln>
-        </p:spPr>
-      </p:sp>
-      <p:sp>
-        <p:nvSpPr>
-          <p:cNvPr id="33" name="Text 31"/>
-          <p:cNvSpPr/>
-          <p:nvPr/>
-        </p:nvSpPr>
-        <p:spPr>
-          <a:xfrm>
-            <a:off x="950976" y="5751576"/>
-            <a:ext cx="1828800" cy="192024"/>
-          </a:xfrm>
-          <a:prstGeom prst="rect">
-            <a:avLst/>
-          </a:prstGeom>
-          <a:noFill/>
-          <a:ln/>
-        </p:spPr>
-        <p:txBody>
-          <a:bodyPr wrap="square" lIns="0" tIns="0" rIns="0" bIns="0" rtlCol="0" anchor="ctr">
-            <a:normAutofit/>
-          </a:bodyPr>
-          <a:lstStyle/>
-          <a:p>
-            <a:pPr indent="0" marL="0">
-              <a:buNone/>
-            </a:pPr>
-            <a:r>
-              <a:rPr lang="en-US" sz="1040" b="1" dirty="0">
-                <a:solidFill>
-                  <a:srgbClr val="2F6FAD"/>
-                </a:solidFill>
-                <a:latin typeface="Aptos" pitchFamily="34" charset="0"/>
-                <a:ea typeface="Aptos" pitchFamily="34" charset="-122"/>
-                <a:cs typeface="Aptos" pitchFamily="34" charset="-120"/>
-              </a:rPr>
-              <a:t>U_ind = −N·dΦ/dt</a:t>
-            </a:r>
-            <a:endParaRPr lang="en-US" sz="1040" dirty="0"/>
+              <a:t>Einheit: H</a:t>
+            </a:r>
+            <a:endParaRPr lang="en-US" sz="1300" dirty="0"/>
           </a:p>
         </p:txBody>
       </p:sp>
@@ -5036,7 +4758,7 @@
         <p:spPr>
           <a:xfrm>
             <a:off x="0" y="0"/>
-            <a:ext cx="12191695" cy="164592"/>
+            <a:ext cx="12191695" cy="137160"/>
           </a:xfrm>
           <a:prstGeom prst="rect">
             <a:avLst/>
@@ -5062,8 +4784,8 @@
         </p:nvSpPr>
         <p:spPr>
           <a:xfrm>
-            <a:off x="566928" y="320040"/>
-            <a:ext cx="2423160" cy="310896"/>
+            <a:off x="566928" y="301752"/>
+            <a:ext cx="3383280" cy="237744"/>
           </a:xfrm>
           <a:prstGeom prst="rect">
             <a:avLst/>
@@ -5081,7 +4803,7 @@
               <a:buNone/>
             </a:pPr>
             <a:r>
-              <a:rPr lang="en-US" sz="1050" b="1" spc="130" kern="0" dirty="0">
+              <a:rPr lang="en-US" sz="1000" b="1" spc="120" kern="0" dirty="0">
                 <a:solidFill>
                   <a:srgbClr val="2F6FAD"/>
                 </a:solidFill>
@@ -5089,9 +4811,9 @@
                 <a:ea typeface="Aptos" pitchFamily="34" charset="-122"/>
                 <a:cs typeface="Aptos" pitchFamily="34" charset="-120"/>
               </a:rPr>
-              <a:t>ABRUFÜBUNG</a:t>
-            </a:r>
-            <a:endParaRPr lang="en-US" sz="1050" dirty="0"/>
+              <a:t>STUFE 3 · ANWENDEN</a:t>
+            </a:r>
+            <a:endParaRPr lang="en-US" sz="1000" dirty="0"/>
           </a:p>
         </p:txBody>
       </p:sp>
@@ -5103,8 +4825,8 @@
         </p:nvSpPr>
         <p:spPr>
           <a:xfrm>
-            <a:off x="566928" y="658368"/>
-            <a:ext cx="10927080" cy="640080"/>
+            <a:off x="566928" y="621792"/>
+            <a:ext cx="10698480" cy="548640"/>
           </a:xfrm>
           <a:prstGeom prst="rect">
             <a:avLst/>
@@ -5122,17 +4844,17 @@
               <a:buNone/>
             </a:pPr>
             <a:r>
-              <a:rPr lang="en-US" sz="2800" b="1" dirty="0">
-                <a:solidFill>
-                  <a:srgbClr val="16324F"/>
-                </a:solidFill>
-                <a:latin typeface="Aptos" pitchFamily="34" charset="0"/>
-                <a:ea typeface="Aptos" pitchFamily="34" charset="-122"/>
-                <a:cs typeface="Aptos" pitchFamily="34" charset="-120"/>
-              </a:rPr>
-              <a:t>Schnellcheck</a:t>
-            </a:r>
-            <a:endParaRPr lang="en-US" sz="2800" dirty="0"/>
+              <a:rPr lang="en-US" sz="2700" b="1" dirty="0">
+                <a:solidFill>
+                  <a:srgbClr val="17324D"/>
+                </a:solidFill>
+                <a:latin typeface="Aptos" pitchFamily="34" charset="0"/>
+                <a:ea typeface="Aptos" pitchFamily="34" charset="-122"/>
+                <a:cs typeface="Aptos" pitchFamily="34" charset="-120"/>
+              </a:rPr>
+              <a:t>Einfache Aufgaben und Rechenbeispiele</a:t>
+            </a:r>
+            <a:endParaRPr lang="en-US" sz="2700" dirty="0"/>
           </a:p>
         </p:txBody>
       </p:sp>
@@ -5144,8 +4866,8 @@
         </p:nvSpPr>
         <p:spPr>
           <a:xfrm>
-            <a:off x="9784080" y="338328"/>
-            <a:ext cx="1737360" cy="246888"/>
+            <a:off x="9509760" y="310896"/>
+            <a:ext cx="2057400" cy="219456"/>
           </a:xfrm>
           <a:prstGeom prst="rect">
             <a:avLst/>
@@ -5163,9 +4885,9 @@
               <a:buNone/>
             </a:pPr>
             <a:r>
-              <a:rPr lang="en-US" sz="1050" b="1" dirty="0">
-                <a:solidFill>
-                  <a:srgbClr val="5B6B7B"/>
+              <a:rPr lang="en-US" sz="1020" b="1" dirty="0">
+                <a:solidFill>
+                  <a:srgbClr val="607080"/>
                 </a:solidFill>
                 <a:latin typeface="Aptos" pitchFamily="34" charset="0"/>
                 <a:ea typeface="Aptos" pitchFamily="34" charset="-122"/>
@@ -5173,7 +4895,7 @@
               </a:rPr>
               <a:t>Q1/Q2 Leistungskurs</a:t>
             </a:r>
-            <a:endParaRPr lang="en-US" sz="1050" dirty="0"/>
+            <a:endParaRPr lang="en-US" sz="1020" dirty="0"/>
           </a:p>
         </p:txBody>
       </p:sp>
@@ -5185,7 +4907,7 @@
         </p:nvSpPr>
         <p:spPr>
           <a:xfrm>
-            <a:off x="566928" y="1353312"/>
+            <a:off x="566928" y="1280160"/>
             <a:ext cx="11045952" cy="0"/>
           </a:xfrm>
           <a:prstGeom prst="line">
@@ -5194,7 +4916,7 @@
           <a:noFill/>
           <a:ln w="12700">
             <a:solidFill>
-              <a:srgbClr val="C8D5E2"/>
+              <a:srgbClr val="CDD8E2"/>
             </a:solidFill>
             <a:prstDash val="solid"/>
           </a:ln>
@@ -5208,8 +4930,8 @@
         </p:nvSpPr>
         <p:spPr>
           <a:xfrm>
-            <a:off x="566928" y="6528816"/>
-            <a:ext cx="5303520" cy="201168"/>
+            <a:off x="566928" y="6519672"/>
+            <a:ext cx="5212080" cy="182880"/>
           </a:xfrm>
           <a:prstGeom prst="rect">
             <a:avLst/>
@@ -5227,9 +4949,9 @@
               <a:buNone/>
             </a:pPr>
             <a:r>
-              <a:rPr lang="en-US" sz="950" dirty="0">
-                <a:solidFill>
-                  <a:srgbClr val="5B6B7B"/>
+              <a:rPr lang="en-US" sz="900" dirty="0">
+                <a:solidFill>
+                  <a:srgbClr val="607080"/>
                 </a:solidFill>
                 <a:latin typeface="Aptos" pitchFamily="34" charset="0"/>
                 <a:ea typeface="Aptos" pitchFamily="34" charset="-122"/>
@@ -5237,7 +4959,7 @@
               </a:rPr>
               <a:t>Fortlaufende Wiederholung · Physik NRW</a:t>
             </a:r>
-            <a:endParaRPr lang="en-US" sz="950" dirty="0"/>
+            <a:endParaRPr lang="en-US" sz="900" dirty="0"/>
           </a:p>
         </p:txBody>
       </p:sp>
@@ -5249,8 +4971,8 @@
         </p:nvSpPr>
         <p:spPr>
           <a:xfrm>
-            <a:off x="11109960" y="6528816"/>
-            <a:ext cx="502920" cy="201168"/>
+            <a:off x="11137392" y="6519672"/>
+            <a:ext cx="457200" cy="182880"/>
           </a:xfrm>
           <a:prstGeom prst="rect">
             <a:avLst/>
@@ -5268,9 +4990,9 @@
               <a:buNone/>
             </a:pPr>
             <a:r>
-              <a:rPr lang="en-US" sz="950" dirty="0">
-                <a:solidFill>
-                  <a:srgbClr val="5B6B7B"/>
+              <a:rPr lang="en-US" sz="900" dirty="0">
+                <a:solidFill>
+                  <a:srgbClr val="607080"/>
                 </a:solidFill>
                 <a:latin typeface="Aptos" pitchFamily="34" charset="0"/>
                 <a:ea typeface="Aptos" pitchFamily="34" charset="-122"/>
@@ -5278,7 +5000,7 @@
               </a:rPr>
               <a:t>5</a:t>
             </a:r>
-            <a:endParaRPr lang="en-US" sz="950" dirty="0"/>
+            <a:endParaRPr lang="en-US" sz="900" dirty="0"/>
           </a:p>
         </p:txBody>
       </p:sp>
@@ -5290,8 +5012,8 @@
         </p:nvSpPr>
         <p:spPr>
           <a:xfrm>
-            <a:off x="658368" y="1581912"/>
-            <a:ext cx="10881360" cy="384048"/>
+            <a:off x="658368" y="1463040"/>
+            <a:ext cx="10515600" cy="310896"/>
           </a:xfrm>
           <a:prstGeom prst="rect">
             <a:avLst/>
@@ -5309,17 +5031,17 @@
               <a:buNone/>
             </a:pPr>
             <a:r>
-              <a:rPr lang="en-US" sz="1500" dirty="0">
-                <a:solidFill>
-                  <a:srgbClr val="5B6B7B"/>
-                </a:solidFill>
-                <a:latin typeface="Aptos" pitchFamily="34" charset="0"/>
-                <a:ea typeface="Aptos" pitchFamily="34" charset="-122"/>
-                <a:cs typeface="Aptos" pitchFamily="34" charset="-120"/>
-              </a:rPr>
-              <a:t>Ohne Unterlagen beantworten – erst danach gemeinsam prüfen.</a:t>
-            </a:r>
-            <a:endParaRPr lang="en-US" sz="1500" dirty="0"/>
+              <a:rPr lang="en-US" sz="1400" dirty="0">
+                <a:solidFill>
+                  <a:srgbClr val="607080"/>
+                </a:solidFill>
+                <a:latin typeface="Aptos" pitchFamily="34" charset="0"/>
+                <a:ea typeface="Aptos" pitchFamily="34" charset="-122"/>
+                <a:cs typeface="Aptos" pitchFamily="34" charset="-120"/>
+              </a:rPr>
+              <a:t>Rechne zunächst mit bewusst einfachen Zahlen und klaren Einzelschritten.</a:t>
+            </a:r>
+            <a:endParaRPr lang="en-US" sz="1400" dirty="0"/>
           </a:p>
         </p:txBody>
       </p:sp>
@@ -5331,23 +5053,30 @@
         </p:nvSpPr>
         <p:spPr>
           <a:xfrm>
-            <a:off x="749808" y="2148840"/>
-            <a:ext cx="10561320" cy="987552"/>
+            <a:off x="749808" y="1865376"/>
+            <a:ext cx="10607040" cy="1124712"/>
           </a:xfrm>
           <a:prstGeom prst="roundRect">
             <a:avLst>
-              <a:gd name="adj" fmla="val 6481"/>
+              <a:gd name="adj" fmla="val 4878"/>
             </a:avLst>
           </a:prstGeom>
           <a:solidFill>
-            <a:srgbClr val="FFFFFF"/>
+            <a:srgbClr val="EAF3FB"/>
           </a:solidFill>
           <a:ln w="12700">
             <a:solidFill>
-              <a:srgbClr val="C8D5E2"/>
-            </a:solidFill>
-            <a:prstDash val="solid"/>
-          </a:ln>
+              <a:srgbClr val="CDD8E2"/>
+            </a:solidFill>
+            <a:prstDash val="solid"/>
+          </a:ln>
+          <a:effectLst>
+            <a:outerShdw sx="100000" sy="100000" kx="0" ky="0" algn="bl" rotWithShape="0" blurRad="12700" dist="50800" dir="2700000">
+              <a:srgbClr val="A8B8C7">
+                <a:alpha val="11000"/>
+              </a:srgbClr>
+            </a:outerShdw>
+          </a:effectLst>
         </p:spPr>
       </p:sp>
       <p:sp>
@@ -5358,10 +5087,10 @@
         </p:nvSpPr>
         <p:spPr>
           <a:xfrm>
-            <a:off x="969264" y="2368296"/>
-            <a:ext cx="548640" cy="548640"/>
-          </a:xfrm>
-          <a:prstGeom prst="ellipse">
+            <a:off x="749808" y="1865376"/>
+            <a:ext cx="68580" cy="1124712"/>
+          </a:xfrm>
+          <a:prstGeom prst="rect">
             <a:avLst/>
           </a:prstGeom>
           <a:solidFill>
@@ -5385,58 +5114,17 @@
         </p:nvSpPr>
         <p:spPr>
           <a:xfrm>
-            <a:off x="969264" y="2386584"/>
-            <a:ext cx="548640" cy="502920"/>
-          </a:xfrm>
-          <a:prstGeom prst="rect">
-            <a:avLst/>
-          </a:prstGeom>
-          <a:noFill/>
-          <a:ln/>
-        </p:spPr>
-        <p:txBody>
-          <a:bodyPr wrap="square" lIns="0" tIns="0" rIns="0" bIns="0" rtlCol="0" anchor="ctr">
-            <a:normAutofit/>
-          </a:bodyPr>
-          <a:lstStyle/>
-          <a:p>
-            <a:pPr algn="ctr" indent="0" marL="0">
-              <a:buNone/>
-            </a:pPr>
-            <a:r>
-              <a:rPr lang="en-US" sz="1500" b="1" dirty="0">
-                <a:solidFill>
-                  <a:srgbClr val="FFFFFF"/>
-                </a:solidFill>
-                <a:latin typeface="Aptos" pitchFamily="34" charset="0"/>
-                <a:ea typeface="Aptos" pitchFamily="34" charset="-122"/>
-                <a:cs typeface="Aptos" pitchFamily="34" charset="-120"/>
-              </a:rPr>
-              <a:t>1</a:t>
-            </a:r>
-            <a:endParaRPr lang="en-US" sz="1500" dirty="0"/>
-          </a:p>
-        </p:txBody>
-      </p:sp>
-      <p:sp>
-        <p:nvSpPr>
-          <p:cNvPr id="13" name="Text 11"/>
-          <p:cNvSpPr/>
-          <p:nvPr/>
-        </p:nvSpPr>
-        <p:spPr>
-          <a:xfrm>
-            <a:off x="1755648" y="2286000"/>
-            <a:ext cx="9098280" cy="713232"/>
-          </a:xfrm>
-          <a:prstGeom prst="rect">
-            <a:avLst/>
-          </a:prstGeom>
-          <a:noFill/>
-          <a:ln/>
-        </p:spPr>
-        <p:txBody>
-          <a:bodyPr wrap="square" lIns="0" tIns="0" rIns="0" bIns="0" rtlCol="0" anchor="ctr">
+            <a:off x="950976" y="1984248"/>
+            <a:ext cx="10259568" cy="310896"/>
+          </a:xfrm>
+          <a:prstGeom prst="rect">
+            <a:avLst/>
+          </a:prstGeom>
+          <a:noFill/>
+          <a:ln/>
+        </p:spPr>
+        <p:txBody>
+          <a:bodyPr wrap="square" lIns="0" tIns="0" rIns="0" bIns="0" rtlCol="0" anchor="t">
             <a:normAutofit/>
           </a:bodyPr>
           <a:lstStyle/>
@@ -5445,7 +5133,48 @@
               <a:buNone/>
             </a:pPr>
             <a:r>
-              <a:rPr lang="en-US" sz="1700" b="1" dirty="0">
+              <a:rPr lang="en-US" sz="1300" b="1" dirty="0">
+                <a:solidFill>
+                  <a:srgbClr val="17324D"/>
+                </a:solidFill>
+                <a:latin typeface="Aptos" pitchFamily="34" charset="0"/>
+                <a:ea typeface="Aptos" pitchFamily="34" charset="-122"/>
+                <a:cs typeface="Aptos" pitchFamily="34" charset="-120"/>
+              </a:rPr>
+              <a:t>Aufgabe 1</a:t>
+            </a:r>
+            <a:endParaRPr lang="en-US" sz="1300" dirty="0"/>
+          </a:p>
+        </p:txBody>
+      </p:sp>
+      <p:sp>
+        <p:nvSpPr>
+          <p:cNvPr id="13" name="Text 11"/>
+          <p:cNvSpPr/>
+          <p:nvPr/>
+        </p:nvSpPr>
+        <p:spPr>
+          <a:xfrm>
+            <a:off x="950976" y="2359152"/>
+            <a:ext cx="10241280" cy="502920"/>
+          </a:xfrm>
+          <a:prstGeom prst="rect">
+            <a:avLst/>
+          </a:prstGeom>
+          <a:noFill/>
+          <a:ln/>
+        </p:spPr>
+        <p:txBody>
+          <a:bodyPr wrap="square" lIns="0" tIns="0" rIns="0" bIns="0" rtlCol="0" anchor="t">
+            <a:normAutofit/>
+          </a:bodyPr>
+          <a:lstStyle/>
+          <a:p>
+            <a:pPr indent="0" marL="0">
+              <a:buNone/>
+            </a:pPr>
+            <a:r>
+              <a:rPr lang="en-US" sz="1500" dirty="0">
                 <a:solidFill>
                   <a:srgbClr val="203040"/>
                 </a:solidFill>
@@ -5453,9 +5182,9 @@
                 <a:ea typeface="Aptos" pitchFamily="34" charset="-122"/>
                 <a:cs typeface="Aptos" pitchFamily="34" charset="-120"/>
               </a:rPr>
-              <a:t>Wie hängen Potentialdifferenz und Spannung zusammen?</a:t>
-            </a:r>
-            <a:endParaRPr lang="en-US" sz="1700" dirty="0"/>
+              <a:t>q₁=q₂=1,0 µC, r=0,10 m. Berechne F_C mit k≈9,0·10⁹ N·m²/C².</a:t>
+            </a:r>
+            <a:endParaRPr lang="en-US" sz="1500" dirty="0"/>
           </a:p>
         </p:txBody>
       </p:sp>
@@ -5467,23 +5196,30 @@
         </p:nvSpPr>
         <p:spPr>
           <a:xfrm>
-            <a:off x="749808" y="3383280"/>
-            <a:ext cx="10561320" cy="987552"/>
+            <a:off x="749808" y="3227832"/>
+            <a:ext cx="10607040" cy="1124712"/>
           </a:xfrm>
           <a:prstGeom prst="roundRect">
             <a:avLst>
-              <a:gd name="adj" fmla="val 6481"/>
+              <a:gd name="adj" fmla="val 4878"/>
             </a:avLst>
           </a:prstGeom>
           <a:solidFill>
-            <a:srgbClr val="FFFFFF"/>
+            <a:srgbClr val="E8F4F2"/>
           </a:solidFill>
           <a:ln w="12700">
             <a:solidFill>
-              <a:srgbClr val="C8D5E2"/>
-            </a:solidFill>
-            <a:prstDash val="solid"/>
-          </a:ln>
+              <a:srgbClr val="CDD8E2"/>
+            </a:solidFill>
+            <a:prstDash val="solid"/>
+          </a:ln>
+          <a:effectLst>
+            <a:outerShdw sx="100000" sy="100000" kx="0" ky="0" algn="bl" rotWithShape="0" blurRad="12700" dist="50800" dir="2700000">
+              <a:srgbClr val="A8B8C7">
+                <a:alpha val="11000"/>
+              </a:srgbClr>
+            </a:outerShdw>
+          </a:effectLst>
         </p:spPr>
       </p:sp>
       <p:sp>
@@ -5494,10 +5230,10 @@
         </p:nvSpPr>
         <p:spPr>
           <a:xfrm>
-            <a:off x="969264" y="3602736"/>
-            <a:ext cx="548640" cy="548640"/>
-          </a:xfrm>
-          <a:prstGeom prst="ellipse">
+            <a:off x="749808" y="3227832"/>
+            <a:ext cx="68580" cy="1124712"/>
+          </a:xfrm>
+          <a:prstGeom prst="rect">
             <a:avLst/>
           </a:prstGeom>
           <a:solidFill>
@@ -5521,58 +5257,17 @@
         </p:nvSpPr>
         <p:spPr>
           <a:xfrm>
-            <a:off x="969264" y="3621024"/>
-            <a:ext cx="548640" cy="502920"/>
-          </a:xfrm>
-          <a:prstGeom prst="rect">
-            <a:avLst/>
-          </a:prstGeom>
-          <a:noFill/>
-          <a:ln/>
-        </p:spPr>
-        <p:txBody>
-          <a:bodyPr wrap="square" lIns="0" tIns="0" rIns="0" bIns="0" rtlCol="0" anchor="ctr">
-            <a:normAutofit/>
-          </a:bodyPr>
-          <a:lstStyle/>
-          <a:p>
-            <a:pPr algn="ctr" indent="0" marL="0">
-              <a:buNone/>
-            </a:pPr>
-            <a:r>
-              <a:rPr lang="en-US" sz="1500" b="1" dirty="0">
-                <a:solidFill>
-                  <a:srgbClr val="FFFFFF"/>
-                </a:solidFill>
-                <a:latin typeface="Aptos" pitchFamily="34" charset="0"/>
-                <a:ea typeface="Aptos" pitchFamily="34" charset="-122"/>
-                <a:cs typeface="Aptos" pitchFamily="34" charset="-120"/>
-              </a:rPr>
-              <a:t>2</a:t>
-            </a:r>
-            <a:endParaRPr lang="en-US" sz="1500" dirty="0"/>
-          </a:p>
-        </p:txBody>
-      </p:sp>
-      <p:sp>
-        <p:nvSpPr>
-          <p:cNvPr id="17" name="Text 15"/>
-          <p:cNvSpPr/>
-          <p:nvPr/>
-        </p:nvSpPr>
-        <p:spPr>
-          <a:xfrm>
-            <a:off x="1755648" y="3520440"/>
-            <a:ext cx="9098280" cy="713232"/>
-          </a:xfrm>
-          <a:prstGeom prst="rect">
-            <a:avLst/>
-          </a:prstGeom>
-          <a:noFill/>
-          <a:ln/>
-        </p:spPr>
-        <p:txBody>
-          <a:bodyPr wrap="square" lIns="0" tIns="0" rIns="0" bIns="0" rtlCol="0" anchor="ctr">
+            <a:off x="950976" y="3346704"/>
+            <a:ext cx="10259568" cy="310896"/>
+          </a:xfrm>
+          <a:prstGeom prst="rect">
+            <a:avLst/>
+          </a:prstGeom>
+          <a:noFill/>
+          <a:ln/>
+        </p:spPr>
+        <p:txBody>
+          <a:bodyPr wrap="square" lIns="0" tIns="0" rIns="0" bIns="0" rtlCol="0" anchor="t">
             <a:normAutofit/>
           </a:bodyPr>
           <a:lstStyle/>
@@ -5581,7 +5276,48 @@
               <a:buNone/>
             </a:pPr>
             <a:r>
-              <a:rPr lang="en-US" sz="1700" b="1" dirty="0">
+              <a:rPr lang="en-US" sz="1300" b="1" dirty="0">
+                <a:solidFill>
+                  <a:srgbClr val="17324D"/>
+                </a:solidFill>
+                <a:latin typeface="Aptos" pitchFamily="34" charset="0"/>
+                <a:ea typeface="Aptos" pitchFamily="34" charset="-122"/>
+                <a:cs typeface="Aptos" pitchFamily="34" charset="-120"/>
+              </a:rPr>
+              <a:t>Aufgabe 2</a:t>
+            </a:r>
+            <a:endParaRPr lang="en-US" sz="1300" dirty="0"/>
+          </a:p>
+        </p:txBody>
+      </p:sp>
+      <p:sp>
+        <p:nvSpPr>
+          <p:cNvPr id="17" name="Text 15"/>
+          <p:cNvSpPr/>
+          <p:nvPr/>
+        </p:nvSpPr>
+        <p:spPr>
+          <a:xfrm>
+            <a:off x="950976" y="3721608"/>
+            <a:ext cx="10241280" cy="502920"/>
+          </a:xfrm>
+          <a:prstGeom prst="rect">
+            <a:avLst/>
+          </a:prstGeom>
+          <a:noFill/>
+          <a:ln/>
+        </p:spPr>
+        <p:txBody>
+          <a:bodyPr wrap="square" lIns="0" tIns="0" rIns="0" bIns="0" rtlCol="0" anchor="t">
+            <a:normAutofit/>
+          </a:bodyPr>
+          <a:lstStyle/>
+          <a:p>
+            <a:pPr indent="0" marL="0">
+              <a:buNone/>
+            </a:pPr>
+            <a:r>
+              <a:rPr lang="en-US" sz="1500" dirty="0">
                 <a:solidFill>
                   <a:srgbClr val="203040"/>
                 </a:solidFill>
@@ -5589,9 +5325,9 @@
                 <a:ea typeface="Aptos" pitchFamily="34" charset="-122"/>
                 <a:cs typeface="Aptos" pitchFamily="34" charset="-120"/>
               </a:rPr>
-              <a:t>Wann beschreibt die Lorentzkraft eine Kreisbahn?</a:t>
-            </a:r>
-            <a:endParaRPr lang="en-US" sz="1700" dirty="0"/>
+              <a:t>Plattenkondensator: U=200 V, d=0,020 m. Berechne E.</a:t>
+            </a:r>
+            <a:endParaRPr lang="en-US" sz="1500" dirty="0"/>
           </a:p>
         </p:txBody>
       </p:sp>
@@ -5603,23 +5339,30 @@
         </p:nvSpPr>
         <p:spPr>
           <a:xfrm>
-            <a:off x="749808" y="4617720"/>
-            <a:ext cx="10561320" cy="987552"/>
+            <a:off x="749808" y="4590288"/>
+            <a:ext cx="10607040" cy="1124712"/>
           </a:xfrm>
           <a:prstGeom prst="roundRect">
             <a:avLst>
-              <a:gd name="adj" fmla="val 6481"/>
+              <a:gd name="adj" fmla="val 4878"/>
             </a:avLst>
           </a:prstGeom>
           <a:solidFill>
-            <a:srgbClr val="FFFFFF"/>
+            <a:srgbClr val="FFF4DE"/>
           </a:solidFill>
           <a:ln w="12700">
             <a:solidFill>
-              <a:srgbClr val="C8D5E2"/>
-            </a:solidFill>
-            <a:prstDash val="solid"/>
-          </a:ln>
+              <a:srgbClr val="CDD8E2"/>
+            </a:solidFill>
+            <a:prstDash val="solid"/>
+          </a:ln>
+          <a:effectLst>
+            <a:outerShdw sx="100000" sy="100000" kx="0" ky="0" algn="bl" rotWithShape="0" blurRad="12700" dist="50800" dir="2700000">
+              <a:srgbClr val="A8B8C7">
+                <a:alpha val="11000"/>
+              </a:srgbClr>
+            </a:outerShdw>
+          </a:effectLst>
         </p:spPr>
       </p:sp>
       <p:sp>
@@ -5630,18 +5373,18 @@
         </p:nvSpPr>
         <p:spPr>
           <a:xfrm>
-            <a:off x="969264" y="4837176"/>
-            <a:ext cx="548640" cy="548640"/>
-          </a:xfrm>
-          <a:prstGeom prst="ellipse">
+            <a:off x="749808" y="4590288"/>
+            <a:ext cx="68580" cy="1124712"/>
+          </a:xfrm>
+          <a:prstGeom prst="rect">
             <a:avLst/>
           </a:prstGeom>
           <a:solidFill>
-            <a:srgbClr val="D9902F"/>
+            <a:srgbClr val="D78C24"/>
           </a:solidFill>
           <a:ln w="12700">
             <a:solidFill>
-              <a:srgbClr val="D9902F">
+              <a:srgbClr val="D78C24">
                 <a:alpha val="0"/>
               </a:srgbClr>
             </a:solidFill>
@@ -5657,58 +5400,17 @@
         </p:nvSpPr>
         <p:spPr>
           <a:xfrm>
-            <a:off x="969264" y="4855464"/>
-            <a:ext cx="548640" cy="502920"/>
-          </a:xfrm>
-          <a:prstGeom prst="rect">
-            <a:avLst/>
-          </a:prstGeom>
-          <a:noFill/>
-          <a:ln/>
-        </p:spPr>
-        <p:txBody>
-          <a:bodyPr wrap="square" lIns="0" tIns="0" rIns="0" bIns="0" rtlCol="0" anchor="ctr">
-            <a:normAutofit/>
-          </a:bodyPr>
-          <a:lstStyle/>
-          <a:p>
-            <a:pPr algn="ctr" indent="0" marL="0">
-              <a:buNone/>
-            </a:pPr>
-            <a:r>
-              <a:rPr lang="en-US" sz="1500" b="1" dirty="0">
-                <a:solidFill>
-                  <a:srgbClr val="FFFFFF"/>
-                </a:solidFill>
-                <a:latin typeface="Aptos" pitchFamily="34" charset="0"/>
-                <a:ea typeface="Aptos" pitchFamily="34" charset="-122"/>
-                <a:cs typeface="Aptos" pitchFamily="34" charset="-120"/>
-              </a:rPr>
-              <a:t>3</a:t>
-            </a:r>
-            <a:endParaRPr lang="en-US" sz="1500" dirty="0"/>
-          </a:p>
-        </p:txBody>
-      </p:sp>
-      <p:sp>
-        <p:nvSpPr>
-          <p:cNvPr id="21" name="Text 19"/>
-          <p:cNvSpPr/>
-          <p:nvPr/>
-        </p:nvSpPr>
-        <p:spPr>
-          <a:xfrm>
-            <a:off x="1755648" y="4754880"/>
-            <a:ext cx="9098280" cy="713232"/>
-          </a:xfrm>
-          <a:prstGeom prst="rect">
-            <a:avLst/>
-          </a:prstGeom>
-          <a:noFill/>
-          <a:ln/>
-        </p:spPr>
-        <p:txBody>
-          <a:bodyPr wrap="square" lIns="0" tIns="0" rIns="0" bIns="0" rtlCol="0" anchor="ctr">
+            <a:off x="950976" y="4709160"/>
+            <a:ext cx="10259568" cy="310896"/>
+          </a:xfrm>
+          <a:prstGeom prst="rect">
+            <a:avLst/>
+          </a:prstGeom>
+          <a:noFill/>
+          <a:ln/>
+        </p:spPr>
+        <p:txBody>
+          <a:bodyPr wrap="square" lIns="0" tIns="0" rIns="0" bIns="0" rtlCol="0" anchor="t">
             <a:normAutofit/>
           </a:bodyPr>
           <a:lstStyle/>
@@ -5717,7 +5419,48 @@
               <a:buNone/>
             </a:pPr>
             <a:r>
-              <a:rPr lang="en-US" sz="1700" b="1" dirty="0">
+              <a:rPr lang="en-US" sz="1300" b="1" dirty="0">
+                <a:solidFill>
+                  <a:srgbClr val="17324D"/>
+                </a:solidFill>
+                <a:latin typeface="Aptos" pitchFamily="34" charset="0"/>
+                <a:ea typeface="Aptos" pitchFamily="34" charset="-122"/>
+                <a:cs typeface="Aptos" pitchFamily="34" charset="-120"/>
+              </a:rPr>
+              <a:t>Aufgabe 3</a:t>
+            </a:r>
+            <a:endParaRPr lang="en-US" sz="1300" dirty="0"/>
+          </a:p>
+        </p:txBody>
+      </p:sp>
+      <p:sp>
+        <p:nvSpPr>
+          <p:cNvPr id="21" name="Text 19"/>
+          <p:cNvSpPr/>
+          <p:nvPr/>
+        </p:nvSpPr>
+        <p:spPr>
+          <a:xfrm>
+            <a:off x="950976" y="5084064"/>
+            <a:ext cx="10241280" cy="502920"/>
+          </a:xfrm>
+          <a:prstGeom prst="rect">
+            <a:avLst/>
+          </a:prstGeom>
+          <a:noFill/>
+          <a:ln/>
+        </p:spPr>
+        <p:txBody>
+          <a:bodyPr wrap="square" lIns="0" tIns="0" rIns="0" bIns="0" rtlCol="0" anchor="t">
+            <a:normAutofit/>
+          </a:bodyPr>
+          <a:lstStyle/>
+          <a:p>
+            <a:pPr indent="0" marL="0">
+              <a:buNone/>
+            </a:pPr>
+            <a:r>
+              <a:rPr lang="en-US" sz="1500" dirty="0">
                 <a:solidFill>
                   <a:srgbClr val="203040"/>
                 </a:solidFill>
@@ -5725,79 +5468,9 @@
                 <a:ea typeface="Aptos" pitchFamily="34" charset="-122"/>
                 <a:cs typeface="Aptos" pitchFamily="34" charset="-120"/>
               </a:rPr>
-              <a:t>Welche Rolle spielt Energieerhaltung bei der Lenzschen Regel?</a:t>
-            </a:r>
-            <a:endParaRPr lang="en-US" sz="1700" dirty="0"/>
-          </a:p>
-        </p:txBody>
-      </p:sp>
-      <p:sp>
-        <p:nvSpPr>
-          <p:cNvPr id="22" name="Shape 20"/>
-          <p:cNvSpPr/>
-          <p:nvPr/>
-        </p:nvSpPr>
-        <p:spPr>
-          <a:xfrm>
-            <a:off x="4096512" y="5943600"/>
-            <a:ext cx="3977640" cy="384048"/>
-          </a:xfrm>
-          <a:prstGeom prst="roundRect">
-            <a:avLst>
-              <a:gd name="adj" fmla="val 11905"/>
-            </a:avLst>
-          </a:prstGeom>
-          <a:solidFill>
-            <a:srgbClr val="EAF3FB"/>
-          </a:solidFill>
-          <a:ln w="12700">
-            <a:solidFill>
-              <a:srgbClr val="D9EBF8">
-                <a:alpha val="0"/>
-              </a:srgbClr>
-            </a:solidFill>
-            <a:prstDash val="solid"/>
-          </a:ln>
-        </p:spPr>
-      </p:sp>
-      <p:sp>
-        <p:nvSpPr>
-          <p:cNvPr id="23" name="Text 21"/>
-          <p:cNvSpPr/>
-          <p:nvPr/>
-        </p:nvSpPr>
-        <p:spPr>
-          <a:xfrm>
-            <a:off x="4251960" y="6016752"/>
-            <a:ext cx="3657600" cy="201168"/>
-          </a:xfrm>
-          <a:prstGeom prst="rect">
-            <a:avLst/>
-          </a:prstGeom>
-          <a:noFill/>
-          <a:ln/>
-        </p:spPr>
-        <p:txBody>
-          <a:bodyPr wrap="square" lIns="0" tIns="0" rIns="0" bIns="0" rtlCol="0" anchor="ctr">
-            <a:normAutofit/>
-          </a:bodyPr>
-          <a:lstStyle/>
-          <a:p>
-            <a:pPr algn="ctr" indent="0" marL="0">
-              <a:buNone/>
-            </a:pPr>
-            <a:r>
-              <a:rPr lang="en-US" sz="1050" b="1" dirty="0">
-                <a:solidFill>
-                  <a:srgbClr val="2F6FAD"/>
-                </a:solidFill>
-                <a:latin typeface="Aptos" pitchFamily="34" charset="0"/>
-                <a:ea typeface="Aptos" pitchFamily="34" charset="-122"/>
-                <a:cs typeface="Aptos" pitchFamily="34" charset="-120"/>
-              </a:rPr>
-              <a:t>Tipp: Erklären ist stärker als nur nennen.</a:t>
-            </a:r>
-            <a:endParaRPr lang="en-US" sz="1050" dirty="0"/>
+              <a:t>Q=2,0 µC bei U=10 V. Berechne C.</a:t>
+            </a:r>
+            <a:endParaRPr lang="en-US" sz="1500" dirty="0"/>
           </a:p>
         </p:txBody>
       </p:sp>
@@ -5842,7 +5515,7 @@
         <p:spPr>
           <a:xfrm>
             <a:off x="0" y="0"/>
-            <a:ext cx="12191695" cy="164592"/>
+            <a:ext cx="12191695" cy="137160"/>
           </a:xfrm>
           <a:prstGeom prst="rect">
             <a:avLst/>
@@ -5868,8 +5541,8 @@
         </p:nvSpPr>
         <p:spPr>
           <a:xfrm>
-            <a:off x="566928" y="320040"/>
-            <a:ext cx="2423160" cy="310896"/>
+            <a:off x="566928" y="301752"/>
+            <a:ext cx="3383280" cy="237744"/>
           </a:xfrm>
           <a:prstGeom prst="rect">
             <a:avLst/>
@@ -5887,7 +5560,7 @@
               <a:buNone/>
             </a:pPr>
             <a:r>
-              <a:rPr lang="en-US" sz="1050" b="1" spc="130" kern="0" dirty="0">
+              <a:rPr lang="en-US" sz="1000" b="1" spc="120" kern="0" dirty="0">
                 <a:solidFill>
                   <a:srgbClr val="2F6FAD"/>
                 </a:solidFill>
@@ -5895,9 +5568,9 @@
                 <a:ea typeface="Aptos" pitchFamily="34" charset="-122"/>
                 <a:cs typeface="Aptos" pitchFamily="34" charset="-120"/>
               </a:rPr>
-              <a:t>FORTSCHREIBEN</a:t>
-            </a:r>
-            <a:endParaRPr lang="en-US" sz="1050" dirty="0"/>
+              <a:t>STUFE 4 · TRANSFER</a:t>
+            </a:r>
+            <a:endParaRPr lang="en-US" sz="1000" dirty="0"/>
           </a:p>
         </p:txBody>
       </p:sp>
@@ -5909,8 +5582,8 @@
         </p:nvSpPr>
         <p:spPr>
           <a:xfrm>
-            <a:off x="566928" y="658368"/>
-            <a:ext cx="10927080" cy="640080"/>
+            <a:off x="566928" y="621792"/>
+            <a:ext cx="10698480" cy="548640"/>
           </a:xfrm>
           <a:prstGeom prst="rect">
             <a:avLst/>
@@ -5928,17 +5601,17 @@
               <a:buNone/>
             </a:pPr>
             <a:r>
-              <a:rPr lang="en-US" sz="2800" b="1" dirty="0">
-                <a:solidFill>
-                  <a:srgbClr val="16324F"/>
-                </a:solidFill>
-                <a:latin typeface="Aptos" pitchFamily="34" charset="0"/>
-                <a:ea typeface="Aptos" pitchFamily="34" charset="-122"/>
-                <a:cs typeface="Aptos" pitchFamily="34" charset="-120"/>
-              </a:rPr>
-              <a:t>Stundenrückblick – Vorlage</a:t>
-            </a:r>
-            <a:endParaRPr lang="en-US" sz="2800" dirty="0"/>
+              <a:rPr lang="en-US" sz="2700" b="1" dirty="0">
+                <a:solidFill>
+                  <a:srgbClr val="17324D"/>
+                </a:solidFill>
+                <a:latin typeface="Aptos" pitchFamily="34" charset="0"/>
+                <a:ea typeface="Aptos" pitchFamily="34" charset="-122"/>
+                <a:cs typeface="Aptos" pitchFamily="34" charset="-120"/>
+              </a:rPr>
+              <a:t>Jetzt verknüpfen</a:t>
+            </a:r>
+            <a:endParaRPr lang="en-US" sz="2700" dirty="0"/>
           </a:p>
         </p:txBody>
       </p:sp>
@@ -5950,8 +5623,8 @@
         </p:nvSpPr>
         <p:spPr>
           <a:xfrm>
-            <a:off x="9784080" y="338328"/>
-            <a:ext cx="1737360" cy="246888"/>
+            <a:off x="9509760" y="310896"/>
+            <a:ext cx="2057400" cy="219456"/>
           </a:xfrm>
           <a:prstGeom prst="rect">
             <a:avLst/>
@@ -5969,9 +5642,9 @@
               <a:buNone/>
             </a:pPr>
             <a:r>
-              <a:rPr lang="en-US" sz="1050" b="1" dirty="0">
-                <a:solidFill>
-                  <a:srgbClr val="5B6B7B"/>
+              <a:rPr lang="en-US" sz="1020" b="1" dirty="0">
+                <a:solidFill>
+                  <a:srgbClr val="607080"/>
                 </a:solidFill>
                 <a:latin typeface="Aptos" pitchFamily="34" charset="0"/>
                 <a:ea typeface="Aptos" pitchFamily="34" charset="-122"/>
@@ -5979,7 +5652,7 @@
               </a:rPr>
               <a:t>Q1/Q2 Leistungskurs</a:t>
             </a:r>
-            <a:endParaRPr lang="en-US" sz="1050" dirty="0"/>
+            <a:endParaRPr lang="en-US" sz="1020" dirty="0"/>
           </a:p>
         </p:txBody>
       </p:sp>
@@ -5991,7 +5664,7 @@
         </p:nvSpPr>
         <p:spPr>
           <a:xfrm>
-            <a:off x="566928" y="1353312"/>
+            <a:off x="566928" y="1280160"/>
             <a:ext cx="11045952" cy="0"/>
           </a:xfrm>
           <a:prstGeom prst="line">
@@ -6000,7 +5673,7 @@
           <a:noFill/>
           <a:ln w="12700">
             <a:solidFill>
-              <a:srgbClr val="C8D5E2"/>
+              <a:srgbClr val="CDD8E2"/>
             </a:solidFill>
             <a:prstDash val="solid"/>
           </a:ln>
@@ -6014,8 +5687,8 @@
         </p:nvSpPr>
         <p:spPr>
           <a:xfrm>
-            <a:off x="566928" y="6528816"/>
-            <a:ext cx="5303520" cy="201168"/>
+            <a:off x="566928" y="6519672"/>
+            <a:ext cx="5212080" cy="182880"/>
           </a:xfrm>
           <a:prstGeom prst="rect">
             <a:avLst/>
@@ -6033,9 +5706,9 @@
               <a:buNone/>
             </a:pPr>
             <a:r>
-              <a:rPr lang="en-US" sz="950" dirty="0">
-                <a:solidFill>
-                  <a:srgbClr val="5B6B7B"/>
+              <a:rPr lang="en-US" sz="900" dirty="0">
+                <a:solidFill>
+                  <a:srgbClr val="607080"/>
                 </a:solidFill>
                 <a:latin typeface="Aptos" pitchFamily="34" charset="0"/>
                 <a:ea typeface="Aptos" pitchFamily="34" charset="-122"/>
@@ -6043,7 +5716,7 @@
               </a:rPr>
               <a:t>Fortlaufende Wiederholung · Physik NRW</a:t>
             </a:r>
-            <a:endParaRPr lang="en-US" sz="950" dirty="0"/>
+            <a:endParaRPr lang="en-US" sz="900" dirty="0"/>
           </a:p>
         </p:txBody>
       </p:sp>
@@ -6055,8 +5728,8 @@
         </p:nvSpPr>
         <p:spPr>
           <a:xfrm>
-            <a:off x="11109960" y="6528816"/>
-            <a:ext cx="502920" cy="201168"/>
+            <a:off x="11137392" y="6519672"/>
+            <a:ext cx="457200" cy="182880"/>
           </a:xfrm>
           <a:prstGeom prst="rect">
             <a:avLst/>
@@ -6074,9 +5747,9 @@
               <a:buNone/>
             </a:pPr>
             <a:r>
-              <a:rPr lang="en-US" sz="950" dirty="0">
-                <a:solidFill>
-                  <a:srgbClr val="5B6B7B"/>
+              <a:rPr lang="en-US" sz="900" dirty="0">
+                <a:solidFill>
+                  <a:srgbClr val="607080"/>
                 </a:solidFill>
                 <a:latin typeface="Aptos" pitchFamily="34" charset="0"/>
                 <a:ea typeface="Aptos" pitchFamily="34" charset="-122"/>
@@ -6084,24 +5757,1782 @@
               </a:rPr>
               <a:t>6</a:t>
             </a:r>
-            <a:endParaRPr lang="en-US" sz="950" dirty="0"/>
-          </a:p>
-        </p:txBody>
-      </p:sp>
-      <p:sp>
-        <p:nvSpPr>
-          <p:cNvPr id="9" name="Shape 7"/>
-          <p:cNvSpPr/>
-          <p:nvPr/>
-        </p:nvSpPr>
-        <p:spPr>
-          <a:xfrm>
-            <a:off x="658368" y="1645920"/>
-            <a:ext cx="5413248" cy="1627632"/>
+            <a:endParaRPr lang="en-US" sz="900" dirty="0"/>
+          </a:p>
+        </p:txBody>
+      </p:sp>
+      <p:sp>
+        <p:nvSpPr>
+          <p:cNvPr id="9" name="Text 7"/>
+          <p:cNvSpPr/>
+          <p:nvPr/>
+        </p:nvSpPr>
+        <p:spPr>
+          <a:xfrm>
+            <a:off x="658368" y="1463040"/>
+            <a:ext cx="10698480" cy="310896"/>
+          </a:xfrm>
+          <a:prstGeom prst="rect">
+            <a:avLst/>
+          </a:prstGeom>
+          <a:noFill/>
+          <a:ln/>
+        </p:spPr>
+        <p:txBody>
+          <a:bodyPr wrap="square" lIns="0" tIns="0" rIns="0" bIns="0" rtlCol="0" anchor="ctr">
+            <a:normAutofit/>
+          </a:bodyPr>
+          <a:lstStyle/>
+          <a:p>
+            <a:pPr indent="0" marL="0">
+              <a:buNone/>
+            </a:pPr>
+            <a:r>
+              <a:rPr lang="en-US" sz="1400" dirty="0">
+                <a:solidFill>
+                  <a:srgbClr val="607080"/>
+                </a:solidFill>
+                <a:latin typeface="Aptos" pitchFamily="34" charset="0"/>
+                <a:ea typeface="Aptos" pitchFamily="34" charset="-122"/>
+                <a:cs typeface="Aptos" pitchFamily="34" charset="-120"/>
+              </a:rPr>
+              <a:t>Hier musst du mehr als einen Gedanken verbinden oder das Modell begründet anwenden.</a:t>
+            </a:r>
+            <a:endParaRPr lang="en-US" sz="1400" dirty="0"/>
+          </a:p>
+        </p:txBody>
+      </p:sp>
+      <p:sp>
+        <p:nvSpPr>
+          <p:cNvPr id="10" name="Shape 8"/>
+          <p:cNvSpPr/>
+          <p:nvPr/>
+        </p:nvSpPr>
+        <p:spPr>
+          <a:xfrm>
+            <a:off x="749808" y="1938528"/>
+            <a:ext cx="10607040" cy="1600200"/>
           </a:xfrm>
           <a:prstGeom prst="roundRect">
             <a:avLst>
-              <a:gd name="adj" fmla="val 4494"/>
+              <a:gd name="adj" fmla="val 3429"/>
+            </a:avLst>
+          </a:prstGeom>
+          <a:solidFill>
+            <a:srgbClr val="F2EEF8"/>
+          </a:solidFill>
+          <a:ln w="12700">
+            <a:solidFill>
+              <a:srgbClr val="CDD8E2"/>
+            </a:solidFill>
+            <a:prstDash val="solid"/>
+          </a:ln>
+          <a:effectLst>
+            <a:outerShdw sx="100000" sy="100000" kx="0" ky="0" algn="bl" rotWithShape="0" blurRad="12700" dist="50800" dir="2700000">
+              <a:srgbClr val="A8B8C7">
+                <a:alpha val="11000"/>
+              </a:srgbClr>
+            </a:outerShdw>
+          </a:effectLst>
+        </p:spPr>
+      </p:sp>
+      <p:sp>
+        <p:nvSpPr>
+          <p:cNvPr id="11" name="Shape 9"/>
+          <p:cNvSpPr/>
+          <p:nvPr/>
+        </p:nvSpPr>
+        <p:spPr>
+          <a:xfrm>
+            <a:off x="749808" y="1938528"/>
+            <a:ext cx="68580" cy="1600200"/>
+          </a:xfrm>
+          <a:prstGeom prst="rect">
+            <a:avLst/>
+          </a:prstGeom>
+          <a:solidFill>
+            <a:srgbClr val="735D9B"/>
+          </a:solidFill>
+          <a:ln w="12700">
+            <a:solidFill>
+              <a:srgbClr val="735D9B">
+                <a:alpha val="0"/>
+              </a:srgbClr>
+            </a:solidFill>
+            <a:prstDash val="solid"/>
+          </a:ln>
+        </p:spPr>
+      </p:sp>
+      <p:sp>
+        <p:nvSpPr>
+          <p:cNvPr id="12" name="Text 10"/>
+          <p:cNvSpPr/>
+          <p:nvPr/>
+        </p:nvSpPr>
+        <p:spPr>
+          <a:xfrm>
+            <a:off x="950976" y="2057400"/>
+            <a:ext cx="10259568" cy="310896"/>
+          </a:xfrm>
+          <a:prstGeom prst="rect">
+            <a:avLst/>
+          </a:prstGeom>
+          <a:noFill/>
+          <a:ln/>
+        </p:spPr>
+        <p:txBody>
+          <a:bodyPr wrap="square" lIns="0" tIns="0" rIns="0" bIns="0" rtlCol="0" anchor="t">
+            <a:normAutofit/>
+          </a:bodyPr>
+          <a:lstStyle/>
+          <a:p>
+            <a:pPr indent="0" marL="0">
+              <a:buNone/>
+            </a:pPr>
+            <a:r>
+              <a:rPr lang="en-US" sz="1300" b="1" dirty="0">
+                <a:solidFill>
+                  <a:srgbClr val="17324D"/>
+                </a:solidFill>
+                <a:latin typeface="Aptos" pitchFamily="34" charset="0"/>
+                <a:ea typeface="Aptos" pitchFamily="34" charset="-122"/>
+                <a:cs typeface="Aptos" pitchFamily="34" charset="-120"/>
+              </a:rPr>
+              <a:t>Anwendung / Transfer</a:t>
+            </a:r>
+            <a:endParaRPr lang="en-US" sz="1300" dirty="0"/>
+          </a:p>
+        </p:txBody>
+      </p:sp>
+      <p:sp>
+        <p:nvSpPr>
+          <p:cNvPr id="13" name="Text 11"/>
+          <p:cNvSpPr/>
+          <p:nvPr/>
+        </p:nvSpPr>
+        <p:spPr>
+          <a:xfrm>
+            <a:off x="950976" y="2432304"/>
+            <a:ext cx="10241280" cy="978408"/>
+          </a:xfrm>
+          <a:prstGeom prst="rect">
+            <a:avLst/>
+          </a:prstGeom>
+          <a:noFill/>
+          <a:ln/>
+        </p:spPr>
+        <p:txBody>
+          <a:bodyPr wrap="square" lIns="0" tIns="0" rIns="0" bIns="0" rtlCol="0" anchor="t">
+            <a:normAutofit/>
+          </a:bodyPr>
+          <a:lstStyle/>
+          <a:p>
+            <a:pPr indent="0" marL="0">
+              <a:buNone/>
+            </a:pPr>
+            <a:r>
+              <a:rPr lang="en-US" sz="1500" dirty="0">
+                <a:solidFill>
+                  <a:srgbClr val="203040"/>
+                </a:solidFill>
+                <a:latin typeface="Aptos" pitchFamily="34" charset="0"/>
+                <a:ea typeface="Aptos" pitchFamily="34" charset="-122"/>
+                <a:cs typeface="Aptos" pitchFamily="34" charset="-120"/>
+              </a:rPr>
+              <a:t>Kabelloses Laden: Eine Sendespule erzeugt ein zeitlich veränderliches Magnetfeld. Erkläre, warum in der Empfängerspule eine Spannung entsteht und wovon ihr Betrag qualitativ abhängt.</a:t>
+            </a:r>
+            <a:endParaRPr lang="en-US" sz="1500" dirty="0"/>
+          </a:p>
+        </p:txBody>
+      </p:sp>
+      <p:sp>
+        <p:nvSpPr>
+          <p:cNvPr id="14" name="Shape 12"/>
+          <p:cNvSpPr/>
+          <p:nvPr/>
+        </p:nvSpPr>
+        <p:spPr>
+          <a:xfrm>
+            <a:off x="749808" y="3840480"/>
+            <a:ext cx="10607040" cy="1600200"/>
+          </a:xfrm>
+          <a:prstGeom prst="roundRect">
+            <a:avLst>
+              <a:gd name="adj" fmla="val 3429"/>
+            </a:avLst>
+          </a:prstGeom>
+          <a:solidFill>
+            <a:srgbClr val="EDF5EF"/>
+          </a:solidFill>
+          <a:ln w="12700">
+            <a:solidFill>
+              <a:srgbClr val="CDD8E2"/>
+            </a:solidFill>
+            <a:prstDash val="solid"/>
+          </a:ln>
+          <a:effectLst>
+            <a:outerShdw sx="100000" sy="100000" kx="0" ky="0" algn="bl" rotWithShape="0" blurRad="12700" dist="50800" dir="2700000">
+              <a:srgbClr val="A8B8C7">
+                <a:alpha val="11000"/>
+              </a:srgbClr>
+            </a:outerShdw>
+          </a:effectLst>
+        </p:spPr>
+      </p:sp>
+      <p:sp>
+        <p:nvSpPr>
+          <p:cNvPr id="15" name="Shape 13"/>
+          <p:cNvSpPr/>
+          <p:nvPr/>
+        </p:nvSpPr>
+        <p:spPr>
+          <a:xfrm>
+            <a:off x="749808" y="3840480"/>
+            <a:ext cx="68580" cy="1600200"/>
+          </a:xfrm>
+          <a:prstGeom prst="rect">
+            <a:avLst/>
+          </a:prstGeom>
+          <a:solidFill>
+            <a:srgbClr val="4E7A5A"/>
+          </a:solidFill>
+          <a:ln w="12700">
+            <a:solidFill>
+              <a:srgbClr val="4E7A5A">
+                <a:alpha val="0"/>
+              </a:srgbClr>
+            </a:solidFill>
+            <a:prstDash val="solid"/>
+          </a:ln>
+        </p:spPr>
+      </p:sp>
+      <p:sp>
+        <p:nvSpPr>
+          <p:cNvPr id="16" name="Text 14"/>
+          <p:cNvSpPr/>
+          <p:nvPr/>
+        </p:nvSpPr>
+        <p:spPr>
+          <a:xfrm>
+            <a:off x="950976" y="3959352"/>
+            <a:ext cx="10259568" cy="310896"/>
+          </a:xfrm>
+          <a:prstGeom prst="rect">
+            <a:avLst/>
+          </a:prstGeom>
+          <a:noFill/>
+          <a:ln/>
+        </p:spPr>
+        <p:txBody>
+          <a:bodyPr wrap="square" lIns="0" tIns="0" rIns="0" bIns="0" rtlCol="0" anchor="t">
+            <a:normAutofit/>
+          </a:bodyPr>
+          <a:lstStyle/>
+          <a:p>
+            <a:pPr indent="0" marL="0">
+              <a:buNone/>
+            </a:pPr>
+            <a:r>
+              <a:rPr lang="en-US" sz="1300" b="1" dirty="0">
+                <a:solidFill>
+                  <a:srgbClr val="17324D"/>
+                </a:solidFill>
+                <a:latin typeface="Aptos" pitchFamily="34" charset="0"/>
+                <a:ea typeface="Aptos" pitchFamily="34" charset="-122"/>
+                <a:cs typeface="Aptos" pitchFamily="34" charset="-120"/>
+              </a:rPr>
+              <a:t>Konzeptfrage · Warum?</a:t>
+            </a:r>
+            <a:endParaRPr lang="en-US" sz="1300" dirty="0"/>
+          </a:p>
+        </p:txBody>
+      </p:sp>
+      <p:sp>
+        <p:nvSpPr>
+          <p:cNvPr id="17" name="Text 15"/>
+          <p:cNvSpPr/>
+          <p:nvPr/>
+        </p:nvSpPr>
+        <p:spPr>
+          <a:xfrm>
+            <a:off x="950976" y="4334256"/>
+            <a:ext cx="10241280" cy="978408"/>
+          </a:xfrm>
+          <a:prstGeom prst="rect">
+            <a:avLst/>
+          </a:prstGeom>
+          <a:noFill/>
+          <a:ln/>
+        </p:spPr>
+        <p:txBody>
+          <a:bodyPr wrap="square" lIns="0" tIns="0" rIns="0" bIns="0" rtlCol="0" anchor="t">
+            <a:normAutofit/>
+          </a:bodyPr>
+          <a:lstStyle/>
+          <a:p>
+            <a:pPr indent="0" marL="0">
+              <a:buNone/>
+            </a:pPr>
+            <a:r>
+              <a:rPr lang="en-US" sz="1500" dirty="0">
+                <a:solidFill>
+                  <a:srgbClr val="203040"/>
+                </a:solidFill>
+                <a:latin typeface="Aptos" pitchFamily="34" charset="0"/>
+                <a:ea typeface="Aptos" pitchFamily="34" charset="-122"/>
+                <a:cs typeface="Aptos" pitchFamily="34" charset="-120"/>
+              </a:rPr>
+              <a:t>Warum muss der induzierte Strom nach der Lenzschen Regel der verursachenden Flussänderung entgegenwirken? Begründe mit Energieerhaltung.</a:t>
+            </a:r>
+            <a:endParaRPr lang="en-US" sz="1500" dirty="0"/>
+          </a:p>
+        </p:txBody>
+      </p:sp>
+      <p:sp>
+        <p:nvSpPr>
+          <p:cNvPr id="18" name="Shape 16"/>
+          <p:cNvSpPr/>
+          <p:nvPr/>
+        </p:nvSpPr>
+        <p:spPr>
+          <a:xfrm>
+            <a:off x="2926080" y="5833872"/>
+            <a:ext cx="6336792" cy="402336"/>
+          </a:xfrm>
+          <a:prstGeom prst="roundRect">
+            <a:avLst>
+              <a:gd name="adj" fmla="val 11364"/>
+            </a:avLst>
+          </a:prstGeom>
+          <a:solidFill>
+            <a:srgbClr val="FFFFFF"/>
+          </a:solidFill>
+          <a:ln w="12700">
+            <a:solidFill>
+              <a:srgbClr val="CDD8E2"/>
+            </a:solidFill>
+            <a:prstDash val="solid"/>
+          </a:ln>
+        </p:spPr>
+      </p:sp>
+      <p:sp>
+        <p:nvSpPr>
+          <p:cNvPr id="19" name="Text 17"/>
+          <p:cNvSpPr/>
+          <p:nvPr/>
+        </p:nvSpPr>
+        <p:spPr>
+          <a:xfrm>
+            <a:off x="3090672" y="5925312"/>
+            <a:ext cx="5989320" cy="182880"/>
+          </a:xfrm>
+          <a:prstGeom prst="rect">
+            <a:avLst/>
+          </a:prstGeom>
+          <a:noFill/>
+          <a:ln/>
+        </p:spPr>
+        <p:txBody>
+          <a:bodyPr wrap="square" lIns="0" tIns="0" rIns="0" bIns="0" rtlCol="0" anchor="ctr">
+            <a:normAutofit/>
+          </a:bodyPr>
+          <a:lstStyle/>
+          <a:p>
+            <a:pPr algn="ctr" indent="0" marL="0">
+              <a:buNone/>
+            </a:pPr>
+            <a:r>
+              <a:rPr lang="en-US" sz="1090" b="1" dirty="0">
+                <a:solidFill>
+                  <a:srgbClr val="17324D"/>
+                </a:solidFill>
+                <a:latin typeface="Aptos" pitchFamily="34" charset="0"/>
+                <a:ea typeface="Aptos" pitchFamily="34" charset="-122"/>
+                <a:cs typeface="Aptos" pitchFamily="34" charset="-120"/>
+              </a:rPr>
+              <a:t>Strategie: Gegeben → Gesucht → Modell/Formel → Ergebnis → Plausibilität</a:t>
+            </a:r>
+            <a:endParaRPr lang="en-US" sz="1090" dirty="0"/>
+          </a:p>
+        </p:txBody>
+      </p:sp>
+    </p:spTree>
+  </p:cSld>
+  <p:clrMapOvr>
+    <a:masterClrMapping/>
+  </p:clrMapOvr>
+</p:sld>
+</file>
+
+<file path=ppt/slides/slide7.xml><?xml version="1.0" encoding="utf-8"?>
+<p:sld xmlns:a="http://schemas.openxmlformats.org/drawingml/2006/main" xmlns:r="http://schemas.openxmlformats.org/officeDocument/2006/relationships" xmlns:p="http://schemas.openxmlformats.org/presentationml/2006/main">
+  <p:cSld name="Slide 7">
+    <p:bg>
+      <p:bgPr>
+        <a:solidFill>
+          <a:srgbClr val="F7FAFC"/>
+        </a:solidFill>
+      </p:bgPr>
+    </p:bg>
+    <p:spTree>
+      <p:nvGrpSpPr>
+        <p:cNvPr id="1" name=""/>
+        <p:cNvGrpSpPr/>
+        <p:nvPr/>
+      </p:nvGrpSpPr>
+      <p:grpSpPr>
+        <a:xfrm>
+          <a:off x="0" y="0"/>
+          <a:ext cx="0" cy="0"/>
+          <a:chOff x="0" y="0"/>
+          <a:chExt cx="0" cy="0"/>
+        </a:xfrm>
+      </p:grpSpPr>
+      <p:sp>
+        <p:nvSpPr>
+          <p:cNvPr id="2" name="Shape 0"/>
+          <p:cNvSpPr/>
+          <p:nvPr/>
+        </p:nvSpPr>
+        <p:spPr>
+          <a:xfrm>
+            <a:off x="0" y="0"/>
+            <a:ext cx="12191695" cy="137160"/>
+          </a:xfrm>
+          <a:prstGeom prst="rect">
+            <a:avLst/>
+          </a:prstGeom>
+          <a:solidFill>
+            <a:srgbClr val="2F6FAD"/>
+          </a:solidFill>
+          <a:ln w="12700">
+            <a:solidFill>
+              <a:srgbClr val="2F6FAD">
+                <a:alpha val="0"/>
+              </a:srgbClr>
+            </a:solidFill>
+            <a:prstDash val="solid"/>
+          </a:ln>
+        </p:spPr>
+      </p:sp>
+      <p:sp>
+        <p:nvSpPr>
+          <p:cNvPr id="3" name="Text 1"/>
+          <p:cNvSpPr/>
+          <p:nvPr/>
+        </p:nvSpPr>
+        <p:spPr>
+          <a:xfrm>
+            <a:off x="566928" y="301752"/>
+            <a:ext cx="3383280" cy="237744"/>
+          </a:xfrm>
+          <a:prstGeom prst="rect">
+            <a:avLst/>
+          </a:prstGeom>
+          <a:noFill/>
+          <a:ln/>
+        </p:spPr>
+        <p:txBody>
+          <a:bodyPr wrap="square" lIns="0" tIns="0" rIns="0" bIns="0" rtlCol="0" anchor="ctr">
+            <a:normAutofit/>
+          </a:bodyPr>
+          <a:lstStyle/>
+          <a:p>
+            <a:pPr indent="0" marL="0">
+              <a:buNone/>
+            </a:pPr>
+            <a:r>
+              <a:rPr lang="en-US" sz="1000" b="1" spc="120" kern="0" dirty="0">
+                <a:solidFill>
+                  <a:srgbClr val="2F6FAD"/>
+                </a:solidFill>
+                <a:latin typeface="Aptos" pitchFamily="34" charset="0"/>
+                <a:ea typeface="Aptos" pitchFamily="34" charset="-122"/>
+                <a:cs typeface="Aptos" pitchFamily="34" charset="-120"/>
+              </a:rPr>
+              <a:t>STUFE 5 · DARSTELLEN</a:t>
+            </a:r>
+            <a:endParaRPr lang="en-US" sz="1000" dirty="0"/>
+          </a:p>
+        </p:txBody>
+      </p:sp>
+      <p:sp>
+        <p:nvSpPr>
+          <p:cNvPr id="4" name="Text 2"/>
+          <p:cNvSpPr/>
+          <p:nvPr/>
+        </p:nvSpPr>
+        <p:spPr>
+          <a:xfrm>
+            <a:off x="566928" y="621792"/>
+            <a:ext cx="10698480" cy="548640"/>
+          </a:xfrm>
+          <a:prstGeom prst="rect">
+            <a:avLst/>
+          </a:prstGeom>
+          <a:noFill/>
+          <a:ln/>
+        </p:spPr>
+        <p:txBody>
+          <a:bodyPr wrap="square" lIns="0" tIns="0" rIns="0" bIns="0" rtlCol="0" anchor="t">
+            <a:normAutofit/>
+          </a:bodyPr>
+          <a:lstStyle/>
+          <a:p>
+            <a:pPr indent="0" marL="0">
+              <a:buNone/>
+            </a:pPr>
+            <a:r>
+              <a:rPr lang="en-US" sz="2700" b="1" dirty="0">
+                <a:solidFill>
+                  <a:srgbClr val="17324D"/>
+                </a:solidFill>
+                <a:latin typeface="Aptos" pitchFamily="34" charset="0"/>
+                <a:ea typeface="Aptos" pitchFamily="34" charset="-122"/>
+                <a:cs typeface="Aptos" pitchFamily="34" charset="-120"/>
+              </a:rPr>
+              <a:t>Gekreuzte elektrische und magnetische Felder</a:t>
+            </a:r>
+            <a:endParaRPr lang="en-US" sz="2700" dirty="0"/>
+          </a:p>
+        </p:txBody>
+      </p:sp>
+      <p:sp>
+        <p:nvSpPr>
+          <p:cNvPr id="5" name="Text 3"/>
+          <p:cNvSpPr/>
+          <p:nvPr/>
+        </p:nvSpPr>
+        <p:spPr>
+          <a:xfrm>
+            <a:off x="9509760" y="310896"/>
+            <a:ext cx="2057400" cy="219456"/>
+          </a:xfrm>
+          <a:prstGeom prst="rect">
+            <a:avLst/>
+          </a:prstGeom>
+          <a:noFill/>
+          <a:ln/>
+        </p:spPr>
+        <p:txBody>
+          <a:bodyPr wrap="square" lIns="0" tIns="0" rIns="0" bIns="0" rtlCol="0" anchor="ctr">
+            <a:normAutofit/>
+          </a:bodyPr>
+          <a:lstStyle/>
+          <a:p>
+            <a:pPr algn="r" indent="0" marL="0">
+              <a:buNone/>
+            </a:pPr>
+            <a:r>
+              <a:rPr lang="en-US" sz="1020" b="1" dirty="0">
+                <a:solidFill>
+                  <a:srgbClr val="607080"/>
+                </a:solidFill>
+                <a:latin typeface="Aptos" pitchFamily="34" charset="0"/>
+                <a:ea typeface="Aptos" pitchFamily="34" charset="-122"/>
+                <a:cs typeface="Aptos" pitchFamily="34" charset="-120"/>
+              </a:rPr>
+              <a:t>Q1/Q2 Leistungskurs</a:t>
+            </a:r>
+            <a:endParaRPr lang="en-US" sz="1020" dirty="0"/>
+          </a:p>
+        </p:txBody>
+      </p:sp>
+      <p:sp>
+        <p:nvSpPr>
+          <p:cNvPr id="6" name="Shape 4"/>
+          <p:cNvSpPr/>
+          <p:nvPr/>
+        </p:nvSpPr>
+        <p:spPr>
+          <a:xfrm>
+            <a:off x="566928" y="1280160"/>
+            <a:ext cx="11045952" cy="0"/>
+          </a:xfrm>
+          <a:prstGeom prst="line">
+            <a:avLst/>
+          </a:prstGeom>
+          <a:noFill/>
+          <a:ln w="12700">
+            <a:solidFill>
+              <a:srgbClr val="CDD8E2"/>
+            </a:solidFill>
+            <a:prstDash val="solid"/>
+          </a:ln>
+        </p:spPr>
+      </p:sp>
+      <p:sp>
+        <p:nvSpPr>
+          <p:cNvPr id="7" name="Text 5"/>
+          <p:cNvSpPr/>
+          <p:nvPr/>
+        </p:nvSpPr>
+        <p:spPr>
+          <a:xfrm>
+            <a:off x="566928" y="6519672"/>
+            <a:ext cx="5212080" cy="182880"/>
+          </a:xfrm>
+          <a:prstGeom prst="rect">
+            <a:avLst/>
+          </a:prstGeom>
+          <a:noFill/>
+          <a:ln/>
+        </p:spPr>
+        <p:txBody>
+          <a:bodyPr wrap="square" lIns="0" tIns="0" rIns="0" bIns="0" rtlCol="0" anchor="ctr">
+            <a:normAutofit/>
+          </a:bodyPr>
+          <a:lstStyle/>
+          <a:p>
+            <a:pPr indent="0" marL="0">
+              <a:buNone/>
+            </a:pPr>
+            <a:r>
+              <a:rPr lang="en-US" sz="900" dirty="0">
+                <a:solidFill>
+                  <a:srgbClr val="607080"/>
+                </a:solidFill>
+                <a:latin typeface="Aptos" pitchFamily="34" charset="0"/>
+                <a:ea typeface="Aptos" pitchFamily="34" charset="-122"/>
+                <a:cs typeface="Aptos" pitchFamily="34" charset="-120"/>
+              </a:rPr>
+              <a:t>Fortlaufende Wiederholung · Physik NRW</a:t>
+            </a:r>
+            <a:endParaRPr lang="en-US" sz="900" dirty="0"/>
+          </a:p>
+        </p:txBody>
+      </p:sp>
+      <p:sp>
+        <p:nvSpPr>
+          <p:cNvPr id="8" name="Text 6"/>
+          <p:cNvSpPr/>
+          <p:nvPr/>
+        </p:nvSpPr>
+        <p:spPr>
+          <a:xfrm>
+            <a:off x="11137392" y="6519672"/>
+            <a:ext cx="457200" cy="182880"/>
+          </a:xfrm>
+          <a:prstGeom prst="rect">
+            <a:avLst/>
+          </a:prstGeom>
+          <a:noFill/>
+          <a:ln/>
+        </p:spPr>
+        <p:txBody>
+          <a:bodyPr wrap="square" lIns="0" tIns="0" rIns="0" bIns="0" rtlCol="0" anchor="ctr">
+            <a:normAutofit/>
+          </a:bodyPr>
+          <a:lstStyle/>
+          <a:p>
+            <a:pPr algn="r" indent="0" marL="0">
+              <a:buNone/>
+            </a:pPr>
+            <a:r>
+              <a:rPr lang="en-US" sz="900" dirty="0">
+                <a:solidFill>
+                  <a:srgbClr val="607080"/>
+                </a:solidFill>
+                <a:latin typeface="Aptos" pitchFamily="34" charset="0"/>
+                <a:ea typeface="Aptos" pitchFamily="34" charset="-122"/>
+                <a:cs typeface="Aptos" pitchFamily="34" charset="-120"/>
+              </a:rPr>
+              <a:t>7</a:t>
+            </a:r>
+            <a:endParaRPr lang="en-US" sz="900" dirty="0"/>
+          </a:p>
+        </p:txBody>
+      </p:sp>
+      <p:sp>
+        <p:nvSpPr>
+          <p:cNvPr id="9" name="Shape 7"/>
+          <p:cNvSpPr/>
+          <p:nvPr/>
+        </p:nvSpPr>
+        <p:spPr>
+          <a:xfrm>
+            <a:off x="658368" y="1572768"/>
+            <a:ext cx="7543800" cy="4526280"/>
+          </a:xfrm>
+          <a:prstGeom prst="roundRect">
+            <a:avLst>
+              <a:gd name="adj" fmla="val 1010"/>
+            </a:avLst>
+          </a:prstGeom>
+          <a:solidFill>
+            <a:srgbClr val="FFFFFF"/>
+          </a:solidFill>
+          <a:ln w="12700">
+            <a:solidFill>
+              <a:srgbClr val="CDD8E2"/>
+            </a:solidFill>
+            <a:prstDash val="solid"/>
+          </a:ln>
+        </p:spPr>
+      </p:sp>
+      <p:sp>
+        <p:nvSpPr>
+          <p:cNvPr id="10" name="Shape 8"/>
+          <p:cNvSpPr/>
+          <p:nvPr/>
+        </p:nvSpPr>
+        <p:spPr>
+          <a:xfrm>
+            <a:off x="1353312" y="2258568"/>
+            <a:ext cx="6153912" cy="109728"/>
+          </a:xfrm>
+          <a:prstGeom prst="rect">
+            <a:avLst/>
+          </a:prstGeom>
+          <a:solidFill>
+            <a:srgbClr val="B55350"/>
+          </a:solidFill>
+          <a:ln w="12700">
+            <a:solidFill>
+              <a:srgbClr val="B55350"/>
+            </a:solidFill>
+            <a:prstDash val="solid"/>
+          </a:ln>
+        </p:spPr>
+      </p:sp>
+      <p:sp>
+        <p:nvSpPr>
+          <p:cNvPr id="11" name="Shape 9"/>
+          <p:cNvSpPr/>
+          <p:nvPr/>
+        </p:nvSpPr>
+        <p:spPr>
+          <a:xfrm>
+            <a:off x="1353312" y="4727448"/>
+            <a:ext cx="6153912" cy="109728"/>
+          </a:xfrm>
+          <a:prstGeom prst="rect">
+            <a:avLst/>
+          </a:prstGeom>
+          <a:solidFill>
+            <a:srgbClr val="2F6FAD"/>
+          </a:solidFill>
+          <a:ln w="12700">
+            <a:solidFill>
+              <a:srgbClr val="2F6FAD"/>
+            </a:solidFill>
+            <a:prstDash val="solid"/>
+          </a:ln>
+        </p:spPr>
+      </p:sp>
+      <p:sp>
+        <p:nvSpPr>
+          <p:cNvPr id="12" name="Text 10"/>
+          <p:cNvSpPr/>
+          <p:nvPr/>
+        </p:nvSpPr>
+        <p:spPr>
+          <a:xfrm>
+            <a:off x="1033272" y="2194560"/>
+            <a:ext cx="228600" cy="228600"/>
+          </a:xfrm>
+          <a:prstGeom prst="rect">
+            <a:avLst/>
+          </a:prstGeom>
+          <a:noFill/>
+          <a:ln/>
+        </p:spPr>
+        <p:txBody>
+          <a:bodyPr wrap="square" lIns="0" tIns="0" rIns="0" bIns="0" rtlCol="0" anchor="ctr">
+            <a:normAutofit/>
+          </a:bodyPr>
+          <a:lstStyle/>
+          <a:p>
+            <a:pPr indent="0" marL="0">
+              <a:buNone/>
+            </a:pPr>
+            <a:r>
+              <a:rPr lang="en-US" sz="1600" b="1" dirty="0">
+                <a:solidFill>
+                  <a:srgbClr val="B55350"/>
+                </a:solidFill>
+                <a:latin typeface="Aptos" pitchFamily="34" charset="0"/>
+                <a:ea typeface="Aptos" pitchFamily="34" charset="-122"/>
+                <a:cs typeface="Aptos" pitchFamily="34" charset="-120"/>
+              </a:rPr>
+              <a:t>+</a:t>
+            </a:r>
+            <a:endParaRPr lang="en-US" sz="1600" dirty="0"/>
+          </a:p>
+        </p:txBody>
+      </p:sp>
+      <p:sp>
+        <p:nvSpPr>
+          <p:cNvPr id="13" name="Text 11"/>
+          <p:cNvSpPr/>
+          <p:nvPr/>
+        </p:nvSpPr>
+        <p:spPr>
+          <a:xfrm>
+            <a:off x="1033272" y="4663440"/>
+            <a:ext cx="228600" cy="228600"/>
+          </a:xfrm>
+          <a:prstGeom prst="rect">
+            <a:avLst/>
+          </a:prstGeom>
+          <a:noFill/>
+          <a:ln/>
+        </p:spPr>
+        <p:txBody>
+          <a:bodyPr wrap="square" lIns="0" tIns="0" rIns="0" bIns="0" rtlCol="0" anchor="ctr">
+            <a:normAutofit/>
+          </a:bodyPr>
+          <a:lstStyle/>
+          <a:p>
+            <a:pPr indent="0" marL="0">
+              <a:buNone/>
+            </a:pPr>
+            <a:r>
+              <a:rPr lang="en-US" sz="1600" b="1" dirty="0">
+                <a:solidFill>
+                  <a:srgbClr val="2F6FAD"/>
+                </a:solidFill>
+                <a:latin typeface="Aptos" pitchFamily="34" charset="0"/>
+                <a:ea typeface="Aptos" pitchFamily="34" charset="-122"/>
+                <a:cs typeface="Aptos" pitchFamily="34" charset="-120"/>
+              </a:rPr>
+              <a:t>−</a:t>
+            </a:r>
+            <a:endParaRPr lang="en-US" sz="1600" dirty="0"/>
+          </a:p>
+        </p:txBody>
+      </p:sp>
+      <p:sp>
+        <p:nvSpPr>
+          <p:cNvPr id="14" name="Shape 12"/>
+          <p:cNvSpPr/>
+          <p:nvPr/>
+        </p:nvSpPr>
+        <p:spPr>
+          <a:xfrm>
+            <a:off x="1947672" y="2505456"/>
+            <a:ext cx="0" cy="2084832"/>
+          </a:xfrm>
+          <a:prstGeom prst="line">
+            <a:avLst/>
+          </a:prstGeom>
+          <a:noFill/>
+          <a:ln w="16510">
+            <a:solidFill>
+              <a:srgbClr val="B55350"/>
+            </a:solidFill>
+            <a:prstDash val="solid"/>
+            <a:tailEnd type="triangle"/>
+          </a:ln>
+        </p:spPr>
+      </p:sp>
+      <p:sp>
+        <p:nvSpPr>
+          <p:cNvPr id="15" name="Shape 13"/>
+          <p:cNvSpPr/>
+          <p:nvPr/>
+        </p:nvSpPr>
+        <p:spPr>
+          <a:xfrm>
+            <a:off x="3090672" y="2505456"/>
+            <a:ext cx="0" cy="2084832"/>
+          </a:xfrm>
+          <a:prstGeom prst="line">
+            <a:avLst/>
+          </a:prstGeom>
+          <a:noFill/>
+          <a:ln w="16510">
+            <a:solidFill>
+              <a:srgbClr val="B55350"/>
+            </a:solidFill>
+            <a:prstDash val="solid"/>
+            <a:tailEnd type="triangle"/>
+          </a:ln>
+        </p:spPr>
+      </p:sp>
+      <p:sp>
+        <p:nvSpPr>
+          <p:cNvPr id="16" name="Shape 14"/>
+          <p:cNvSpPr/>
+          <p:nvPr/>
+        </p:nvSpPr>
+        <p:spPr>
+          <a:xfrm>
+            <a:off x="4233672" y="2505456"/>
+            <a:ext cx="0" cy="2084832"/>
+          </a:xfrm>
+          <a:prstGeom prst="line">
+            <a:avLst/>
+          </a:prstGeom>
+          <a:noFill/>
+          <a:ln w="16510">
+            <a:solidFill>
+              <a:srgbClr val="B55350"/>
+            </a:solidFill>
+            <a:prstDash val="solid"/>
+            <a:tailEnd type="triangle"/>
+          </a:ln>
+        </p:spPr>
+      </p:sp>
+      <p:sp>
+        <p:nvSpPr>
+          <p:cNvPr id="17" name="Shape 15"/>
+          <p:cNvSpPr/>
+          <p:nvPr/>
+        </p:nvSpPr>
+        <p:spPr>
+          <a:xfrm>
+            <a:off x="5376672" y="2505456"/>
+            <a:ext cx="0" cy="2084832"/>
+          </a:xfrm>
+          <a:prstGeom prst="line">
+            <a:avLst/>
+          </a:prstGeom>
+          <a:noFill/>
+          <a:ln w="16510">
+            <a:solidFill>
+              <a:srgbClr val="B55350"/>
+            </a:solidFill>
+            <a:prstDash val="solid"/>
+            <a:tailEnd type="triangle"/>
+          </a:ln>
+        </p:spPr>
+      </p:sp>
+      <p:sp>
+        <p:nvSpPr>
+          <p:cNvPr id="18" name="Shape 16"/>
+          <p:cNvSpPr/>
+          <p:nvPr/>
+        </p:nvSpPr>
+        <p:spPr>
+          <a:xfrm>
+            <a:off x="1618488" y="2633472"/>
+            <a:ext cx="109728" cy="109728"/>
+          </a:xfrm>
+          <a:prstGeom prst="line">
+            <a:avLst/>
+          </a:prstGeom>
+          <a:noFill/>
+          <a:ln w="12700">
+            <a:solidFill>
+              <a:srgbClr val="2C7A7B"/>
+            </a:solidFill>
+            <a:prstDash val="solid"/>
+          </a:ln>
+        </p:spPr>
+      </p:sp>
+      <p:sp>
+        <p:nvSpPr>
+          <p:cNvPr id="19" name="Shape 17"/>
+          <p:cNvSpPr/>
+          <p:nvPr/>
+        </p:nvSpPr>
+        <p:spPr>
+          <a:xfrm>
+            <a:off x="1728216" y="2633472"/>
+            <a:ext cx="-109728" cy="109728"/>
+          </a:xfrm>
+          <a:prstGeom prst="line">
+            <a:avLst/>
+          </a:prstGeom>
+          <a:noFill/>
+          <a:ln w="12700">
+            <a:solidFill>
+              <a:srgbClr val="2C7A7B"/>
+            </a:solidFill>
+            <a:prstDash val="solid"/>
+          </a:ln>
+        </p:spPr>
+      </p:sp>
+      <p:sp>
+        <p:nvSpPr>
+          <p:cNvPr id="20" name="Shape 18"/>
+          <p:cNvSpPr/>
+          <p:nvPr/>
+        </p:nvSpPr>
+        <p:spPr>
+          <a:xfrm>
+            <a:off x="2624328" y="2633472"/>
+            <a:ext cx="109728" cy="109728"/>
+          </a:xfrm>
+          <a:prstGeom prst="line">
+            <a:avLst/>
+          </a:prstGeom>
+          <a:noFill/>
+          <a:ln w="12700">
+            <a:solidFill>
+              <a:srgbClr val="2C7A7B"/>
+            </a:solidFill>
+            <a:prstDash val="solid"/>
+          </a:ln>
+        </p:spPr>
+      </p:sp>
+      <p:sp>
+        <p:nvSpPr>
+          <p:cNvPr id="21" name="Shape 19"/>
+          <p:cNvSpPr/>
+          <p:nvPr/>
+        </p:nvSpPr>
+        <p:spPr>
+          <a:xfrm>
+            <a:off x="2734056" y="2633472"/>
+            <a:ext cx="-109728" cy="109728"/>
+          </a:xfrm>
+          <a:prstGeom prst="line">
+            <a:avLst/>
+          </a:prstGeom>
+          <a:noFill/>
+          <a:ln w="12700">
+            <a:solidFill>
+              <a:srgbClr val="2C7A7B"/>
+            </a:solidFill>
+            <a:prstDash val="solid"/>
+          </a:ln>
+        </p:spPr>
+      </p:sp>
+      <p:sp>
+        <p:nvSpPr>
+          <p:cNvPr id="22" name="Shape 20"/>
+          <p:cNvSpPr/>
+          <p:nvPr/>
+        </p:nvSpPr>
+        <p:spPr>
+          <a:xfrm>
+            <a:off x="3630168" y="2633472"/>
+            <a:ext cx="109728" cy="109728"/>
+          </a:xfrm>
+          <a:prstGeom prst="line">
+            <a:avLst/>
+          </a:prstGeom>
+          <a:noFill/>
+          <a:ln w="12700">
+            <a:solidFill>
+              <a:srgbClr val="2C7A7B"/>
+            </a:solidFill>
+            <a:prstDash val="solid"/>
+          </a:ln>
+        </p:spPr>
+      </p:sp>
+      <p:sp>
+        <p:nvSpPr>
+          <p:cNvPr id="23" name="Shape 21"/>
+          <p:cNvSpPr/>
+          <p:nvPr/>
+        </p:nvSpPr>
+        <p:spPr>
+          <a:xfrm>
+            <a:off x="3739896" y="2633472"/>
+            <a:ext cx="-109728" cy="109728"/>
+          </a:xfrm>
+          <a:prstGeom prst="line">
+            <a:avLst/>
+          </a:prstGeom>
+          <a:noFill/>
+          <a:ln w="12700">
+            <a:solidFill>
+              <a:srgbClr val="2C7A7B"/>
+            </a:solidFill>
+            <a:prstDash val="solid"/>
+          </a:ln>
+        </p:spPr>
+      </p:sp>
+      <p:sp>
+        <p:nvSpPr>
+          <p:cNvPr id="24" name="Shape 22"/>
+          <p:cNvSpPr/>
+          <p:nvPr/>
+        </p:nvSpPr>
+        <p:spPr>
+          <a:xfrm>
+            <a:off x="4636008" y="2633472"/>
+            <a:ext cx="109728" cy="109728"/>
+          </a:xfrm>
+          <a:prstGeom prst="line">
+            <a:avLst/>
+          </a:prstGeom>
+          <a:noFill/>
+          <a:ln w="12700">
+            <a:solidFill>
+              <a:srgbClr val="2C7A7B"/>
+            </a:solidFill>
+            <a:prstDash val="solid"/>
+          </a:ln>
+        </p:spPr>
+      </p:sp>
+      <p:sp>
+        <p:nvSpPr>
+          <p:cNvPr id="25" name="Shape 23"/>
+          <p:cNvSpPr/>
+          <p:nvPr/>
+        </p:nvSpPr>
+        <p:spPr>
+          <a:xfrm>
+            <a:off x="4745736" y="2633472"/>
+            <a:ext cx="-109728" cy="109728"/>
+          </a:xfrm>
+          <a:prstGeom prst="line">
+            <a:avLst/>
+          </a:prstGeom>
+          <a:noFill/>
+          <a:ln w="12700">
+            <a:solidFill>
+              <a:srgbClr val="2C7A7B"/>
+            </a:solidFill>
+            <a:prstDash val="solid"/>
+          </a:ln>
+        </p:spPr>
+      </p:sp>
+      <p:sp>
+        <p:nvSpPr>
+          <p:cNvPr id="26" name="Shape 24"/>
+          <p:cNvSpPr/>
+          <p:nvPr/>
+        </p:nvSpPr>
+        <p:spPr>
+          <a:xfrm>
+            <a:off x="5641848" y="2633472"/>
+            <a:ext cx="109728" cy="109728"/>
+          </a:xfrm>
+          <a:prstGeom prst="line">
+            <a:avLst/>
+          </a:prstGeom>
+          <a:noFill/>
+          <a:ln w="12700">
+            <a:solidFill>
+              <a:srgbClr val="2C7A7B"/>
+            </a:solidFill>
+            <a:prstDash val="solid"/>
+          </a:ln>
+        </p:spPr>
+      </p:sp>
+      <p:sp>
+        <p:nvSpPr>
+          <p:cNvPr id="27" name="Shape 25"/>
+          <p:cNvSpPr/>
+          <p:nvPr/>
+        </p:nvSpPr>
+        <p:spPr>
+          <a:xfrm>
+            <a:off x="5751576" y="2633472"/>
+            <a:ext cx="-109728" cy="109728"/>
+          </a:xfrm>
+          <a:prstGeom prst="line">
+            <a:avLst/>
+          </a:prstGeom>
+          <a:noFill/>
+          <a:ln w="12700">
+            <a:solidFill>
+              <a:srgbClr val="2C7A7B"/>
+            </a:solidFill>
+            <a:prstDash val="solid"/>
+          </a:ln>
+        </p:spPr>
+      </p:sp>
+      <p:sp>
+        <p:nvSpPr>
+          <p:cNvPr id="28" name="Shape 26"/>
+          <p:cNvSpPr/>
+          <p:nvPr/>
+        </p:nvSpPr>
+        <p:spPr>
+          <a:xfrm>
+            <a:off x="1618488" y="3227832"/>
+            <a:ext cx="109728" cy="109728"/>
+          </a:xfrm>
+          <a:prstGeom prst="line">
+            <a:avLst/>
+          </a:prstGeom>
+          <a:noFill/>
+          <a:ln w="12700">
+            <a:solidFill>
+              <a:srgbClr val="2C7A7B"/>
+            </a:solidFill>
+            <a:prstDash val="solid"/>
+          </a:ln>
+        </p:spPr>
+      </p:sp>
+      <p:sp>
+        <p:nvSpPr>
+          <p:cNvPr id="29" name="Shape 27"/>
+          <p:cNvSpPr/>
+          <p:nvPr/>
+        </p:nvSpPr>
+        <p:spPr>
+          <a:xfrm>
+            <a:off x="1728216" y="3227832"/>
+            <a:ext cx="-109728" cy="109728"/>
+          </a:xfrm>
+          <a:prstGeom prst="line">
+            <a:avLst/>
+          </a:prstGeom>
+          <a:noFill/>
+          <a:ln w="12700">
+            <a:solidFill>
+              <a:srgbClr val="2C7A7B"/>
+            </a:solidFill>
+            <a:prstDash val="solid"/>
+          </a:ln>
+        </p:spPr>
+      </p:sp>
+      <p:sp>
+        <p:nvSpPr>
+          <p:cNvPr id="30" name="Shape 28"/>
+          <p:cNvSpPr/>
+          <p:nvPr/>
+        </p:nvSpPr>
+        <p:spPr>
+          <a:xfrm>
+            <a:off x="2624328" y="3227832"/>
+            <a:ext cx="109728" cy="109728"/>
+          </a:xfrm>
+          <a:prstGeom prst="line">
+            <a:avLst/>
+          </a:prstGeom>
+          <a:noFill/>
+          <a:ln w="12700">
+            <a:solidFill>
+              <a:srgbClr val="2C7A7B"/>
+            </a:solidFill>
+            <a:prstDash val="solid"/>
+          </a:ln>
+        </p:spPr>
+      </p:sp>
+      <p:sp>
+        <p:nvSpPr>
+          <p:cNvPr id="31" name="Shape 29"/>
+          <p:cNvSpPr/>
+          <p:nvPr/>
+        </p:nvSpPr>
+        <p:spPr>
+          <a:xfrm>
+            <a:off x="2734056" y="3227832"/>
+            <a:ext cx="-109728" cy="109728"/>
+          </a:xfrm>
+          <a:prstGeom prst="line">
+            <a:avLst/>
+          </a:prstGeom>
+          <a:noFill/>
+          <a:ln w="12700">
+            <a:solidFill>
+              <a:srgbClr val="2C7A7B"/>
+            </a:solidFill>
+            <a:prstDash val="solid"/>
+          </a:ln>
+        </p:spPr>
+      </p:sp>
+      <p:sp>
+        <p:nvSpPr>
+          <p:cNvPr id="32" name="Shape 30"/>
+          <p:cNvSpPr/>
+          <p:nvPr/>
+        </p:nvSpPr>
+        <p:spPr>
+          <a:xfrm>
+            <a:off x="3630168" y="3227832"/>
+            <a:ext cx="109728" cy="109728"/>
+          </a:xfrm>
+          <a:prstGeom prst="line">
+            <a:avLst/>
+          </a:prstGeom>
+          <a:noFill/>
+          <a:ln w="12700">
+            <a:solidFill>
+              <a:srgbClr val="2C7A7B"/>
+            </a:solidFill>
+            <a:prstDash val="solid"/>
+          </a:ln>
+        </p:spPr>
+      </p:sp>
+      <p:sp>
+        <p:nvSpPr>
+          <p:cNvPr id="33" name="Shape 31"/>
+          <p:cNvSpPr/>
+          <p:nvPr/>
+        </p:nvSpPr>
+        <p:spPr>
+          <a:xfrm>
+            <a:off x="3739896" y="3227832"/>
+            <a:ext cx="-109728" cy="109728"/>
+          </a:xfrm>
+          <a:prstGeom prst="line">
+            <a:avLst/>
+          </a:prstGeom>
+          <a:noFill/>
+          <a:ln w="12700">
+            <a:solidFill>
+              <a:srgbClr val="2C7A7B"/>
+            </a:solidFill>
+            <a:prstDash val="solid"/>
+          </a:ln>
+        </p:spPr>
+      </p:sp>
+      <p:sp>
+        <p:nvSpPr>
+          <p:cNvPr id="34" name="Shape 32"/>
+          <p:cNvSpPr/>
+          <p:nvPr/>
+        </p:nvSpPr>
+        <p:spPr>
+          <a:xfrm>
+            <a:off x="4636008" y="3227832"/>
+            <a:ext cx="109728" cy="109728"/>
+          </a:xfrm>
+          <a:prstGeom prst="line">
+            <a:avLst/>
+          </a:prstGeom>
+          <a:noFill/>
+          <a:ln w="12700">
+            <a:solidFill>
+              <a:srgbClr val="2C7A7B"/>
+            </a:solidFill>
+            <a:prstDash val="solid"/>
+          </a:ln>
+        </p:spPr>
+      </p:sp>
+      <p:sp>
+        <p:nvSpPr>
+          <p:cNvPr id="35" name="Shape 33"/>
+          <p:cNvSpPr/>
+          <p:nvPr/>
+        </p:nvSpPr>
+        <p:spPr>
+          <a:xfrm>
+            <a:off x="4745736" y="3227832"/>
+            <a:ext cx="-109728" cy="109728"/>
+          </a:xfrm>
+          <a:prstGeom prst="line">
+            <a:avLst/>
+          </a:prstGeom>
+          <a:noFill/>
+          <a:ln w="12700">
+            <a:solidFill>
+              <a:srgbClr val="2C7A7B"/>
+            </a:solidFill>
+            <a:prstDash val="solid"/>
+          </a:ln>
+        </p:spPr>
+      </p:sp>
+      <p:sp>
+        <p:nvSpPr>
+          <p:cNvPr id="36" name="Shape 34"/>
+          <p:cNvSpPr/>
+          <p:nvPr/>
+        </p:nvSpPr>
+        <p:spPr>
+          <a:xfrm>
+            <a:off x="5641848" y="3227832"/>
+            <a:ext cx="109728" cy="109728"/>
+          </a:xfrm>
+          <a:prstGeom prst="line">
+            <a:avLst/>
+          </a:prstGeom>
+          <a:noFill/>
+          <a:ln w="12700">
+            <a:solidFill>
+              <a:srgbClr val="2C7A7B"/>
+            </a:solidFill>
+            <a:prstDash val="solid"/>
+          </a:ln>
+        </p:spPr>
+      </p:sp>
+      <p:sp>
+        <p:nvSpPr>
+          <p:cNvPr id="37" name="Shape 35"/>
+          <p:cNvSpPr/>
+          <p:nvPr/>
+        </p:nvSpPr>
+        <p:spPr>
+          <a:xfrm>
+            <a:off x="5751576" y="3227832"/>
+            <a:ext cx="-109728" cy="109728"/>
+          </a:xfrm>
+          <a:prstGeom prst="line">
+            <a:avLst/>
+          </a:prstGeom>
+          <a:noFill/>
+          <a:ln w="12700">
+            <a:solidFill>
+              <a:srgbClr val="2C7A7B"/>
+            </a:solidFill>
+            <a:prstDash val="solid"/>
+          </a:ln>
+        </p:spPr>
+      </p:sp>
+      <p:sp>
+        <p:nvSpPr>
+          <p:cNvPr id="38" name="Shape 36"/>
+          <p:cNvSpPr/>
+          <p:nvPr/>
+        </p:nvSpPr>
+        <p:spPr>
+          <a:xfrm>
+            <a:off x="1618488" y="3822192"/>
+            <a:ext cx="109728" cy="109728"/>
+          </a:xfrm>
+          <a:prstGeom prst="line">
+            <a:avLst/>
+          </a:prstGeom>
+          <a:noFill/>
+          <a:ln w="12700">
+            <a:solidFill>
+              <a:srgbClr val="2C7A7B"/>
+            </a:solidFill>
+            <a:prstDash val="solid"/>
+          </a:ln>
+        </p:spPr>
+      </p:sp>
+      <p:sp>
+        <p:nvSpPr>
+          <p:cNvPr id="39" name="Shape 37"/>
+          <p:cNvSpPr/>
+          <p:nvPr/>
+        </p:nvSpPr>
+        <p:spPr>
+          <a:xfrm>
+            <a:off x="1728216" y="3822192"/>
+            <a:ext cx="-109728" cy="109728"/>
+          </a:xfrm>
+          <a:prstGeom prst="line">
+            <a:avLst/>
+          </a:prstGeom>
+          <a:noFill/>
+          <a:ln w="12700">
+            <a:solidFill>
+              <a:srgbClr val="2C7A7B"/>
+            </a:solidFill>
+            <a:prstDash val="solid"/>
+          </a:ln>
+        </p:spPr>
+      </p:sp>
+      <p:sp>
+        <p:nvSpPr>
+          <p:cNvPr id="40" name="Shape 38"/>
+          <p:cNvSpPr/>
+          <p:nvPr/>
+        </p:nvSpPr>
+        <p:spPr>
+          <a:xfrm>
+            <a:off x="2624328" y="3822192"/>
+            <a:ext cx="109728" cy="109728"/>
+          </a:xfrm>
+          <a:prstGeom prst="line">
+            <a:avLst/>
+          </a:prstGeom>
+          <a:noFill/>
+          <a:ln w="12700">
+            <a:solidFill>
+              <a:srgbClr val="2C7A7B"/>
+            </a:solidFill>
+            <a:prstDash val="solid"/>
+          </a:ln>
+        </p:spPr>
+      </p:sp>
+      <p:sp>
+        <p:nvSpPr>
+          <p:cNvPr id="41" name="Shape 39"/>
+          <p:cNvSpPr/>
+          <p:nvPr/>
+        </p:nvSpPr>
+        <p:spPr>
+          <a:xfrm>
+            <a:off x="2734056" y="3822192"/>
+            <a:ext cx="-109728" cy="109728"/>
+          </a:xfrm>
+          <a:prstGeom prst="line">
+            <a:avLst/>
+          </a:prstGeom>
+          <a:noFill/>
+          <a:ln w="12700">
+            <a:solidFill>
+              <a:srgbClr val="2C7A7B"/>
+            </a:solidFill>
+            <a:prstDash val="solid"/>
+          </a:ln>
+        </p:spPr>
+      </p:sp>
+      <p:sp>
+        <p:nvSpPr>
+          <p:cNvPr id="42" name="Shape 40"/>
+          <p:cNvSpPr/>
+          <p:nvPr/>
+        </p:nvSpPr>
+        <p:spPr>
+          <a:xfrm>
+            <a:off x="3630168" y="3822192"/>
+            <a:ext cx="109728" cy="109728"/>
+          </a:xfrm>
+          <a:prstGeom prst="line">
+            <a:avLst/>
+          </a:prstGeom>
+          <a:noFill/>
+          <a:ln w="12700">
+            <a:solidFill>
+              <a:srgbClr val="2C7A7B"/>
+            </a:solidFill>
+            <a:prstDash val="solid"/>
+          </a:ln>
+        </p:spPr>
+      </p:sp>
+      <p:sp>
+        <p:nvSpPr>
+          <p:cNvPr id="43" name="Shape 41"/>
+          <p:cNvSpPr/>
+          <p:nvPr/>
+        </p:nvSpPr>
+        <p:spPr>
+          <a:xfrm>
+            <a:off x="3739896" y="3822192"/>
+            <a:ext cx="-109728" cy="109728"/>
+          </a:xfrm>
+          <a:prstGeom prst="line">
+            <a:avLst/>
+          </a:prstGeom>
+          <a:noFill/>
+          <a:ln w="12700">
+            <a:solidFill>
+              <a:srgbClr val="2C7A7B"/>
+            </a:solidFill>
+            <a:prstDash val="solid"/>
+          </a:ln>
+        </p:spPr>
+      </p:sp>
+      <p:sp>
+        <p:nvSpPr>
+          <p:cNvPr id="44" name="Shape 42"/>
+          <p:cNvSpPr/>
+          <p:nvPr/>
+        </p:nvSpPr>
+        <p:spPr>
+          <a:xfrm>
+            <a:off x="4636008" y="3822192"/>
+            <a:ext cx="109728" cy="109728"/>
+          </a:xfrm>
+          <a:prstGeom prst="line">
+            <a:avLst/>
+          </a:prstGeom>
+          <a:noFill/>
+          <a:ln w="12700">
+            <a:solidFill>
+              <a:srgbClr val="2C7A7B"/>
+            </a:solidFill>
+            <a:prstDash val="solid"/>
+          </a:ln>
+        </p:spPr>
+      </p:sp>
+      <p:sp>
+        <p:nvSpPr>
+          <p:cNvPr id="45" name="Shape 43"/>
+          <p:cNvSpPr/>
+          <p:nvPr/>
+        </p:nvSpPr>
+        <p:spPr>
+          <a:xfrm>
+            <a:off x="4745736" y="3822192"/>
+            <a:ext cx="-109728" cy="109728"/>
+          </a:xfrm>
+          <a:prstGeom prst="line">
+            <a:avLst/>
+          </a:prstGeom>
+          <a:noFill/>
+          <a:ln w="12700">
+            <a:solidFill>
+              <a:srgbClr val="2C7A7B"/>
+            </a:solidFill>
+            <a:prstDash val="solid"/>
+          </a:ln>
+        </p:spPr>
+      </p:sp>
+      <p:sp>
+        <p:nvSpPr>
+          <p:cNvPr id="46" name="Shape 44"/>
+          <p:cNvSpPr/>
+          <p:nvPr/>
+        </p:nvSpPr>
+        <p:spPr>
+          <a:xfrm>
+            <a:off x="5641848" y="3822192"/>
+            <a:ext cx="109728" cy="109728"/>
+          </a:xfrm>
+          <a:prstGeom prst="line">
+            <a:avLst/>
+          </a:prstGeom>
+          <a:noFill/>
+          <a:ln w="12700">
+            <a:solidFill>
+              <a:srgbClr val="2C7A7B"/>
+            </a:solidFill>
+            <a:prstDash val="solid"/>
+          </a:ln>
+        </p:spPr>
+      </p:sp>
+      <p:sp>
+        <p:nvSpPr>
+          <p:cNvPr id="47" name="Shape 45"/>
+          <p:cNvSpPr/>
+          <p:nvPr/>
+        </p:nvSpPr>
+        <p:spPr>
+          <a:xfrm>
+            <a:off x="5751576" y="3822192"/>
+            <a:ext cx="-109728" cy="109728"/>
+          </a:xfrm>
+          <a:prstGeom prst="line">
+            <a:avLst/>
+          </a:prstGeom>
+          <a:noFill/>
+          <a:ln w="12700">
+            <a:solidFill>
+              <a:srgbClr val="2C7A7B"/>
+            </a:solidFill>
+            <a:prstDash val="solid"/>
+          </a:ln>
+        </p:spPr>
+      </p:sp>
+      <p:sp>
+        <p:nvSpPr>
+          <p:cNvPr id="48" name="Shape 46"/>
+          <p:cNvSpPr/>
+          <p:nvPr/>
+        </p:nvSpPr>
+        <p:spPr>
+          <a:xfrm>
+            <a:off x="1810512" y="3447288"/>
+            <a:ext cx="182880" cy="182880"/>
+          </a:xfrm>
+          <a:prstGeom prst="ellipse">
+            <a:avLst/>
+          </a:prstGeom>
+          <a:solidFill>
+            <a:srgbClr val="D78C24"/>
+          </a:solidFill>
+          <a:ln w="12700">
+            <a:solidFill>
+              <a:srgbClr val="D78C24"/>
+            </a:solidFill>
+            <a:prstDash val="solid"/>
+          </a:ln>
+        </p:spPr>
+      </p:sp>
+      <p:sp>
+        <p:nvSpPr>
+          <p:cNvPr id="49" name="Shape 47"/>
+          <p:cNvSpPr/>
+          <p:nvPr/>
+        </p:nvSpPr>
+        <p:spPr>
+          <a:xfrm>
+            <a:off x="1993392" y="3538728"/>
+            <a:ext cx="3017520" cy="0"/>
+          </a:xfrm>
+          <a:prstGeom prst="line">
+            <a:avLst/>
+          </a:prstGeom>
+          <a:noFill/>
+          <a:ln w="29210">
+            <a:solidFill>
+              <a:srgbClr val="D78C24"/>
+            </a:solidFill>
+            <a:prstDash val="solid"/>
+            <a:tailEnd type="triangle"/>
+          </a:ln>
+        </p:spPr>
+      </p:sp>
+      <p:sp>
+        <p:nvSpPr>
+          <p:cNvPr id="50" name="Text 48"/>
+          <p:cNvSpPr/>
+          <p:nvPr/>
+        </p:nvSpPr>
+        <p:spPr>
+          <a:xfrm>
+            <a:off x="4965192" y="3337560"/>
+            <a:ext cx="274320" cy="228600"/>
+          </a:xfrm>
+          <a:prstGeom prst="rect">
+            <a:avLst/>
+          </a:prstGeom>
+          <a:noFill/>
+          <a:ln/>
+        </p:spPr>
+        <p:txBody>
+          <a:bodyPr wrap="square" lIns="0" tIns="0" rIns="0" bIns="0" rtlCol="0" anchor="ctr">
+            <a:normAutofit/>
+          </a:bodyPr>
+          <a:lstStyle/>
+          <a:p>
+            <a:pPr indent="0" marL="0">
+              <a:buNone/>
+            </a:pPr>
+            <a:r>
+              <a:rPr lang="en-US" sz="1100" b="1" dirty="0">
+                <a:solidFill>
+                  <a:srgbClr val="D78C24"/>
+                </a:solidFill>
+                <a:latin typeface="Aptos" pitchFamily="34" charset="0"/>
+                <a:ea typeface="Aptos" pitchFamily="34" charset="-122"/>
+                <a:cs typeface="Aptos" pitchFamily="34" charset="-120"/>
+              </a:rPr>
+              <a:t>v</a:t>
+            </a:r>
+            <a:endParaRPr lang="en-US" sz="1100" dirty="0"/>
+          </a:p>
+        </p:txBody>
+      </p:sp>
+      <p:sp>
+        <p:nvSpPr>
+          <p:cNvPr id="51" name="Text 49"/>
+          <p:cNvSpPr/>
+          <p:nvPr/>
+        </p:nvSpPr>
+        <p:spPr>
+          <a:xfrm>
+            <a:off x="1947672" y="5001768"/>
+            <a:ext cx="5696712" cy="256032"/>
+          </a:xfrm>
+          <a:prstGeom prst="rect">
+            <a:avLst/>
+          </a:prstGeom>
+          <a:noFill/>
+          <a:ln/>
+        </p:spPr>
+        <p:txBody>
+          <a:bodyPr wrap="square" lIns="0" tIns="0" rIns="0" bIns="0" rtlCol="0" anchor="ctr">
+            <a:normAutofit/>
+          </a:bodyPr>
+          <a:lstStyle/>
+          <a:p>
+            <a:pPr algn="ctr" indent="0" marL="0">
+              <a:buNone/>
+            </a:pPr>
+            <a:r>
+              <a:rPr lang="en-US" sz="1000" dirty="0">
+                <a:solidFill>
+                  <a:srgbClr val="607080"/>
+                </a:solidFill>
+                <a:latin typeface="Aptos" pitchFamily="34" charset="0"/>
+                <a:ea typeface="Aptos" pitchFamily="34" charset="-122"/>
+                <a:cs typeface="Aptos" pitchFamily="34" charset="-120"/>
+              </a:rPr>
+              <a:t>E-Feld nach unten · B-Feld in die Folie</a:t>
+            </a:r>
+            <a:endParaRPr lang="en-US" sz="1000" dirty="0"/>
+          </a:p>
+        </p:txBody>
+      </p:sp>
+      <p:sp>
+        <p:nvSpPr>
+          <p:cNvPr id="52" name="Shape 50"/>
+          <p:cNvSpPr/>
+          <p:nvPr/>
+        </p:nvSpPr>
+        <p:spPr>
+          <a:xfrm>
+            <a:off x="8412480" y="1572768"/>
+            <a:ext cx="3108960" cy="2011680"/>
+          </a:xfrm>
+          <a:prstGeom prst="roundRect">
+            <a:avLst>
+              <a:gd name="adj" fmla="val 2727"/>
             </a:avLst>
           </a:prstGeom>
           <a:solidFill>
@@ -6109,14 +7540,14 @@
           </a:solidFill>
           <a:ln w="12700">
             <a:solidFill>
-              <a:srgbClr val="C8D5E2"/>
+              <a:srgbClr val="CDD8E2"/>
             </a:solidFill>
             <a:prstDash val="solid"/>
           </a:ln>
           <a:effectLst>
             <a:outerShdw sx="100000" sy="100000" kx="0" ky="0" algn="bl" rotWithShape="0" blurRad="12700" dist="50800" dir="2700000">
-              <a:srgbClr val="B7C5D2">
-                <a:alpha val="12000"/>
+              <a:srgbClr val="A8B8C7">
+                <a:alpha val="11000"/>
               </a:srgbClr>
             </a:outerShdw>
           </a:effectLst>
@@ -6124,14 +7555,14 @@
       </p:sp>
       <p:sp>
         <p:nvSpPr>
-          <p:cNvPr id="10" name="Shape 8"/>
-          <p:cNvSpPr/>
-          <p:nvPr/>
-        </p:nvSpPr>
-        <p:spPr>
-          <a:xfrm>
-            <a:off x="658368" y="1645920"/>
-            <a:ext cx="73152" cy="1627632"/>
+          <p:cNvPr id="53" name="Shape 51"/>
+          <p:cNvSpPr/>
+          <p:nvPr/>
+        </p:nvSpPr>
+        <p:spPr>
+          <a:xfrm>
+            <a:off x="8412480" y="1572768"/>
+            <a:ext cx="68580" cy="2011680"/>
           </a:xfrm>
           <a:prstGeom prst="rect">
             <a:avLst/>
@@ -6151,14 +7582,14 @@
       </p:sp>
       <p:sp>
         <p:nvSpPr>
-          <p:cNvPr id="11" name="Text 9"/>
-          <p:cNvSpPr/>
-          <p:nvPr/>
-        </p:nvSpPr>
-        <p:spPr>
-          <a:xfrm>
-            <a:off x="859536" y="1792224"/>
-            <a:ext cx="5029200" cy="320040"/>
+          <p:cNvPr id="54" name="Text 52"/>
+          <p:cNvSpPr/>
+          <p:nvPr/>
+        </p:nvSpPr>
+        <p:spPr>
+          <a:xfrm>
+            <a:off x="8613648" y="1691640"/>
+            <a:ext cx="2761488" cy="310896"/>
           </a:xfrm>
           <a:prstGeom prst="rect">
             <a:avLst/>
@@ -6176,30 +7607,30 @@
               <a:buNone/>
             </a:pPr>
             <a:r>
-              <a:rPr lang="en-US" sz="1500" b="1" dirty="0">
-                <a:solidFill>
-                  <a:srgbClr val="16324F"/>
-                </a:solidFill>
-                <a:latin typeface="Aptos" pitchFamily="34" charset="0"/>
-                <a:ea typeface="Aptos" pitchFamily="34" charset="-122"/>
-                <a:cs typeface="Aptos" pitchFamily="34" charset="-120"/>
-              </a:rPr>
-              <a:t>Heute neu</a:t>
-            </a:r>
-            <a:endParaRPr lang="en-US" sz="1500" dirty="0"/>
-          </a:p>
-        </p:txBody>
-      </p:sp>
-      <p:sp>
-        <p:nvSpPr>
-          <p:cNvPr id="12" name="Text 10"/>
-          <p:cNvSpPr/>
-          <p:nvPr/>
-        </p:nvSpPr>
-        <p:spPr>
-          <a:xfrm>
-            <a:off x="877824" y="2176272"/>
-            <a:ext cx="4992624" cy="950976"/>
+              <a:rPr lang="en-US" sz="1450" b="1" dirty="0">
+                <a:solidFill>
+                  <a:srgbClr val="17324D"/>
+                </a:solidFill>
+                <a:latin typeface="Aptos" pitchFamily="34" charset="0"/>
+                <a:ea typeface="Aptos" pitchFamily="34" charset="-122"/>
+                <a:cs typeface="Aptos" pitchFamily="34" charset="-120"/>
+              </a:rPr>
+              <a:t>Auswerten</a:t>
+            </a:r>
+            <a:endParaRPr lang="en-US" sz="1450" dirty="0"/>
+          </a:p>
+        </p:txBody>
+      </p:sp>
+      <p:sp>
+        <p:nvSpPr>
+          <p:cNvPr id="55" name="Text 53"/>
+          <p:cNvSpPr/>
+          <p:nvPr/>
+        </p:nvSpPr>
+        <p:spPr>
+          <a:xfrm>
+            <a:off x="8613648" y="2066544"/>
+            <a:ext cx="2743200" cy="1389888"/>
           </a:xfrm>
           <a:prstGeom prst="rect">
             <a:avLst/>
@@ -6218,7 +7649,7 @@
               <a:buChar char="•"/>
             </a:pPr>
             <a:r>
-              <a:rPr lang="en-US" sz="1340" dirty="0">
+              <a:rPr lang="en-US" sz="1320" dirty="0">
                 <a:solidFill>
                   <a:srgbClr val="203040"/>
                 </a:solidFill>
@@ -6226,9 +7657,9 @@
                 <a:ea typeface="Aptos" pitchFamily="34" charset="-122"/>
                 <a:cs typeface="Aptos" pitchFamily="34" charset="-120"/>
               </a:rPr>
-              <a:t>max. 3 zentrale Erkenntnisse</a:t>
-            </a:r>
-            <a:endParaRPr lang="en-US" sz="1340" dirty="0"/>
+              <a:t>Wann heben sich elektrische und magnetische Kraft auf?</a:t>
+            </a:r>
+            <a:endParaRPr lang="en-US" sz="1320" dirty="0"/>
           </a:p>
           <a:p>
             <a:pPr marL="165100" indent="-165100">
@@ -6236,7 +7667,7 @@
               <a:buChar char="•"/>
             </a:pPr>
             <a:r>
-              <a:rPr lang="en-US" sz="1340" dirty="0">
+              <a:rPr lang="en-US" sz="1320" dirty="0">
                 <a:solidFill>
                   <a:srgbClr val="203040"/>
                 </a:solidFill>
@@ -6244,17 +7675,143 @@
                 <a:ea typeface="Aptos" pitchFamily="34" charset="-122"/>
                 <a:cs typeface="Aptos" pitchFamily="34" charset="-120"/>
               </a:rPr>
-              <a:t>in eigenen Worten</a:t>
-            </a:r>
-            <a:endParaRPr lang="en-US" sz="1340" dirty="0"/>
-          </a:p>
+              <a:t>Welche Ladungsvorzeichen würden die Kraftrichtungen vertauschen?</a:t>
+            </a:r>
+            <a:endParaRPr lang="en-US" sz="1320" dirty="0"/>
+          </a:p>
+        </p:txBody>
+      </p:sp>
+      <p:sp>
+        <p:nvSpPr>
+          <p:cNvPr id="56" name="Shape 54"/>
+          <p:cNvSpPr/>
+          <p:nvPr/>
+        </p:nvSpPr>
+        <p:spPr>
+          <a:xfrm>
+            <a:off x="8412480" y="3794760"/>
+            <a:ext cx="3108960" cy="2304288"/>
+          </a:xfrm>
+          <a:prstGeom prst="roundRect">
+            <a:avLst>
+              <a:gd name="adj" fmla="val 2381"/>
+            </a:avLst>
+          </a:prstGeom>
+          <a:solidFill>
+            <a:srgbClr val="E8F4F2"/>
+          </a:solidFill>
+          <a:ln w="12700">
+            <a:solidFill>
+              <a:srgbClr val="CDD8E2"/>
+            </a:solidFill>
+            <a:prstDash val="solid"/>
+          </a:ln>
+          <a:effectLst>
+            <a:outerShdw sx="100000" sy="100000" kx="0" ky="0" algn="bl" rotWithShape="0" blurRad="12700" dist="50800" dir="2700000">
+              <a:srgbClr val="A8B8C7">
+                <a:alpha val="11000"/>
+              </a:srgbClr>
+            </a:outerShdw>
+          </a:effectLst>
+        </p:spPr>
+      </p:sp>
+      <p:sp>
+        <p:nvSpPr>
+          <p:cNvPr id="57" name="Shape 55"/>
+          <p:cNvSpPr/>
+          <p:nvPr/>
+        </p:nvSpPr>
+        <p:spPr>
+          <a:xfrm>
+            <a:off x="8412480" y="3794760"/>
+            <a:ext cx="68580" cy="2304288"/>
+          </a:xfrm>
+          <a:prstGeom prst="rect">
+            <a:avLst/>
+          </a:prstGeom>
+          <a:solidFill>
+            <a:srgbClr val="2C7A7B"/>
+          </a:solidFill>
+          <a:ln w="12700">
+            <a:solidFill>
+              <a:srgbClr val="2C7A7B">
+                <a:alpha val="0"/>
+              </a:srgbClr>
+            </a:solidFill>
+            <a:prstDash val="solid"/>
+          </a:ln>
+        </p:spPr>
+      </p:sp>
+      <p:sp>
+        <p:nvSpPr>
+          <p:cNvPr id="58" name="Text 56"/>
+          <p:cNvSpPr/>
+          <p:nvPr/>
+        </p:nvSpPr>
+        <p:spPr>
+          <a:xfrm>
+            <a:off x="8613648" y="3913632"/>
+            <a:ext cx="2761488" cy="310896"/>
+          </a:xfrm>
+          <a:prstGeom prst="rect">
+            <a:avLst/>
+          </a:prstGeom>
+          <a:noFill/>
+          <a:ln/>
+        </p:spPr>
+        <p:txBody>
+          <a:bodyPr wrap="square" lIns="0" tIns="0" rIns="0" bIns="0" rtlCol="0" anchor="t">
+            <a:normAutofit/>
+          </a:bodyPr>
+          <a:lstStyle/>
+          <a:p>
+            <a:pPr indent="0" marL="0">
+              <a:buNone/>
+            </a:pPr>
+            <a:r>
+              <a:rPr lang="en-US" sz="1430" b="1" dirty="0">
+                <a:solidFill>
+                  <a:srgbClr val="17324D"/>
+                </a:solidFill>
+                <a:latin typeface="Aptos" pitchFamily="34" charset="0"/>
+                <a:ea typeface="Aptos" pitchFamily="34" charset="-122"/>
+                <a:cs typeface="Aptos" pitchFamily="34" charset="-120"/>
+              </a:rPr>
+              <a:t>Darstellungssprache</a:t>
+            </a:r>
+            <a:endParaRPr lang="en-US" sz="1430" dirty="0"/>
+          </a:p>
+        </p:txBody>
+      </p:sp>
+      <p:sp>
+        <p:nvSpPr>
+          <p:cNvPr id="59" name="Text 57"/>
+          <p:cNvSpPr/>
+          <p:nvPr/>
+        </p:nvSpPr>
+        <p:spPr>
+          <a:xfrm>
+            <a:off x="8613648" y="4288536"/>
+            <a:ext cx="2743200" cy="1682496"/>
+          </a:xfrm>
+          <a:prstGeom prst="rect">
+            <a:avLst/>
+          </a:prstGeom>
+          <a:noFill/>
+          <a:ln/>
+        </p:spPr>
+        <p:txBody>
+          <a:bodyPr wrap="square" lIns="254" tIns="254" rIns="254" bIns="254" rtlCol="0" anchor="t">
+            <a:normAutofit/>
+          </a:bodyPr>
+          <a:lstStyle/>
           <a:p>
             <a:pPr marL="165100" indent="-165100">
               <a:buSzPct val="100000"/>
               <a:buChar char="•"/>
             </a:pPr>
             <a:r>
-              <a:rPr lang="en-US" sz="1340" dirty="0">
+              <a:rPr lang="en-US" sz="1260" dirty="0">
                 <a:solidFill>
                   <a:srgbClr val="203040"/>
                 </a:solidFill>
@@ -6262,45 +7819,511 @@
                 <a:ea typeface="Aptos" pitchFamily="34" charset="-122"/>
                 <a:cs typeface="Aptos" pitchFamily="34" charset="-120"/>
               </a:rPr>
-              <a:t>Bezug zum Vorwissen herstellen</a:t>
-            </a:r>
-            <a:endParaRPr lang="en-US" sz="1340" dirty="0"/>
-          </a:p>
-        </p:txBody>
-      </p:sp>
-      <p:sp>
-        <p:nvSpPr>
-          <p:cNvPr id="13" name="Shape 11"/>
-          <p:cNvSpPr/>
-          <p:nvPr/>
-        </p:nvSpPr>
-        <p:spPr>
-          <a:xfrm>
-            <a:off x="6272784" y="1645920"/>
-            <a:ext cx="5257800" cy="1627632"/>
+              <a:t>Achsen + Einheiten prüfen</a:t>
+            </a:r>
+            <a:endParaRPr lang="en-US" sz="1260" dirty="0"/>
+          </a:p>
+          <a:p>
+            <a:pPr marL="165100" indent="-165100">
+              <a:buSzPct val="100000"/>
+              <a:buChar char="•"/>
+            </a:pPr>
+            <a:r>
+              <a:rPr lang="en-US" sz="1260" dirty="0">
+                <a:solidFill>
+                  <a:srgbClr val="203040"/>
+                </a:solidFill>
+                <a:latin typeface="Aptos" pitchFamily="34" charset="0"/>
+                <a:ea typeface="Aptos" pitchFamily="34" charset="-122"/>
+                <a:cs typeface="Aptos" pitchFamily="34" charset="-120"/>
+              </a:rPr>
+              <a:t>Trend beschreiben</a:t>
+            </a:r>
+            <a:endParaRPr lang="en-US" sz="1260" dirty="0"/>
+          </a:p>
+          <a:p>
+            <a:pPr marL="165100" indent="-165100">
+              <a:buSzPct val="100000"/>
+              <a:buChar char="•"/>
+            </a:pPr>
+            <a:r>
+              <a:rPr lang="en-US" sz="1260" dirty="0">
+                <a:solidFill>
+                  <a:srgbClr val="203040"/>
+                </a:solidFill>
+                <a:latin typeface="Aptos" pitchFamily="34" charset="0"/>
+                <a:ea typeface="Aptos" pitchFamily="34" charset="-122"/>
+                <a:cs typeface="Aptos" pitchFamily="34" charset="-120"/>
+              </a:rPr>
+              <a:t>mit Fachbegriff/Formel begründen</a:t>
+            </a:r>
+            <a:endParaRPr lang="en-US" sz="1260" dirty="0"/>
+          </a:p>
+        </p:txBody>
+      </p:sp>
+    </p:spTree>
+  </p:cSld>
+  <p:clrMapOvr>
+    <a:masterClrMapping/>
+  </p:clrMapOvr>
+</p:sld>
+</file>
+
+<file path=ppt/slides/slide8.xml><?xml version="1.0" encoding="utf-8"?>
+<p:sld xmlns:a="http://schemas.openxmlformats.org/drawingml/2006/main" xmlns:r="http://schemas.openxmlformats.org/officeDocument/2006/relationships" xmlns:p="http://schemas.openxmlformats.org/presentationml/2006/main">
+  <p:cSld name="Slide 8">
+    <p:bg>
+      <p:bgPr>
+        <a:solidFill>
+          <a:srgbClr val="F7FAFC"/>
+        </a:solidFill>
+      </p:bgPr>
+    </p:bg>
+    <p:spTree>
+      <p:nvGrpSpPr>
+        <p:cNvPr id="1" name=""/>
+        <p:cNvGrpSpPr/>
+        <p:nvPr/>
+      </p:nvGrpSpPr>
+      <p:grpSpPr>
+        <a:xfrm>
+          <a:off x="0" y="0"/>
+          <a:ext cx="0" cy="0"/>
+          <a:chOff x="0" y="0"/>
+          <a:chExt cx="0" cy="0"/>
+        </a:xfrm>
+      </p:grpSpPr>
+      <p:sp>
+        <p:nvSpPr>
+          <p:cNvPr id="2" name="Shape 0"/>
+          <p:cNvSpPr/>
+          <p:nvPr/>
+        </p:nvSpPr>
+        <p:spPr>
+          <a:xfrm>
+            <a:off x="0" y="0"/>
+            <a:ext cx="12191695" cy="137160"/>
+          </a:xfrm>
+          <a:prstGeom prst="rect">
+            <a:avLst/>
+          </a:prstGeom>
+          <a:solidFill>
+            <a:srgbClr val="2F6FAD"/>
+          </a:solidFill>
+          <a:ln w="12700">
+            <a:solidFill>
+              <a:srgbClr val="2F6FAD">
+                <a:alpha val="0"/>
+              </a:srgbClr>
+            </a:solidFill>
+            <a:prstDash val="solid"/>
+          </a:ln>
+        </p:spPr>
+      </p:sp>
+      <p:sp>
+        <p:nvSpPr>
+          <p:cNvPr id="3" name="Text 1"/>
+          <p:cNvSpPr/>
+          <p:nvPr/>
+        </p:nvSpPr>
+        <p:spPr>
+          <a:xfrm>
+            <a:off x="566928" y="301752"/>
+            <a:ext cx="3383280" cy="237744"/>
+          </a:xfrm>
+          <a:prstGeom prst="rect">
+            <a:avLst/>
+          </a:prstGeom>
+          <a:noFill/>
+          <a:ln/>
+        </p:spPr>
+        <p:txBody>
+          <a:bodyPr wrap="square" lIns="0" tIns="0" rIns="0" bIns="0" rtlCol="0" anchor="ctr">
+            <a:normAutofit/>
+          </a:bodyPr>
+          <a:lstStyle/>
+          <a:p>
+            <a:pPr indent="0" marL="0">
+              <a:buNone/>
+            </a:pPr>
+            <a:r>
+              <a:rPr lang="en-US" sz="1000" b="1" spc="120" kern="0" dirty="0">
+                <a:solidFill>
+                  <a:srgbClr val="2F6FAD"/>
+                </a:solidFill>
+                <a:latin typeface="Aptos" pitchFamily="34" charset="0"/>
+                <a:ea typeface="Aptos" pitchFamily="34" charset="-122"/>
+                <a:cs typeface="Aptos" pitchFamily="34" charset="-120"/>
+              </a:rPr>
+              <a:t>SICHERUNG</a:t>
+            </a:r>
+            <a:endParaRPr lang="en-US" sz="1000" dirty="0"/>
+          </a:p>
+        </p:txBody>
+      </p:sp>
+      <p:sp>
+        <p:nvSpPr>
+          <p:cNvPr id="4" name="Text 2"/>
+          <p:cNvSpPr/>
+          <p:nvPr/>
+        </p:nvSpPr>
+        <p:spPr>
+          <a:xfrm>
+            <a:off x="566928" y="621792"/>
+            <a:ext cx="10698480" cy="548640"/>
+          </a:xfrm>
+          <a:prstGeom prst="rect">
+            <a:avLst/>
+          </a:prstGeom>
+          <a:noFill/>
+          <a:ln/>
+        </p:spPr>
+        <p:txBody>
+          <a:bodyPr wrap="square" lIns="0" tIns="0" rIns="0" bIns="0" rtlCol="0" anchor="t">
+            <a:normAutofit/>
+          </a:bodyPr>
+          <a:lstStyle/>
+          <a:p>
+            <a:pPr indent="0" marL="0">
+              <a:buNone/>
+            </a:pPr>
+            <a:r>
+              <a:rPr lang="en-US" sz="2700" b="1" dirty="0">
+                <a:solidFill>
+                  <a:srgbClr val="17324D"/>
+                </a:solidFill>
+                <a:latin typeface="Aptos" pitchFamily="34" charset="0"/>
+                <a:ea typeface="Aptos" pitchFamily="34" charset="-122"/>
+                <a:cs typeface="Aptos" pitchFamily="34" charset="-120"/>
+              </a:rPr>
+              <a:t>Lösungen und Exit-Ticket</a:t>
+            </a:r>
+            <a:endParaRPr lang="en-US" sz="2700" dirty="0"/>
+          </a:p>
+        </p:txBody>
+      </p:sp>
+      <p:sp>
+        <p:nvSpPr>
+          <p:cNvPr id="5" name="Text 3"/>
+          <p:cNvSpPr/>
+          <p:nvPr/>
+        </p:nvSpPr>
+        <p:spPr>
+          <a:xfrm>
+            <a:off x="9509760" y="310896"/>
+            <a:ext cx="2057400" cy="219456"/>
+          </a:xfrm>
+          <a:prstGeom prst="rect">
+            <a:avLst/>
+          </a:prstGeom>
+          <a:noFill/>
+          <a:ln/>
+        </p:spPr>
+        <p:txBody>
+          <a:bodyPr wrap="square" lIns="0" tIns="0" rIns="0" bIns="0" rtlCol="0" anchor="ctr">
+            <a:normAutofit/>
+          </a:bodyPr>
+          <a:lstStyle/>
+          <a:p>
+            <a:pPr algn="r" indent="0" marL="0">
+              <a:buNone/>
+            </a:pPr>
+            <a:r>
+              <a:rPr lang="en-US" sz="1020" b="1" dirty="0">
+                <a:solidFill>
+                  <a:srgbClr val="607080"/>
+                </a:solidFill>
+                <a:latin typeface="Aptos" pitchFamily="34" charset="0"/>
+                <a:ea typeface="Aptos" pitchFamily="34" charset="-122"/>
+                <a:cs typeface="Aptos" pitchFamily="34" charset="-120"/>
+              </a:rPr>
+              <a:t>Q1/Q2 Leistungskurs</a:t>
+            </a:r>
+            <a:endParaRPr lang="en-US" sz="1020" dirty="0"/>
+          </a:p>
+        </p:txBody>
+      </p:sp>
+      <p:sp>
+        <p:nvSpPr>
+          <p:cNvPr id="6" name="Shape 4"/>
+          <p:cNvSpPr/>
+          <p:nvPr/>
+        </p:nvSpPr>
+        <p:spPr>
+          <a:xfrm>
+            <a:off x="566928" y="1280160"/>
+            <a:ext cx="11045952" cy="0"/>
+          </a:xfrm>
+          <a:prstGeom prst="line">
+            <a:avLst/>
+          </a:prstGeom>
+          <a:noFill/>
+          <a:ln w="12700">
+            <a:solidFill>
+              <a:srgbClr val="CDD8E2"/>
+            </a:solidFill>
+            <a:prstDash val="solid"/>
+          </a:ln>
+        </p:spPr>
+      </p:sp>
+      <p:sp>
+        <p:nvSpPr>
+          <p:cNvPr id="7" name="Text 5"/>
+          <p:cNvSpPr/>
+          <p:nvPr/>
+        </p:nvSpPr>
+        <p:spPr>
+          <a:xfrm>
+            <a:off x="566928" y="6519672"/>
+            <a:ext cx="5212080" cy="182880"/>
+          </a:xfrm>
+          <a:prstGeom prst="rect">
+            <a:avLst/>
+          </a:prstGeom>
+          <a:noFill/>
+          <a:ln/>
+        </p:spPr>
+        <p:txBody>
+          <a:bodyPr wrap="square" lIns="0" tIns="0" rIns="0" bIns="0" rtlCol="0" anchor="ctr">
+            <a:normAutofit/>
+          </a:bodyPr>
+          <a:lstStyle/>
+          <a:p>
+            <a:pPr indent="0" marL="0">
+              <a:buNone/>
+            </a:pPr>
+            <a:r>
+              <a:rPr lang="en-US" sz="900" dirty="0">
+                <a:solidFill>
+                  <a:srgbClr val="607080"/>
+                </a:solidFill>
+                <a:latin typeface="Aptos" pitchFamily="34" charset="0"/>
+                <a:ea typeface="Aptos" pitchFamily="34" charset="-122"/>
+                <a:cs typeface="Aptos" pitchFamily="34" charset="-120"/>
+              </a:rPr>
+              <a:t>Fortlaufende Wiederholung · Physik NRW</a:t>
+            </a:r>
+            <a:endParaRPr lang="en-US" sz="900" dirty="0"/>
+          </a:p>
+        </p:txBody>
+      </p:sp>
+      <p:sp>
+        <p:nvSpPr>
+          <p:cNvPr id="8" name="Text 6"/>
+          <p:cNvSpPr/>
+          <p:nvPr/>
+        </p:nvSpPr>
+        <p:spPr>
+          <a:xfrm>
+            <a:off x="11137392" y="6519672"/>
+            <a:ext cx="457200" cy="182880"/>
+          </a:xfrm>
+          <a:prstGeom prst="rect">
+            <a:avLst/>
+          </a:prstGeom>
+          <a:noFill/>
+          <a:ln/>
+        </p:spPr>
+        <p:txBody>
+          <a:bodyPr wrap="square" lIns="0" tIns="0" rIns="0" bIns="0" rtlCol="0" anchor="ctr">
+            <a:normAutofit/>
+          </a:bodyPr>
+          <a:lstStyle/>
+          <a:p>
+            <a:pPr algn="r" indent="0" marL="0">
+              <a:buNone/>
+            </a:pPr>
+            <a:r>
+              <a:rPr lang="en-US" sz="900" dirty="0">
+                <a:solidFill>
+                  <a:srgbClr val="607080"/>
+                </a:solidFill>
+                <a:latin typeface="Aptos" pitchFamily="34" charset="0"/>
+                <a:ea typeface="Aptos" pitchFamily="34" charset="-122"/>
+                <a:cs typeface="Aptos" pitchFamily="34" charset="-120"/>
+              </a:rPr>
+              <a:t>8</a:t>
+            </a:r>
+            <a:endParaRPr lang="en-US" sz="900" dirty="0"/>
+          </a:p>
+        </p:txBody>
+      </p:sp>
+      <p:sp>
+        <p:nvSpPr>
+          <p:cNvPr id="9" name="Text 7"/>
+          <p:cNvSpPr/>
+          <p:nvPr/>
+        </p:nvSpPr>
+        <p:spPr>
+          <a:xfrm>
+            <a:off x="658368" y="1444752"/>
+            <a:ext cx="10515600" cy="256032"/>
+          </a:xfrm>
+          <a:prstGeom prst="rect">
+            <a:avLst/>
+          </a:prstGeom>
+          <a:noFill/>
+          <a:ln/>
+        </p:spPr>
+        <p:txBody>
+          <a:bodyPr wrap="square" lIns="0" tIns="0" rIns="0" bIns="0" rtlCol="0" anchor="ctr">
+            <a:normAutofit/>
+          </a:bodyPr>
+          <a:lstStyle/>
+          <a:p>
+            <a:pPr indent="0" marL="0">
+              <a:buNone/>
+            </a:pPr>
+            <a:r>
+              <a:rPr lang="en-US" sz="1350" dirty="0">
+                <a:solidFill>
+                  <a:srgbClr val="607080"/>
+                </a:solidFill>
+                <a:latin typeface="Aptos" pitchFamily="34" charset="0"/>
+                <a:ea typeface="Aptos" pitchFamily="34" charset="-122"/>
+                <a:cs typeface="Aptos" pitchFamily="34" charset="-120"/>
+              </a:rPr>
+              <a:t>Erst nach eigener Bearbeitung einblenden.</a:t>
+            </a:r>
+            <a:endParaRPr lang="en-US" sz="1350" dirty="0"/>
+          </a:p>
+        </p:txBody>
+      </p:sp>
+      <p:sp>
+        <p:nvSpPr>
+          <p:cNvPr id="10" name="Shape 8"/>
+          <p:cNvSpPr/>
+          <p:nvPr/>
+        </p:nvSpPr>
+        <p:spPr>
+          <a:xfrm>
+            <a:off x="658368" y="1810512"/>
+            <a:ext cx="5340096" cy="1060704"/>
           </a:xfrm>
           <a:prstGeom prst="roundRect">
             <a:avLst>
-              <a:gd name="adj" fmla="val 4494"/>
+              <a:gd name="adj" fmla="val 5172"/>
             </a:avLst>
           </a:prstGeom>
           <a:solidFill>
-            <a:srgbClr val="E6F4F1"/>
+            <a:srgbClr val="FFFFFF"/>
           </a:solidFill>
           <a:ln w="12700">
             <a:solidFill>
-              <a:srgbClr val="C8D5E2"/>
-            </a:solidFill>
-            <a:prstDash val="solid"/>
-          </a:ln>
-          <a:effectLst>
-            <a:outerShdw sx="100000" sy="100000" kx="0" ky="0" algn="bl" rotWithShape="0" blurRad="12700" dist="50800" dir="2700000">
-              <a:srgbClr val="B7C5D2">
-                <a:alpha val="12000"/>
+              <a:srgbClr val="CDD8E2"/>
+            </a:solidFill>
+            <a:prstDash val="solid"/>
+          </a:ln>
+        </p:spPr>
+      </p:sp>
+      <p:sp>
+        <p:nvSpPr>
+          <p:cNvPr id="11" name="Shape 9"/>
+          <p:cNvSpPr/>
+          <p:nvPr/>
+        </p:nvSpPr>
+        <p:spPr>
+          <a:xfrm>
+            <a:off x="658368" y="1810512"/>
+            <a:ext cx="68580" cy="1060704"/>
+          </a:xfrm>
+          <a:prstGeom prst="rect">
+            <a:avLst/>
+          </a:prstGeom>
+          <a:solidFill>
+            <a:srgbClr val="2F6FAD"/>
+          </a:solidFill>
+          <a:ln w="12700">
+            <a:solidFill>
+              <a:srgbClr val="2F6FAD">
+                <a:alpha val="0"/>
               </a:srgbClr>
-            </a:outerShdw>
-          </a:effectLst>
-        </p:spPr>
+            </a:solidFill>
+            <a:prstDash val="solid"/>
+          </a:ln>
+        </p:spPr>
+      </p:sp>
+      <p:sp>
+        <p:nvSpPr>
+          <p:cNvPr id="12" name="Text 10"/>
+          <p:cNvSpPr/>
+          <p:nvPr/>
+        </p:nvSpPr>
+        <p:spPr>
+          <a:xfrm>
+            <a:off x="859536" y="1929384"/>
+            <a:ext cx="4992624" cy="310896"/>
+          </a:xfrm>
+          <a:prstGeom prst="rect">
+            <a:avLst/>
+          </a:prstGeom>
+          <a:noFill/>
+          <a:ln/>
+        </p:spPr>
+        <p:txBody>
+          <a:bodyPr wrap="square" lIns="0" tIns="0" rIns="0" bIns="0" rtlCol="0" anchor="t">
+            <a:normAutofit/>
+          </a:bodyPr>
+          <a:lstStyle/>
+          <a:p>
+            <a:pPr indent="0" marL="0">
+              <a:buNone/>
+            </a:pPr>
+            <a:r>
+              <a:rPr lang="en-US" sz="1180" b="1" dirty="0">
+                <a:solidFill>
+                  <a:srgbClr val="17324D"/>
+                </a:solidFill>
+                <a:latin typeface="Aptos" pitchFamily="34" charset="0"/>
+                <a:ea typeface="Aptos" pitchFamily="34" charset="-122"/>
+                <a:cs typeface="Aptos" pitchFamily="34" charset="-120"/>
+              </a:rPr>
+              <a:t>Warm-up</a:t>
+            </a:r>
+            <a:endParaRPr lang="en-US" sz="1180" dirty="0"/>
+          </a:p>
+        </p:txBody>
+      </p:sp>
+      <p:sp>
+        <p:nvSpPr>
+          <p:cNvPr id="13" name="Text 11"/>
+          <p:cNvSpPr/>
+          <p:nvPr/>
+        </p:nvSpPr>
+        <p:spPr>
+          <a:xfrm>
+            <a:off x="859536" y="2304288"/>
+            <a:ext cx="4974336" cy="438912"/>
+          </a:xfrm>
+          <a:prstGeom prst="rect">
+            <a:avLst/>
+          </a:prstGeom>
+          <a:noFill/>
+          <a:ln/>
+        </p:spPr>
+        <p:txBody>
+          <a:bodyPr wrap="square" lIns="0" tIns="0" rIns="0" bIns="0" rtlCol="0" anchor="t">
+            <a:normAutofit/>
+          </a:bodyPr>
+          <a:lstStyle/>
+          <a:p>
+            <a:pPr indent="0" marL="0">
+              <a:buNone/>
+            </a:pPr>
+            <a:r>
+              <a:rPr lang="en-US" sz="1160" dirty="0">
+                <a:solidFill>
+                  <a:srgbClr val="203040"/>
+                </a:solidFill>
+                <a:latin typeface="Aptos" pitchFamily="34" charset="0"/>
+                <a:ea typeface="Aptos" pitchFamily="34" charset="-122"/>
+                <a:cs typeface="Aptos" pitchFamily="34" charset="-120"/>
+              </a:rPr>
+              <a:t>Warm-up: elektrische Wirkung; magnetische Wirkung; Volt (V); nein; eine Induktionsspannung kann auftreten.</a:t>
+            </a:r>
+            <a:endParaRPr lang="en-US" sz="1160" dirty="0"/>
+          </a:p>
+        </p:txBody>
       </p:sp>
       <p:sp>
         <p:nvSpPr>
@@ -6310,8 +8333,35 @@
         </p:nvSpPr>
         <p:spPr>
           <a:xfrm>
-            <a:off x="6272784" y="1645920"/>
-            <a:ext cx="73152" cy="1627632"/>
+            <a:off x="6181344" y="1810512"/>
+            <a:ext cx="5340096" cy="1060704"/>
+          </a:xfrm>
+          <a:prstGeom prst="roundRect">
+            <a:avLst>
+              <a:gd name="adj" fmla="val 5172"/>
+            </a:avLst>
+          </a:prstGeom>
+          <a:solidFill>
+            <a:srgbClr val="FFFFFF"/>
+          </a:solidFill>
+          <a:ln w="12700">
+            <a:solidFill>
+              <a:srgbClr val="CDD8E2"/>
+            </a:solidFill>
+            <a:prstDash val="solid"/>
+          </a:ln>
+        </p:spPr>
+      </p:sp>
+      <p:sp>
+        <p:nvSpPr>
+          <p:cNvPr id="15" name="Shape 13"/>
+          <p:cNvSpPr/>
+          <p:nvPr/>
+        </p:nvSpPr>
+        <p:spPr>
+          <a:xfrm>
+            <a:off x="6181344" y="1810512"/>
+            <a:ext cx="68580" cy="1060704"/>
           </a:xfrm>
           <a:prstGeom prst="rect">
             <a:avLst/>
@@ -6331,14 +8381,14 @@
       </p:sp>
       <p:sp>
         <p:nvSpPr>
-          <p:cNvPr id="15" name="Text 13"/>
-          <p:cNvSpPr/>
-          <p:nvPr/>
-        </p:nvSpPr>
-        <p:spPr>
-          <a:xfrm>
-            <a:off x="6473952" y="1792224"/>
-            <a:ext cx="4873752" cy="320040"/>
+          <p:cNvPr id="16" name="Text 14"/>
+          <p:cNvSpPr/>
+          <p:nvPr/>
+        </p:nvSpPr>
+        <p:spPr>
+          <a:xfrm>
+            <a:off x="6382512" y="1929384"/>
+            <a:ext cx="4992624" cy="310896"/>
           </a:xfrm>
           <a:prstGeom prst="rect">
             <a:avLst/>
@@ -6356,30 +8406,30 @@
               <a:buNone/>
             </a:pPr>
             <a:r>
-              <a:rPr lang="en-US" sz="1500" b="1" dirty="0">
-                <a:solidFill>
-                  <a:srgbClr val="16324F"/>
-                </a:solidFill>
-                <a:latin typeface="Aptos" pitchFamily="34" charset="0"/>
-                <a:ea typeface="Aptos" pitchFamily="34" charset="-122"/>
-                <a:cs typeface="Aptos" pitchFamily="34" charset="-120"/>
-              </a:rPr>
-              <a:t>Experiment / Beobachtung</a:t>
-            </a:r>
-            <a:endParaRPr lang="en-US" sz="1500" dirty="0"/>
-          </a:p>
-        </p:txBody>
-      </p:sp>
-      <p:sp>
-        <p:nvSpPr>
-          <p:cNvPr id="16" name="Text 14"/>
-          <p:cNvSpPr/>
-          <p:nvPr/>
-        </p:nvSpPr>
-        <p:spPr>
-          <a:xfrm>
-            <a:off x="6492240" y="2176272"/>
-            <a:ext cx="4837176" cy="950976"/>
+              <a:rPr lang="en-US" sz="1180" b="1" dirty="0">
+                <a:solidFill>
+                  <a:srgbClr val="17324D"/>
+                </a:solidFill>
+                <a:latin typeface="Aptos" pitchFamily="34" charset="0"/>
+                <a:ea typeface="Aptos" pitchFamily="34" charset="-122"/>
+                <a:cs typeface="Aptos" pitchFamily="34" charset="-120"/>
+              </a:rPr>
+              <a:t>Basis 1</a:t>
+            </a:r>
+            <a:endParaRPr lang="en-US" sz="1180" dirty="0"/>
+          </a:p>
+        </p:txBody>
+      </p:sp>
+      <p:sp>
+        <p:nvSpPr>
+          <p:cNvPr id="17" name="Text 15"/>
+          <p:cNvSpPr/>
+          <p:nvPr/>
+        </p:nvSpPr>
+        <p:spPr>
+          <a:xfrm>
+            <a:off x="6382512" y="2304288"/>
+            <a:ext cx="4974336" cy="438912"/>
           </a:xfrm>
           <a:prstGeom prst="rect">
             <a:avLst/>
@@ -6397,7 +8447,7 @@
               <a:buNone/>
             </a:pPr>
             <a:r>
-              <a:rPr lang="en-US" sz="1340" dirty="0">
+              <a:rPr lang="en-US" sz="1160" dirty="0">
                 <a:solidFill>
                   <a:srgbClr val="203040"/>
                 </a:solidFill>
@@ -6405,349 +8455,26 @@
                 <a:ea typeface="Aptos" pitchFamily="34" charset="-122"/>
                 <a:cs typeface="Aptos" pitchFamily="34" charset="-120"/>
               </a:rPr>
-              <a:t>Ein prägnanter Versuch, Messwert, Graph oder Alltagsbezug als Anker für die Stunde.</a:t>
-            </a:r>
-            <a:endParaRPr lang="en-US" sz="1340" dirty="0"/>
-          </a:p>
-        </p:txBody>
-      </p:sp>
-      <p:sp>
-        <p:nvSpPr>
-          <p:cNvPr id="17" name="Shape 15"/>
-          <p:cNvSpPr/>
-          <p:nvPr/>
-        </p:nvSpPr>
-        <p:spPr>
-          <a:xfrm>
-            <a:off x="658368" y="3520440"/>
-            <a:ext cx="5413248" cy="1627632"/>
+              <a:t>Basis 1: 0,90 N.</a:t>
+            </a:r>
+            <a:endParaRPr lang="en-US" sz="1160" dirty="0"/>
+          </a:p>
+        </p:txBody>
+      </p:sp>
+      <p:sp>
+        <p:nvSpPr>
+          <p:cNvPr id="18" name="Shape 16"/>
+          <p:cNvSpPr/>
+          <p:nvPr/>
+        </p:nvSpPr>
+        <p:spPr>
+          <a:xfrm>
+            <a:off x="658368" y="3063240"/>
+            <a:ext cx="5340096" cy="1060704"/>
           </a:xfrm>
           <a:prstGeom prst="roundRect">
             <a:avLst>
-              <a:gd name="adj" fmla="val 4494"/>
-            </a:avLst>
-          </a:prstGeom>
-          <a:solidFill>
-            <a:srgbClr val="FFF3DE"/>
-          </a:solidFill>
-          <a:ln w="12700">
-            <a:solidFill>
-              <a:srgbClr val="C8D5E2"/>
-            </a:solidFill>
-            <a:prstDash val="solid"/>
-          </a:ln>
-          <a:effectLst>
-            <a:outerShdw sx="100000" sy="100000" kx="0" ky="0" algn="bl" rotWithShape="0" blurRad="12700" dist="50800" dir="2700000">
-              <a:srgbClr val="B7C5D2">
-                <a:alpha val="12000"/>
-              </a:srgbClr>
-            </a:outerShdw>
-          </a:effectLst>
-        </p:spPr>
-      </p:sp>
-      <p:sp>
-        <p:nvSpPr>
-          <p:cNvPr id="18" name="Shape 16"/>
-          <p:cNvSpPr/>
-          <p:nvPr/>
-        </p:nvSpPr>
-        <p:spPr>
-          <a:xfrm>
-            <a:off x="658368" y="3520440"/>
-            <a:ext cx="73152" cy="1627632"/>
-          </a:xfrm>
-          <a:prstGeom prst="rect">
-            <a:avLst/>
-          </a:prstGeom>
-          <a:solidFill>
-            <a:srgbClr val="D9902F"/>
-          </a:solidFill>
-          <a:ln w="12700">
-            <a:solidFill>
-              <a:srgbClr val="D9902F">
-                <a:alpha val="0"/>
-              </a:srgbClr>
-            </a:solidFill>
-            <a:prstDash val="solid"/>
-          </a:ln>
-        </p:spPr>
-      </p:sp>
-      <p:sp>
-        <p:nvSpPr>
-          <p:cNvPr id="19" name="Text 17"/>
-          <p:cNvSpPr/>
-          <p:nvPr/>
-        </p:nvSpPr>
-        <p:spPr>
-          <a:xfrm>
-            <a:off x="859536" y="3666744"/>
-            <a:ext cx="5029200" cy="320040"/>
-          </a:xfrm>
-          <a:prstGeom prst="rect">
-            <a:avLst/>
-          </a:prstGeom>
-          <a:noFill/>
-          <a:ln/>
-        </p:spPr>
-        <p:txBody>
-          <a:bodyPr wrap="square" lIns="0" tIns="0" rIns="0" bIns="0" rtlCol="0" anchor="t">
-            <a:normAutofit/>
-          </a:bodyPr>
-          <a:lstStyle/>
-          <a:p>
-            <a:pPr indent="0" marL="0">
-              <a:buNone/>
-            </a:pPr>
-            <a:r>
-              <a:rPr lang="en-US" sz="1500" b="1" dirty="0">
-                <a:solidFill>
-                  <a:srgbClr val="16324F"/>
-                </a:solidFill>
-                <a:latin typeface="Aptos" pitchFamily="34" charset="0"/>
-                <a:ea typeface="Aptos" pitchFamily="34" charset="-122"/>
-                <a:cs typeface="Aptos" pitchFamily="34" charset="-120"/>
-              </a:rPr>
-              <a:t>Merksatz / Formel</a:t>
-            </a:r>
-            <a:endParaRPr lang="en-US" sz="1500" dirty="0"/>
-          </a:p>
-        </p:txBody>
-      </p:sp>
-      <p:sp>
-        <p:nvSpPr>
-          <p:cNvPr id="20" name="Text 18"/>
-          <p:cNvSpPr/>
-          <p:nvPr/>
-        </p:nvSpPr>
-        <p:spPr>
-          <a:xfrm>
-            <a:off x="877824" y="4050792"/>
-            <a:ext cx="4992624" cy="950976"/>
-          </a:xfrm>
-          <a:prstGeom prst="rect">
-            <a:avLst/>
-          </a:prstGeom>
-          <a:noFill/>
-          <a:ln/>
-        </p:spPr>
-        <p:txBody>
-          <a:bodyPr wrap="square" lIns="0" tIns="0" rIns="0" bIns="0" rtlCol="0" anchor="t">
-            <a:normAutofit/>
-          </a:bodyPr>
-          <a:lstStyle/>
-          <a:p>
-            <a:pPr indent="0" marL="0">
-              <a:buNone/>
-            </a:pPr>
-            <a:r>
-              <a:rPr lang="en-US" sz="1340" dirty="0">
-                <a:solidFill>
-                  <a:srgbClr val="203040"/>
-                </a:solidFill>
-                <a:latin typeface="Aptos" pitchFamily="34" charset="0"/>
-                <a:ea typeface="Aptos" pitchFamily="34" charset="-122"/>
-                <a:cs typeface="Aptos" pitchFamily="34" charset="-120"/>
-              </a:rPr>
-              <a:t>Genau eine zentrale Aussage oder Beziehung festhalten – möglichst mit Bedeutung der Größen.</a:t>
-            </a:r>
-            <a:endParaRPr lang="en-US" sz="1340" dirty="0"/>
-          </a:p>
-        </p:txBody>
-      </p:sp>
-      <p:sp>
-        <p:nvSpPr>
-          <p:cNvPr id="21" name="Shape 19"/>
-          <p:cNvSpPr/>
-          <p:nvPr/>
-        </p:nvSpPr>
-        <p:spPr>
-          <a:xfrm>
-            <a:off x="6272784" y="3520440"/>
-            <a:ext cx="5257800" cy="1627632"/>
-          </a:xfrm>
-          <a:prstGeom prst="roundRect">
-            <a:avLst>
-              <a:gd name="adj" fmla="val 4494"/>
-            </a:avLst>
-          </a:prstGeom>
-          <a:solidFill>
-            <a:srgbClr val="EBF4ED"/>
-          </a:solidFill>
-          <a:ln w="12700">
-            <a:solidFill>
-              <a:srgbClr val="C8D5E2"/>
-            </a:solidFill>
-            <a:prstDash val="solid"/>
-          </a:ln>
-          <a:effectLst>
-            <a:outerShdw sx="100000" sy="100000" kx="0" ky="0" algn="bl" rotWithShape="0" blurRad="12700" dist="50800" dir="2700000">
-              <a:srgbClr val="B7C5D2">
-                <a:alpha val="12000"/>
-              </a:srgbClr>
-            </a:outerShdw>
-          </a:effectLst>
-        </p:spPr>
-      </p:sp>
-      <p:sp>
-        <p:nvSpPr>
-          <p:cNvPr id="22" name="Shape 20"/>
-          <p:cNvSpPr/>
-          <p:nvPr/>
-        </p:nvSpPr>
-        <p:spPr>
-          <a:xfrm>
-            <a:off x="6272784" y="3520440"/>
-            <a:ext cx="73152" cy="1627632"/>
-          </a:xfrm>
-          <a:prstGeom prst="rect">
-            <a:avLst/>
-          </a:prstGeom>
-          <a:solidFill>
-            <a:srgbClr val="4A7C59"/>
-          </a:solidFill>
-          <a:ln w="12700">
-            <a:solidFill>
-              <a:srgbClr val="4A7C59">
-                <a:alpha val="0"/>
-              </a:srgbClr>
-            </a:solidFill>
-            <a:prstDash val="solid"/>
-          </a:ln>
-        </p:spPr>
-      </p:sp>
-      <p:sp>
-        <p:nvSpPr>
-          <p:cNvPr id="23" name="Text 21"/>
-          <p:cNvSpPr/>
-          <p:nvPr/>
-        </p:nvSpPr>
-        <p:spPr>
-          <a:xfrm>
-            <a:off x="6473952" y="3666744"/>
-            <a:ext cx="4873752" cy="320040"/>
-          </a:xfrm>
-          <a:prstGeom prst="rect">
-            <a:avLst/>
-          </a:prstGeom>
-          <a:noFill/>
-          <a:ln/>
-        </p:spPr>
-        <p:txBody>
-          <a:bodyPr wrap="square" lIns="0" tIns="0" rIns="0" bIns="0" rtlCol="0" anchor="t">
-            <a:normAutofit/>
-          </a:bodyPr>
-          <a:lstStyle/>
-          <a:p>
-            <a:pPr indent="0" marL="0">
-              <a:buNone/>
-            </a:pPr>
-            <a:r>
-              <a:rPr lang="en-US" sz="1500" b="1" dirty="0">
-                <a:solidFill>
-                  <a:srgbClr val="16324F"/>
-                </a:solidFill>
-                <a:latin typeface="Aptos" pitchFamily="34" charset="0"/>
-                <a:ea typeface="Aptos" pitchFamily="34" charset="-122"/>
-                <a:cs typeface="Aptos" pitchFamily="34" charset="-120"/>
-              </a:rPr>
-              <a:t>2-Minuten-Check</a:t>
-            </a:r>
-            <a:endParaRPr lang="en-US" sz="1500" dirty="0"/>
-          </a:p>
-        </p:txBody>
-      </p:sp>
-      <p:sp>
-        <p:nvSpPr>
-          <p:cNvPr id="24" name="Text 22"/>
-          <p:cNvSpPr/>
-          <p:nvPr/>
-        </p:nvSpPr>
-        <p:spPr>
-          <a:xfrm>
-            <a:off x="6492240" y="4050792"/>
-            <a:ext cx="4837176" cy="950976"/>
-          </a:xfrm>
-          <a:prstGeom prst="rect">
-            <a:avLst/>
-          </a:prstGeom>
-          <a:noFill/>
-          <a:ln/>
-        </p:spPr>
-        <p:txBody>
-          <a:bodyPr wrap="square" lIns="254" tIns="254" rIns="254" bIns="254" rtlCol="0" anchor="t">
-            <a:normAutofit/>
-          </a:bodyPr>
-          <a:lstStyle/>
-          <a:p>
-            <a:pPr marL="165100" indent="-165100">
-              <a:buSzPct val="100000"/>
-              <a:buChar char="•"/>
-            </a:pPr>
-            <a:r>
-              <a:rPr lang="en-US" sz="1340" dirty="0">
-                <a:solidFill>
-                  <a:srgbClr val="203040"/>
-                </a:solidFill>
-                <a:latin typeface="Aptos" pitchFamily="34" charset="0"/>
-                <a:ea typeface="Aptos" pitchFamily="34" charset="-122"/>
-                <a:cs typeface="Aptos" pitchFamily="34" charset="-120"/>
-              </a:rPr>
-              <a:t>2–3 kurze Abruffragen</a:t>
-            </a:r>
-            <a:endParaRPr lang="en-US" sz="1340" dirty="0"/>
-          </a:p>
-          <a:p>
-            <a:pPr marL="165100" indent="-165100">
-              <a:buSzPct val="100000"/>
-              <a:buChar char="•"/>
-            </a:pPr>
-            <a:r>
-              <a:rPr lang="en-US" sz="1340" dirty="0">
-                <a:solidFill>
-                  <a:srgbClr val="203040"/>
-                </a:solidFill>
-                <a:latin typeface="Aptos" pitchFamily="34" charset="0"/>
-                <a:ea typeface="Aptos" pitchFamily="34" charset="-122"/>
-                <a:cs typeface="Aptos" pitchFamily="34" charset="-120"/>
-              </a:rPr>
-              <a:t>möglichst ohne Unterlagen lösbar</a:t>
-            </a:r>
-            <a:endParaRPr lang="en-US" sz="1340" dirty="0"/>
-          </a:p>
-          <a:p>
-            <a:pPr marL="165100" indent="-165100">
-              <a:buSzPct val="100000"/>
-              <a:buChar char="•"/>
-            </a:pPr>
-            <a:r>
-              <a:rPr lang="en-US" sz="1340" dirty="0">
-                <a:solidFill>
-                  <a:srgbClr val="203040"/>
-                </a:solidFill>
-                <a:latin typeface="Aptos" pitchFamily="34" charset="0"/>
-                <a:ea typeface="Aptos" pitchFamily="34" charset="-122"/>
-                <a:cs typeface="Aptos" pitchFamily="34" charset="-120"/>
-              </a:rPr>
-              <a:t>eine Anwendung oder Erklärung einbauen</a:t>
-            </a:r>
-            <a:endParaRPr lang="en-US" sz="1340" dirty="0"/>
-          </a:p>
-        </p:txBody>
-      </p:sp>
-      <p:sp>
-        <p:nvSpPr>
-          <p:cNvPr id="25" name="Shape 23"/>
-          <p:cNvSpPr/>
-          <p:nvPr/>
-        </p:nvSpPr>
-        <p:spPr>
-          <a:xfrm>
-            <a:off x="1691640" y="5541264"/>
-            <a:ext cx="8796528" cy="585216"/>
-          </a:xfrm>
-          <a:prstGeom prst="roundRect">
-            <a:avLst>
-              <a:gd name="adj" fmla="val 10938"/>
+              <a:gd name="adj" fmla="val 5172"/>
             </a:avLst>
           </a:prstGeom>
           <a:solidFill>
@@ -6755,22 +8482,566 @@
           </a:solidFill>
           <a:ln w="12700">
             <a:solidFill>
-              <a:srgbClr val="C8D5E2"/>
-            </a:solidFill>
-            <a:prstDash val="solid"/>
-          </a:ln>
-        </p:spPr>
-      </p:sp>
-      <p:sp>
-        <p:nvSpPr>
-          <p:cNvPr id="26" name="Text 24"/>
-          <p:cNvSpPr/>
-          <p:nvPr/>
-        </p:nvSpPr>
-        <p:spPr>
-          <a:xfrm>
-            <a:off x="1901952" y="5687568"/>
-            <a:ext cx="8375904" cy="246888"/>
+              <a:srgbClr val="CDD8E2"/>
+            </a:solidFill>
+            <a:prstDash val="solid"/>
+          </a:ln>
+        </p:spPr>
+      </p:sp>
+      <p:sp>
+        <p:nvSpPr>
+          <p:cNvPr id="19" name="Shape 17"/>
+          <p:cNvSpPr/>
+          <p:nvPr/>
+        </p:nvSpPr>
+        <p:spPr>
+          <a:xfrm>
+            <a:off x="658368" y="3063240"/>
+            <a:ext cx="68580" cy="1060704"/>
+          </a:xfrm>
+          <a:prstGeom prst="rect">
+            <a:avLst/>
+          </a:prstGeom>
+          <a:solidFill>
+            <a:srgbClr val="2C7A7B"/>
+          </a:solidFill>
+          <a:ln w="12700">
+            <a:solidFill>
+              <a:srgbClr val="2C7A7B">
+                <a:alpha val="0"/>
+              </a:srgbClr>
+            </a:solidFill>
+            <a:prstDash val="solid"/>
+          </a:ln>
+        </p:spPr>
+      </p:sp>
+      <p:sp>
+        <p:nvSpPr>
+          <p:cNvPr id="20" name="Text 18"/>
+          <p:cNvSpPr/>
+          <p:nvPr/>
+        </p:nvSpPr>
+        <p:spPr>
+          <a:xfrm>
+            <a:off x="859536" y="3182112"/>
+            <a:ext cx="4992624" cy="310896"/>
+          </a:xfrm>
+          <a:prstGeom prst="rect">
+            <a:avLst/>
+          </a:prstGeom>
+          <a:noFill/>
+          <a:ln/>
+        </p:spPr>
+        <p:txBody>
+          <a:bodyPr wrap="square" lIns="0" tIns="0" rIns="0" bIns="0" rtlCol="0" anchor="t">
+            <a:normAutofit/>
+          </a:bodyPr>
+          <a:lstStyle/>
+          <a:p>
+            <a:pPr indent="0" marL="0">
+              <a:buNone/>
+            </a:pPr>
+            <a:r>
+              <a:rPr lang="en-US" sz="1180" b="1" dirty="0">
+                <a:solidFill>
+                  <a:srgbClr val="17324D"/>
+                </a:solidFill>
+                <a:latin typeface="Aptos" pitchFamily="34" charset="0"/>
+                <a:ea typeface="Aptos" pitchFamily="34" charset="-122"/>
+                <a:cs typeface="Aptos" pitchFamily="34" charset="-120"/>
+              </a:rPr>
+              <a:t>Basis 2</a:t>
+            </a:r>
+            <a:endParaRPr lang="en-US" sz="1180" dirty="0"/>
+          </a:p>
+        </p:txBody>
+      </p:sp>
+      <p:sp>
+        <p:nvSpPr>
+          <p:cNvPr id="21" name="Text 19"/>
+          <p:cNvSpPr/>
+          <p:nvPr/>
+        </p:nvSpPr>
+        <p:spPr>
+          <a:xfrm>
+            <a:off x="859536" y="3557016"/>
+            <a:ext cx="4974336" cy="438912"/>
+          </a:xfrm>
+          <a:prstGeom prst="rect">
+            <a:avLst/>
+          </a:prstGeom>
+          <a:noFill/>
+          <a:ln/>
+        </p:spPr>
+        <p:txBody>
+          <a:bodyPr wrap="square" lIns="0" tIns="0" rIns="0" bIns="0" rtlCol="0" anchor="t">
+            <a:normAutofit/>
+          </a:bodyPr>
+          <a:lstStyle/>
+          <a:p>
+            <a:pPr indent="0" marL="0">
+              <a:buNone/>
+            </a:pPr>
+            <a:r>
+              <a:rPr lang="en-US" sz="1160" dirty="0">
+                <a:solidFill>
+                  <a:srgbClr val="203040"/>
+                </a:solidFill>
+                <a:latin typeface="Aptos" pitchFamily="34" charset="0"/>
+                <a:ea typeface="Aptos" pitchFamily="34" charset="-122"/>
+                <a:cs typeface="Aptos" pitchFamily="34" charset="-120"/>
+              </a:rPr>
+              <a:t>Basis 2: 1,0·10⁴ V/m.</a:t>
+            </a:r>
+            <a:endParaRPr lang="en-US" sz="1160" dirty="0"/>
+          </a:p>
+        </p:txBody>
+      </p:sp>
+      <p:sp>
+        <p:nvSpPr>
+          <p:cNvPr id="22" name="Shape 20"/>
+          <p:cNvSpPr/>
+          <p:nvPr/>
+        </p:nvSpPr>
+        <p:spPr>
+          <a:xfrm>
+            <a:off x="6181344" y="3063240"/>
+            <a:ext cx="5340096" cy="1060704"/>
+          </a:xfrm>
+          <a:prstGeom prst="roundRect">
+            <a:avLst>
+              <a:gd name="adj" fmla="val 5172"/>
+            </a:avLst>
+          </a:prstGeom>
+          <a:solidFill>
+            <a:srgbClr val="FFFFFF"/>
+          </a:solidFill>
+          <a:ln w="12700">
+            <a:solidFill>
+              <a:srgbClr val="CDD8E2"/>
+            </a:solidFill>
+            <a:prstDash val="solid"/>
+          </a:ln>
+        </p:spPr>
+      </p:sp>
+      <p:sp>
+        <p:nvSpPr>
+          <p:cNvPr id="23" name="Shape 21"/>
+          <p:cNvSpPr/>
+          <p:nvPr/>
+        </p:nvSpPr>
+        <p:spPr>
+          <a:xfrm>
+            <a:off x="6181344" y="3063240"/>
+            <a:ext cx="68580" cy="1060704"/>
+          </a:xfrm>
+          <a:prstGeom prst="rect">
+            <a:avLst/>
+          </a:prstGeom>
+          <a:solidFill>
+            <a:srgbClr val="2C7A7B"/>
+          </a:solidFill>
+          <a:ln w="12700">
+            <a:solidFill>
+              <a:srgbClr val="2C7A7B">
+                <a:alpha val="0"/>
+              </a:srgbClr>
+            </a:solidFill>
+            <a:prstDash val="solid"/>
+          </a:ln>
+        </p:spPr>
+      </p:sp>
+      <p:sp>
+        <p:nvSpPr>
+          <p:cNvPr id="24" name="Text 22"/>
+          <p:cNvSpPr/>
+          <p:nvPr/>
+        </p:nvSpPr>
+        <p:spPr>
+          <a:xfrm>
+            <a:off x="6382512" y="3182112"/>
+            <a:ext cx="4992624" cy="310896"/>
+          </a:xfrm>
+          <a:prstGeom prst="rect">
+            <a:avLst/>
+          </a:prstGeom>
+          <a:noFill/>
+          <a:ln/>
+        </p:spPr>
+        <p:txBody>
+          <a:bodyPr wrap="square" lIns="0" tIns="0" rIns="0" bIns="0" rtlCol="0" anchor="t">
+            <a:normAutofit/>
+          </a:bodyPr>
+          <a:lstStyle/>
+          <a:p>
+            <a:pPr indent="0" marL="0">
+              <a:buNone/>
+            </a:pPr>
+            <a:r>
+              <a:rPr lang="en-US" sz="1180" b="1" dirty="0">
+                <a:solidFill>
+                  <a:srgbClr val="17324D"/>
+                </a:solidFill>
+                <a:latin typeface="Aptos" pitchFamily="34" charset="0"/>
+                <a:ea typeface="Aptos" pitchFamily="34" charset="-122"/>
+                <a:cs typeface="Aptos" pitchFamily="34" charset="-120"/>
+              </a:rPr>
+              <a:t>Basis 3</a:t>
+            </a:r>
+            <a:endParaRPr lang="en-US" sz="1180" dirty="0"/>
+          </a:p>
+        </p:txBody>
+      </p:sp>
+      <p:sp>
+        <p:nvSpPr>
+          <p:cNvPr id="25" name="Text 23"/>
+          <p:cNvSpPr/>
+          <p:nvPr/>
+        </p:nvSpPr>
+        <p:spPr>
+          <a:xfrm>
+            <a:off x="6382512" y="3557016"/>
+            <a:ext cx="4974336" cy="438912"/>
+          </a:xfrm>
+          <a:prstGeom prst="rect">
+            <a:avLst/>
+          </a:prstGeom>
+          <a:noFill/>
+          <a:ln/>
+        </p:spPr>
+        <p:txBody>
+          <a:bodyPr wrap="square" lIns="0" tIns="0" rIns="0" bIns="0" rtlCol="0" anchor="t">
+            <a:normAutofit/>
+          </a:bodyPr>
+          <a:lstStyle/>
+          <a:p>
+            <a:pPr indent="0" marL="0">
+              <a:buNone/>
+            </a:pPr>
+            <a:r>
+              <a:rPr lang="en-US" sz="1160" dirty="0">
+                <a:solidFill>
+                  <a:srgbClr val="203040"/>
+                </a:solidFill>
+                <a:latin typeface="Aptos" pitchFamily="34" charset="0"/>
+                <a:ea typeface="Aptos" pitchFamily="34" charset="-122"/>
+                <a:cs typeface="Aptos" pitchFamily="34" charset="-120"/>
+              </a:rPr>
+              <a:t>Basis 3: 2,0·10⁻⁷ F = 0,20 µF.</a:t>
+            </a:r>
+            <a:endParaRPr lang="en-US" sz="1160" dirty="0"/>
+          </a:p>
+        </p:txBody>
+      </p:sp>
+      <p:sp>
+        <p:nvSpPr>
+          <p:cNvPr id="26" name="Shape 24"/>
+          <p:cNvSpPr/>
+          <p:nvPr/>
+        </p:nvSpPr>
+        <p:spPr>
+          <a:xfrm>
+            <a:off x="658368" y="4315968"/>
+            <a:ext cx="5340096" cy="1060704"/>
+          </a:xfrm>
+          <a:prstGeom prst="roundRect">
+            <a:avLst>
+              <a:gd name="adj" fmla="val 5172"/>
+            </a:avLst>
+          </a:prstGeom>
+          <a:solidFill>
+            <a:srgbClr val="FFFFFF"/>
+          </a:solidFill>
+          <a:ln w="12700">
+            <a:solidFill>
+              <a:srgbClr val="CDD8E2"/>
+            </a:solidFill>
+            <a:prstDash val="solid"/>
+          </a:ln>
+        </p:spPr>
+      </p:sp>
+      <p:sp>
+        <p:nvSpPr>
+          <p:cNvPr id="27" name="Shape 25"/>
+          <p:cNvSpPr/>
+          <p:nvPr/>
+        </p:nvSpPr>
+        <p:spPr>
+          <a:xfrm>
+            <a:off x="658368" y="4315968"/>
+            <a:ext cx="68580" cy="1060704"/>
+          </a:xfrm>
+          <a:prstGeom prst="rect">
+            <a:avLst/>
+          </a:prstGeom>
+          <a:solidFill>
+            <a:srgbClr val="735D9B"/>
+          </a:solidFill>
+          <a:ln w="12700">
+            <a:solidFill>
+              <a:srgbClr val="735D9B">
+                <a:alpha val="0"/>
+              </a:srgbClr>
+            </a:solidFill>
+            <a:prstDash val="solid"/>
+          </a:ln>
+        </p:spPr>
+      </p:sp>
+      <p:sp>
+        <p:nvSpPr>
+          <p:cNvPr id="28" name="Text 26"/>
+          <p:cNvSpPr/>
+          <p:nvPr/>
+        </p:nvSpPr>
+        <p:spPr>
+          <a:xfrm>
+            <a:off x="859536" y="4434840"/>
+            <a:ext cx="4992624" cy="310896"/>
+          </a:xfrm>
+          <a:prstGeom prst="rect">
+            <a:avLst/>
+          </a:prstGeom>
+          <a:noFill/>
+          <a:ln/>
+        </p:spPr>
+        <p:txBody>
+          <a:bodyPr wrap="square" lIns="0" tIns="0" rIns="0" bIns="0" rtlCol="0" anchor="t">
+            <a:normAutofit/>
+          </a:bodyPr>
+          <a:lstStyle/>
+          <a:p>
+            <a:pPr indent="0" marL="0">
+              <a:buNone/>
+            </a:pPr>
+            <a:r>
+              <a:rPr lang="en-US" sz="1180" b="1" dirty="0">
+                <a:solidFill>
+                  <a:srgbClr val="17324D"/>
+                </a:solidFill>
+                <a:latin typeface="Aptos" pitchFamily="34" charset="0"/>
+                <a:ea typeface="Aptos" pitchFamily="34" charset="-122"/>
+                <a:cs typeface="Aptos" pitchFamily="34" charset="-120"/>
+              </a:rPr>
+              <a:t>Anwendung</a:t>
+            </a:r>
+            <a:endParaRPr lang="en-US" sz="1180" dirty="0"/>
+          </a:p>
+        </p:txBody>
+      </p:sp>
+      <p:sp>
+        <p:nvSpPr>
+          <p:cNvPr id="29" name="Text 27"/>
+          <p:cNvSpPr/>
+          <p:nvPr/>
+        </p:nvSpPr>
+        <p:spPr>
+          <a:xfrm>
+            <a:off x="859536" y="4809744"/>
+            <a:ext cx="4974336" cy="438912"/>
+          </a:xfrm>
+          <a:prstGeom prst="rect">
+            <a:avLst/>
+          </a:prstGeom>
+          <a:noFill/>
+          <a:ln/>
+        </p:spPr>
+        <p:txBody>
+          <a:bodyPr wrap="square" lIns="0" tIns="0" rIns="0" bIns="0" rtlCol="0" anchor="t">
+            <a:normAutofit/>
+          </a:bodyPr>
+          <a:lstStyle/>
+          <a:p>
+            <a:pPr indent="0" marL="0">
+              <a:buNone/>
+            </a:pPr>
+            <a:r>
+              <a:rPr lang="en-US" sz="1160" dirty="0">
+                <a:solidFill>
+                  <a:srgbClr val="203040"/>
+                </a:solidFill>
+                <a:latin typeface="Aptos" pitchFamily="34" charset="0"/>
+                <a:ea typeface="Aptos" pitchFamily="34" charset="-122"/>
+                <a:cs typeface="Aptos" pitchFamily="34" charset="-120"/>
+              </a:rPr>
+              <a:t>Anwendung: Das zeitlich veränderliche Magnetfeld verändert den magnetischen Fluss durch die Empfängerspule; U_ind wächst qualitativ mit Windungszahl und Änderungsrate des Flusses.</a:t>
+            </a:r>
+            <a:endParaRPr lang="en-US" sz="1160" dirty="0"/>
+          </a:p>
+        </p:txBody>
+      </p:sp>
+      <p:sp>
+        <p:nvSpPr>
+          <p:cNvPr id="30" name="Shape 28"/>
+          <p:cNvSpPr/>
+          <p:nvPr/>
+        </p:nvSpPr>
+        <p:spPr>
+          <a:xfrm>
+            <a:off x="6181344" y="4315968"/>
+            <a:ext cx="5340096" cy="1060704"/>
+          </a:xfrm>
+          <a:prstGeom prst="roundRect">
+            <a:avLst>
+              <a:gd name="adj" fmla="val 5172"/>
+            </a:avLst>
+          </a:prstGeom>
+          <a:solidFill>
+            <a:srgbClr val="FFFFFF"/>
+          </a:solidFill>
+          <a:ln w="12700">
+            <a:solidFill>
+              <a:srgbClr val="CDD8E2"/>
+            </a:solidFill>
+            <a:prstDash val="solid"/>
+          </a:ln>
+        </p:spPr>
+      </p:sp>
+      <p:sp>
+        <p:nvSpPr>
+          <p:cNvPr id="31" name="Shape 29"/>
+          <p:cNvSpPr/>
+          <p:nvPr/>
+        </p:nvSpPr>
+        <p:spPr>
+          <a:xfrm>
+            <a:off x="6181344" y="4315968"/>
+            <a:ext cx="68580" cy="1060704"/>
+          </a:xfrm>
+          <a:prstGeom prst="rect">
+            <a:avLst/>
+          </a:prstGeom>
+          <a:solidFill>
+            <a:srgbClr val="735D9B"/>
+          </a:solidFill>
+          <a:ln w="12700">
+            <a:solidFill>
+              <a:srgbClr val="735D9B">
+                <a:alpha val="0"/>
+              </a:srgbClr>
+            </a:solidFill>
+            <a:prstDash val="solid"/>
+          </a:ln>
+        </p:spPr>
+      </p:sp>
+      <p:sp>
+        <p:nvSpPr>
+          <p:cNvPr id="32" name="Text 30"/>
+          <p:cNvSpPr/>
+          <p:nvPr/>
+        </p:nvSpPr>
+        <p:spPr>
+          <a:xfrm>
+            <a:off x="6382512" y="4434840"/>
+            <a:ext cx="4992624" cy="310896"/>
+          </a:xfrm>
+          <a:prstGeom prst="rect">
+            <a:avLst/>
+          </a:prstGeom>
+          <a:noFill/>
+          <a:ln/>
+        </p:spPr>
+        <p:txBody>
+          <a:bodyPr wrap="square" lIns="0" tIns="0" rIns="0" bIns="0" rtlCol="0" anchor="t">
+            <a:normAutofit/>
+          </a:bodyPr>
+          <a:lstStyle/>
+          <a:p>
+            <a:pPr indent="0" marL="0">
+              <a:buNone/>
+            </a:pPr>
+            <a:r>
+              <a:rPr lang="en-US" sz="1180" b="1" dirty="0">
+                <a:solidFill>
+                  <a:srgbClr val="17324D"/>
+                </a:solidFill>
+                <a:latin typeface="Aptos" pitchFamily="34" charset="0"/>
+                <a:ea typeface="Aptos" pitchFamily="34" charset="-122"/>
+                <a:cs typeface="Aptos" pitchFamily="34" charset="-120"/>
+              </a:rPr>
+              <a:t>Konzeptfrage</a:t>
+            </a:r>
+            <a:endParaRPr lang="en-US" sz="1180" dirty="0"/>
+          </a:p>
+        </p:txBody>
+      </p:sp>
+      <p:sp>
+        <p:nvSpPr>
+          <p:cNvPr id="33" name="Text 31"/>
+          <p:cNvSpPr/>
+          <p:nvPr/>
+        </p:nvSpPr>
+        <p:spPr>
+          <a:xfrm>
+            <a:off x="6382512" y="4809744"/>
+            <a:ext cx="4974336" cy="438912"/>
+          </a:xfrm>
+          <a:prstGeom prst="rect">
+            <a:avLst/>
+          </a:prstGeom>
+          <a:noFill/>
+          <a:ln/>
+        </p:spPr>
+        <p:txBody>
+          <a:bodyPr wrap="square" lIns="0" tIns="0" rIns="0" bIns="0" rtlCol="0" anchor="t">
+            <a:normAutofit/>
+          </a:bodyPr>
+          <a:lstStyle/>
+          <a:p>
+            <a:pPr indent="0" marL="0">
+              <a:buNone/>
+            </a:pPr>
+            <a:r>
+              <a:rPr lang="en-US" sz="1160" dirty="0">
+                <a:solidFill>
+                  <a:srgbClr val="203040"/>
+                </a:solidFill>
+                <a:latin typeface="Aptos" pitchFamily="34" charset="0"/>
+                <a:ea typeface="Aptos" pitchFamily="34" charset="-122"/>
+                <a:cs typeface="Aptos" pitchFamily="34" charset="-120"/>
+              </a:rPr>
+              <a:t>Konzeptfrage: Die induzierte Wirkung muss die verursachende Änderung hemmen. Eine Verstärkung ohne zusätzliche Arbeit würde eine selbsttätige Energiezunahme ermöglichen und der Energieerhaltung widersprechen.</a:t>
+            </a:r>
+            <a:endParaRPr lang="en-US" sz="1160" dirty="0"/>
+          </a:p>
+        </p:txBody>
+      </p:sp>
+      <p:sp>
+        <p:nvSpPr>
+          <p:cNvPr id="34" name="Shape 32"/>
+          <p:cNvSpPr/>
+          <p:nvPr/>
+        </p:nvSpPr>
+        <p:spPr>
+          <a:xfrm>
+            <a:off x="749808" y="5650992"/>
+            <a:ext cx="10607040" cy="612648"/>
+          </a:xfrm>
+          <a:prstGeom prst="roundRect">
+            <a:avLst>
+              <a:gd name="adj" fmla="val 8955"/>
+            </a:avLst>
+          </a:prstGeom>
+          <a:solidFill>
+            <a:srgbClr val="FFF4DE"/>
+          </a:solidFill>
+          <a:ln w="15240">
+            <a:solidFill>
+              <a:srgbClr val="D78C24"/>
+            </a:solidFill>
+            <a:prstDash val="solid"/>
+          </a:ln>
+        </p:spPr>
+      </p:sp>
+      <p:sp>
+        <p:nvSpPr>
+          <p:cNvPr id="35" name="Text 33"/>
+          <p:cNvSpPr/>
+          <p:nvPr/>
+        </p:nvSpPr>
+        <p:spPr>
+          <a:xfrm>
+            <a:off x="932688" y="5815584"/>
+            <a:ext cx="594360" cy="182880"/>
           </a:xfrm>
           <a:prstGeom prst="rect">
             <a:avLst/>
@@ -6788,17 +9059,58 @@
               <a:buNone/>
             </a:pPr>
             <a:r>
-              <a:rPr lang="en-US" sz="1120" b="1" dirty="0">
-                <a:solidFill>
-                  <a:srgbClr val="16324F"/>
-                </a:solidFill>
-                <a:latin typeface="Aptos" pitchFamily="34" charset="0"/>
-                <a:ea typeface="Aptos" pitchFamily="34" charset="-122"/>
-                <a:cs typeface="Aptos" pitchFamily="34" charset="-120"/>
-              </a:rPr>
-              <a:t>Codex-Workflow: neue Stunde in praesentation.json → lessons ergänzen → npm run build:pptx</a:t>
-            </a:r>
-            <a:endParaRPr lang="en-US" sz="1120" dirty="0"/>
+              <a:rPr lang="en-US" sz="1050" b="1" dirty="0">
+                <a:solidFill>
+                  <a:srgbClr val="D78C24"/>
+                </a:solidFill>
+                <a:latin typeface="Aptos" pitchFamily="34" charset="0"/>
+                <a:ea typeface="Aptos" pitchFamily="34" charset="-122"/>
+                <a:cs typeface="Aptos" pitchFamily="34" charset="-120"/>
+              </a:rPr>
+              <a:t>EXIT</a:t>
+            </a:r>
+            <a:endParaRPr lang="en-US" sz="1050" dirty="0"/>
+          </a:p>
+        </p:txBody>
+      </p:sp>
+      <p:sp>
+        <p:nvSpPr>
+          <p:cNvPr id="36" name="Text 34"/>
+          <p:cNvSpPr/>
+          <p:nvPr/>
+        </p:nvSpPr>
+        <p:spPr>
+          <a:xfrm>
+            <a:off x="1664208" y="5733288"/>
+            <a:ext cx="9418320" cy="429768"/>
+          </a:xfrm>
+          <a:prstGeom prst="rect">
+            <a:avLst/>
+          </a:prstGeom>
+          <a:noFill/>
+          <a:ln/>
+        </p:spPr>
+        <p:txBody>
+          <a:bodyPr wrap="square" lIns="0" tIns="0" rIns="0" bIns="0" rtlCol="0" anchor="ctr">
+            <a:normAutofit/>
+          </a:bodyPr>
+          <a:lstStyle/>
+          <a:p>
+            <a:pPr indent="0" marL="0">
+              <a:buNone/>
+            </a:pPr>
+            <a:r>
+              <a:rPr lang="en-US" sz="1300" b="1" dirty="0">
+                <a:solidFill>
+                  <a:srgbClr val="17324D"/>
+                </a:solidFill>
+                <a:latin typeface="Aptos" pitchFamily="34" charset="0"/>
+                <a:ea typeface="Aptos" pitchFamily="34" charset="-122"/>
+                <a:cs typeface="Aptos" pitchFamily="34" charset="-120"/>
+              </a:rPr>
+              <a:t>Formuliere die Bedingung für geradlinigen Durchgang im Wien-Filter sowohl als Kräfte- als auch als Geschwindigkeitsgleichung.</a:t>
+            </a:r>
+            <a:endParaRPr lang="en-US" sz="1300" dirty="0"/>
           </a:p>
         </p:txBody>
       </p:sp>
